--- a/Презентация по проекту.pptx
+++ b/Презентация по проекту.pptx
@@ -30,343 +30,6 @@
 <file path=ppt/slideLayouts/slideLayout1.xml><?xml version="1.0" encoding="utf-8"?>
 <p:sldLayout xmlns:a="http://schemas.openxmlformats.org/drawingml/2006/main" xmlns:p="http://schemas.openxmlformats.org/presentationml/2006/main" xmlns:r="http://schemas.openxmlformats.org/officeDocument/2006/relationships" xmlns:p14="http://schemas.microsoft.com/office/powerpoint/2010/main" xmlns:p15="http://schemas.microsoft.com/office/powerpoint/2012/main" xmlns:mc="http://schemas.openxmlformats.org/markup-compatibility/2006" type="tx" preserve="1">
   <p:cSld name="Обычный">
-    <p:spTree>
-      <p:nvGrpSpPr>
-        <p:cNvPr id="1" name=""/>
-        <p:cNvGrpSpPr/>
-        <p:nvPr/>
-      </p:nvGrpSpPr>
-      <p:grpSpPr>
-        <a:xfrm>
-          <a:off x="0" y="0"/>
-          <a:ext cx="0" cy="0"/>
-          <a:chOff x="0" y="0"/>
-          <a:chExt cx="0" cy="0"/>
-        </a:xfrm>
-      </p:grpSpPr>
-      <p:sp>
-        <p:nvSpPr>
-          <p:cNvPr id="7" name="PlaceHolder 1"/>
-          <p:cNvSpPr>
-            <a:spLocks noGrp="1"/>
-          </p:cNvSpPr>
-          <p:nvPr>
-            <p:ph type="title"/>
-          </p:nvPr>
-        </p:nvSpPr>
-        <p:spPr>
-          <a:xfrm>
-            <a:off x="504000" y="226080"/>
-            <a:ext cx="9071640" cy="946440"/>
-          </a:xfrm>
-          <a:prstGeom prst="rect">
-            <a:avLst/>
-          </a:prstGeom>
-          <a:noFill/>
-          <a:ln w="0">
-            <a:noFill/>
-          </a:ln>
-        </p:spPr>
-        <p:txBody>
-          <a:bodyPr lIns="0" tIns="0" rIns="0" bIns="0" anchor="ctr">
-            <a:spAutoFit/>
-          </a:bodyPr>
-          <a:p>
-            <a:pPr indent="0" algn="ctr">
-              <a:buNone/>
-            </a:pPr>
-            <a:endParaRPr lang="ru-RU" sz="3200" b="0" u="none" strike="noStrike">
-              <a:solidFill>
-                <a:srgbClr val="1A3A5C"/>
-              </a:solidFill>
-              <a:effectLst/>
-              <a:uFillTx/>
-              <a:latin typeface="Arial"/>
-            </a:endParaRPr>
-          </a:p>
-        </p:txBody>
-      </p:sp>
-      <p:sp>
-        <p:nvSpPr>
-          <p:cNvPr id="8" name="PlaceHolder 2"/>
-          <p:cNvSpPr>
-            <a:spLocks noGrp="1"/>
-          </p:cNvSpPr>
-          <p:nvPr>
-            <p:ph/>
-          </p:nvPr>
-        </p:nvSpPr>
-        <p:spPr>
-          <a:xfrm>
-            <a:off x="504000" y="1326600"/>
-            <a:ext cx="9071640" cy="3288240"/>
-          </a:xfrm>
-          <a:prstGeom prst="rect">
-            <a:avLst/>
-          </a:prstGeom>
-          <a:noFill/>
-          <a:ln w="0">
-            <a:noFill/>
-          </a:ln>
-        </p:spPr>
-        <p:txBody>
-          <a:bodyPr lIns="0" tIns="0" rIns="0" bIns="0" anchor="t">
-            <a:normAutofit/>
-          </a:bodyPr>
-          <a:p>
-            <a:pPr indent="0" algn="l">
-              <a:spcBef>
-                <a:spcPts val="884"/>
-              </a:spcBef>
-              <a:buNone/>
-            </a:pPr>
-            <a:endParaRPr lang="ru-RU" sz="2000" b="0" u="none" strike="noStrike">
-              <a:solidFill>
-                <a:srgbClr val="2D2D2D"/>
-              </a:solidFill>
-              <a:effectLst/>
-              <a:uFillTx/>
-              <a:latin typeface="Arial"/>
-            </a:endParaRPr>
-          </a:p>
-        </p:txBody>
-      </p:sp>
-      <p:sp>
-        <p:nvSpPr>
-          <p:cNvPr id="4" name="PlaceHolder 3"/>
-          <p:cNvSpPr>
-            <a:spLocks noGrp="1"/>
-          </p:cNvSpPr>
-          <p:nvPr>
-            <p:ph type="ftr" idx="2"/>
-          </p:nvPr>
-        </p:nvSpPr>
-        <p:spPr/>
-        <p:txBody>
-          <a:bodyPr/>
-          <a:p>
-            <a:r>
-              <a:t>Footer</a:t>
-            </a:r>
-          </a:p>
-        </p:txBody>
-      </p:sp>
-      <p:sp>
-        <p:nvSpPr>
-          <p:cNvPr id="5" name="PlaceHolder 4"/>
-          <p:cNvSpPr>
-            <a:spLocks noGrp="1"/>
-          </p:cNvSpPr>
-          <p:nvPr>
-            <p:ph type="sldNum" idx="3"/>
-          </p:nvPr>
-        </p:nvSpPr>
-        <p:spPr/>
-        <p:txBody>
-          <a:bodyPr/>
-          <a:p>
-            <a:fld id="{BAAD210A-FEDB-4671-A88A-A5C1231F0721}" type="slidenum">
-              <a:t>&lt;#&gt;</a:t>
-            </a:fld>
-          </a:p>
-        </p:txBody>
-      </p:sp>
-      <p:sp>
-        <p:nvSpPr>
-          <p:cNvPr id="6" name="PlaceHolder 5"/>
-          <p:cNvSpPr>
-            <a:spLocks noGrp="1"/>
-          </p:cNvSpPr>
-          <p:nvPr>
-            <p:ph type="dt" idx="1"/>
-          </p:nvPr>
-        </p:nvSpPr>
-        <p:spPr/>
-        <p:txBody>
-          <a:bodyPr/>
-          <a:p>
-            <a:r>
-              <a:rPr lang="ru-RU"/>
-              <a:t/>
-            </a:r>
-          </a:p>
-        </p:txBody>
-      </p:sp>
-    </p:spTree>
-  </p:cSld>
-</p:sldLayout>
-</file>
-
-<file path=ppt/slideLayouts/slideLayout2.xml><?xml version="1.0" encoding="utf-8"?>
-<p:sldLayout xmlns:a="http://schemas.openxmlformats.org/drawingml/2006/main" xmlns:p="http://schemas.openxmlformats.org/presentationml/2006/main" xmlns:r="http://schemas.openxmlformats.org/officeDocument/2006/relationships" xmlns:p14="http://schemas.microsoft.com/office/powerpoint/2010/main" xmlns:p15="http://schemas.microsoft.com/office/powerpoint/2012/main" xmlns:mc="http://schemas.openxmlformats.org/markup-compatibility/2006" type="title" preserve="1">
-  <p:cSld name="Обычный">
-    <p:spTree>
-      <p:nvGrpSpPr>
-        <p:cNvPr id="1" name=""/>
-        <p:cNvGrpSpPr/>
-        <p:nvPr/>
-      </p:nvGrpSpPr>
-      <p:grpSpPr>
-        <a:xfrm>
-          <a:off x="0" y="0"/>
-          <a:ext cx="0" cy="0"/>
-          <a:chOff x="0" y="0"/>
-          <a:chExt cx="0" cy="0"/>
-        </a:xfrm>
-      </p:grpSpPr>
-      <p:sp>
-        <p:nvSpPr>
-          <p:cNvPr id="9" name="PlaceHolder 1"/>
-          <p:cNvSpPr>
-            <a:spLocks noGrp="1"/>
-          </p:cNvSpPr>
-          <p:nvPr>
-            <p:ph type="title"/>
-          </p:nvPr>
-        </p:nvSpPr>
-        <p:spPr>
-          <a:xfrm>
-            <a:off x="504000" y="226080"/>
-            <a:ext cx="9071640" cy="946440"/>
-          </a:xfrm>
-          <a:prstGeom prst="rect">
-            <a:avLst/>
-          </a:prstGeom>
-          <a:noFill/>
-          <a:ln w="0">
-            <a:noFill/>
-          </a:ln>
-        </p:spPr>
-        <p:txBody>
-          <a:bodyPr lIns="0" tIns="0" rIns="0" bIns="0" anchor="ctr">
-            <a:spAutoFit/>
-          </a:bodyPr>
-          <a:p>
-            <a:pPr indent="0" algn="ctr">
-              <a:buNone/>
-            </a:pPr>
-            <a:endParaRPr lang="ru-RU" sz="3200" b="0" u="none" strike="noStrike">
-              <a:solidFill>
-                <a:srgbClr val="1A3A5C"/>
-              </a:solidFill>
-              <a:effectLst/>
-              <a:uFillTx/>
-              <a:latin typeface="Arial"/>
-            </a:endParaRPr>
-          </a:p>
-        </p:txBody>
-      </p:sp>
-      <p:sp>
-        <p:nvSpPr>
-          <p:cNvPr id="10" name="PlaceHolder 2"/>
-          <p:cNvSpPr>
-            <a:spLocks noGrp="1"/>
-          </p:cNvSpPr>
-          <p:nvPr>
-            <p:ph type="subTitle"/>
-          </p:nvPr>
-        </p:nvSpPr>
-        <p:spPr>
-          <a:xfrm>
-            <a:off x="504000" y="1326600"/>
-            <a:ext cx="9071640" cy="3288240"/>
-          </a:xfrm>
-          <a:prstGeom prst="rect">
-            <a:avLst/>
-          </a:prstGeom>
-          <a:noFill/>
-          <a:ln w="0">
-            <a:noFill/>
-          </a:ln>
-        </p:spPr>
-        <p:txBody>
-          <a:bodyPr lIns="0" tIns="0" rIns="0" bIns="0" anchor="ctr">
-            <a:spAutoFit/>
-          </a:bodyPr>
-          <a:p>
-            <a:pPr indent="0" algn="ctr">
-              <a:buNone/>
-            </a:pPr>
-            <a:endParaRPr lang="ru-RU" sz="2000" b="0" u="none" strike="noStrike">
-              <a:solidFill>
-                <a:srgbClr val="2D2D2D"/>
-              </a:solidFill>
-              <a:effectLst/>
-              <a:uFillTx/>
-              <a:latin typeface="Arial"/>
-            </a:endParaRPr>
-          </a:p>
-        </p:txBody>
-      </p:sp>
-      <p:sp>
-        <p:nvSpPr>
-          <p:cNvPr id="4" name="PlaceHolder 3"/>
-          <p:cNvSpPr>
-            <a:spLocks noGrp="1"/>
-          </p:cNvSpPr>
-          <p:nvPr>
-            <p:ph type="ftr" idx="2"/>
-          </p:nvPr>
-        </p:nvSpPr>
-        <p:spPr/>
-        <p:txBody>
-          <a:bodyPr/>
-          <a:p>
-            <a:r>
-              <a:t>Footer</a:t>
-            </a:r>
-          </a:p>
-        </p:txBody>
-      </p:sp>
-      <p:sp>
-        <p:nvSpPr>
-          <p:cNvPr id="5" name="PlaceHolder 4"/>
-          <p:cNvSpPr>
-            <a:spLocks noGrp="1"/>
-          </p:cNvSpPr>
-          <p:nvPr>
-            <p:ph type="sldNum" idx="3"/>
-          </p:nvPr>
-        </p:nvSpPr>
-        <p:spPr/>
-        <p:txBody>
-          <a:bodyPr/>
-          <a:p>
-            <a:fld id="{E2C8F2BC-79FA-4410-8A93-E6E2A021CE38}" type="slidenum">
-              <a:t>&lt;#&gt;</a:t>
-            </a:fld>
-          </a:p>
-        </p:txBody>
-      </p:sp>
-      <p:sp>
-        <p:nvSpPr>
-          <p:cNvPr id="6" name="PlaceHolder 5"/>
-          <p:cNvSpPr>
-            <a:spLocks noGrp="1"/>
-          </p:cNvSpPr>
-          <p:nvPr>
-            <p:ph type="dt" idx="1"/>
-          </p:nvPr>
-        </p:nvSpPr>
-        <p:spPr/>
-        <p:txBody>
-          <a:bodyPr/>
-          <a:p>
-            <a:r>
-              <a:rPr lang="ru-RU"/>
-              <a:t/>
-            </a:r>
-          </a:p>
-        </p:txBody>
-      </p:sp>
-    </p:spTree>
-  </p:cSld>
-</p:sldLayout>
-</file>
-
-<file path=ppt/slideMasters/slideMaster1.xml><?xml version="1.0" encoding="utf-8"?>
-<p:sldMaster xmlns:a="http://schemas.openxmlformats.org/drawingml/2006/main" xmlns:p="http://schemas.openxmlformats.org/presentationml/2006/main" xmlns:r="http://schemas.openxmlformats.org/officeDocument/2006/relationships" xmlns:p14="http://schemas.microsoft.com/office/powerpoint/2010/main" xmlns:p15="http://schemas.microsoft.com/office/powerpoint/2012/main" xmlns:mc="http://schemas.openxmlformats.org/markup-compatibility/2006">
-  <p:cSld>
     <p:bg>
       <p:bgPr>
         <a:solidFill>
@@ -400,8 +63,8 @@
         </p:nvSpPr>
         <p:spPr>
           <a:xfrm>
-            <a:off x="504000" y="226080"/>
-            <a:ext cx="9071640" cy="946440"/>
+            <a:off x="504000" y="455040"/>
+            <a:ext cx="9070920" cy="488160"/>
           </a:xfrm>
           <a:prstGeom prst="rect">
             <a:avLst/>
@@ -413,11 +76,17 @@
         </p:spPr>
         <p:txBody>
           <a:bodyPr lIns="0" tIns="0" rIns="0" bIns="0" anchor="ctr">
-            <a:noAutofit/>
+            <a:spAutoFit/>
           </a:bodyPr>
           <a:lstStyle>
-            <a:lvl1pPr indent="0" algn="ctr">
+            <a:lvl1pPr indent="0" algn="l">
+              <a:lnSpc>
+                <a:spcPct val="100000"/>
+              </a:lnSpc>
               <a:buNone/>
+              <a:tabLst>
+                <a:tab pos="0" algn="l"/>
+              </a:tabLst>
               <a:defRPr lang="ru-RU" sz="3200" b="0" u="none" strike="noStrike">
                 <a:solidFill>
                   <a:srgbClr val="1A3A5C"/>
@@ -429,8 +98,14 @@
             </a:lvl1pPr>
           </a:lstStyle>
           <a:p>
-            <a:pPr indent="0" algn="ctr">
+            <a:pPr indent="0" algn="l">
+              <a:lnSpc>
+                <a:spcPct val="100000"/>
+              </a:lnSpc>
               <a:buNone/>
+              <a:tabLst>
+                <a:tab pos="0" algn="l"/>
+              </a:tabLst>
             </a:pPr>
             <a:r>
               <a:rPr lang="ru-RU" sz="3200" b="0" u="none" strike="noStrike">
@@ -441,7 +116,51 @@
                 <a:uFillTx/>
                 <a:latin typeface="Arial"/>
               </a:rPr>
-              <a:t>Для правки текста заглавия щёлкните мышью</a:t>
+              <a:t>Для правки </a:t>
+            </a:r>
+            <a:r>
+              <a:rPr lang="ru-RU" sz="3200" b="0" u="none" strike="noStrike">
+                <a:solidFill>
+                  <a:srgbClr val="1A3A5C"/>
+                </a:solidFill>
+                <a:effectLst/>
+                <a:uFillTx/>
+                <a:latin typeface="Arial"/>
+              </a:rPr>
+              <a:t>текста </a:t>
+            </a:r>
+            <a:r>
+              <a:rPr lang="ru-RU" sz="3200" b="0" u="none" strike="noStrike">
+                <a:solidFill>
+                  <a:srgbClr val="1A3A5C"/>
+                </a:solidFill>
+                <a:effectLst/>
+                <a:uFillTx/>
+                <a:latin typeface="Arial"/>
+              </a:rPr>
+              <a:t>заглавия </a:t>
+            </a:r>
+            <a:r>
+              <a:rPr lang="ru-RU" sz="3200" b="0" u="none" strike="noStrike">
+                <a:solidFill>
+                  <a:srgbClr val="1A3A5C"/>
+                </a:solidFill>
+                <a:effectLst/>
+                <a:uFillTx/>
+                <a:latin typeface="Arial"/>
+              </a:rPr>
+              <a:t>щёлкните </a:t>
+            </a:r>
+            <a:r>
+              <a:rPr lang="ru-RU" sz="3200" b="0" u="none" strike="noStrike">
+                <a:solidFill>
+                  <a:srgbClr val="1A3A5C"/>
+                </a:solidFill>
+                <a:effectLst/>
+                <a:uFillTx/>
+                <a:latin typeface="Arial"/>
+              </a:rPr>
+              <a:t>мышью</a:t>
             </a:r>
             <a:endParaRPr lang="ru-RU" sz="3200" b="0" u="none" strike="noStrike">
               <a:solidFill>
@@ -457,6 +176,1055 @@
       <p:sp>
         <p:nvSpPr>
           <p:cNvPr id="3" name="PlaceHolder 2"/>
+          <p:cNvSpPr>
+            <a:spLocks noGrp="1"/>
+          </p:cNvSpPr>
+          <p:nvPr>
+            <p:ph type="body"/>
+          </p:nvPr>
+        </p:nvSpPr>
+        <p:spPr>
+          <a:xfrm>
+            <a:off x="504000" y="1326600"/>
+            <a:ext cx="9070920" cy="3287520"/>
+          </a:xfrm>
+          <a:prstGeom prst="rect">
+            <a:avLst/>
+          </a:prstGeom>
+          <a:noFill/>
+          <a:ln w="0">
+            <a:noFill/>
+          </a:ln>
+        </p:spPr>
+        <p:txBody>
+          <a:bodyPr lIns="0" tIns="0" rIns="0" bIns="0" anchor="t">
+            <a:normAutofit/>
+          </a:bodyPr>
+          <a:lstStyle>
+            <a:lvl1pPr algn="l">
+              <a:lnSpc>
+                <a:spcPct val="100000"/>
+              </a:lnSpc>
+              <a:spcBef>
+                <a:spcPts val="884"/>
+              </a:spcBef>
+              <a:buClr>
+                <a:srgbClr val="000000"/>
+              </a:buClr>
+              <a:buSzPct val="45000"/>
+              <a:buFont typeface="Wingdings" charset="2"/>
+              <a:buChar char=""/>
+              <a:defRPr lang="ru-RU" sz="2000" b="0" u="none" strike="noStrike">
+                <a:solidFill>
+                  <a:srgbClr val="2D2D2D"/>
+                </a:solidFill>
+                <a:effectLst/>
+                <a:uFillTx/>
+                <a:latin typeface="Arial"/>
+              </a:defRPr>
+            </a:lvl1pPr>
+            <a:lvl2pPr lvl="1" algn="l">
+              <a:lnSpc>
+                <a:spcPct val="100000"/>
+              </a:lnSpc>
+              <a:spcBef>
+                <a:spcPts val="1134"/>
+              </a:spcBef>
+              <a:buClr>
+                <a:srgbClr val="000000"/>
+              </a:buClr>
+              <a:buSzPct val="75000"/>
+              <a:buFont typeface="Symbol" charset="2"/>
+              <a:buChar char=""/>
+              <a:defRPr lang="ru-RU" sz="2000" b="0" u="none" strike="noStrike">
+                <a:solidFill>
+                  <a:srgbClr val="2D2D2D"/>
+                </a:solidFill>
+                <a:effectLst/>
+                <a:uFillTx/>
+                <a:latin typeface="Arial"/>
+              </a:defRPr>
+            </a:lvl2pPr>
+            <a:lvl3pPr lvl="2" algn="l">
+              <a:lnSpc>
+                <a:spcPct val="100000"/>
+              </a:lnSpc>
+              <a:spcBef>
+                <a:spcPts val="850"/>
+              </a:spcBef>
+              <a:buClr>
+                <a:srgbClr val="000000"/>
+              </a:buClr>
+              <a:buSzPct val="45000"/>
+              <a:buFont typeface="Wingdings" charset="2"/>
+              <a:buChar char=""/>
+              <a:defRPr lang="ru-RU" sz="2000" b="0" u="none" strike="noStrike">
+                <a:solidFill>
+                  <a:srgbClr val="2D2D2D"/>
+                </a:solidFill>
+                <a:effectLst/>
+                <a:uFillTx/>
+                <a:latin typeface="Arial"/>
+              </a:defRPr>
+            </a:lvl3pPr>
+            <a:lvl4pPr lvl="3" algn="l">
+              <a:lnSpc>
+                <a:spcPct val="100000"/>
+              </a:lnSpc>
+              <a:spcBef>
+                <a:spcPts val="567"/>
+              </a:spcBef>
+              <a:buClr>
+                <a:srgbClr val="000000"/>
+              </a:buClr>
+              <a:buSzPct val="75000"/>
+              <a:buFont typeface="Symbol" charset="2"/>
+              <a:buChar char=""/>
+              <a:defRPr lang="ru-RU" sz="2000" b="0" u="none" strike="noStrike">
+                <a:solidFill>
+                  <a:srgbClr val="2D2D2D"/>
+                </a:solidFill>
+                <a:effectLst/>
+                <a:uFillTx/>
+                <a:latin typeface="Arial"/>
+              </a:defRPr>
+            </a:lvl4pPr>
+            <a:lvl5pPr lvl="4" algn="l">
+              <a:lnSpc>
+                <a:spcPct val="100000"/>
+              </a:lnSpc>
+              <a:spcBef>
+                <a:spcPts val="283"/>
+              </a:spcBef>
+              <a:buClr>
+                <a:srgbClr val="000000"/>
+              </a:buClr>
+              <a:buSzPct val="45000"/>
+              <a:buFont typeface="Wingdings" charset="2"/>
+              <a:buChar char=""/>
+              <a:defRPr lang="ru-RU" sz="2000" b="0" u="none" strike="noStrike">
+                <a:solidFill>
+                  <a:srgbClr val="2D2D2D"/>
+                </a:solidFill>
+                <a:effectLst/>
+                <a:uFillTx/>
+                <a:latin typeface="Arial"/>
+              </a:defRPr>
+            </a:lvl5pPr>
+            <a:lvl6pPr lvl="5" algn="l">
+              <a:lnSpc>
+                <a:spcPct val="100000"/>
+              </a:lnSpc>
+              <a:spcBef>
+                <a:spcPts val="283"/>
+              </a:spcBef>
+              <a:buClr>
+                <a:srgbClr val="000000"/>
+              </a:buClr>
+              <a:buSzPct val="45000"/>
+              <a:buFont typeface="Wingdings" charset="2"/>
+              <a:buChar char=""/>
+              <a:defRPr lang="ru-RU" sz="2000" b="0" u="none" strike="noStrike">
+                <a:solidFill>
+                  <a:srgbClr val="2D2D2D"/>
+                </a:solidFill>
+                <a:effectLst/>
+                <a:uFillTx/>
+                <a:latin typeface="Arial"/>
+              </a:defRPr>
+            </a:lvl6pPr>
+            <a:lvl7pPr lvl="6" algn="l">
+              <a:lnSpc>
+                <a:spcPct val="100000"/>
+              </a:lnSpc>
+              <a:spcBef>
+                <a:spcPts val="283"/>
+              </a:spcBef>
+              <a:buClr>
+                <a:srgbClr val="000000"/>
+              </a:buClr>
+              <a:buSzPct val="45000"/>
+              <a:buFont typeface="Wingdings" charset="2"/>
+              <a:buChar char=""/>
+              <a:defRPr lang="ru-RU" sz="2000" b="0" u="none" strike="noStrike">
+                <a:solidFill>
+                  <a:srgbClr val="2D2D2D"/>
+                </a:solidFill>
+                <a:effectLst/>
+                <a:uFillTx/>
+                <a:latin typeface="Arial"/>
+              </a:defRPr>
+            </a:lvl7pPr>
+          </a:lstStyle>
+          <a:p>
+            <a:pPr marL="432000" indent="-324000" algn="l">
+              <a:lnSpc>
+                <a:spcPct val="100000"/>
+              </a:lnSpc>
+              <a:spcBef>
+                <a:spcPts val="884"/>
+              </a:spcBef>
+              <a:buClr>
+                <a:srgbClr val="000000"/>
+              </a:buClr>
+              <a:buSzPct val="45000"/>
+              <a:buFont typeface="Wingdings" charset="2"/>
+              <a:buChar char=""/>
+            </a:pPr>
+            <a:r>
+              <a:rPr lang="ru-RU" sz="2000" b="0" u="none" strike="noStrike">
+                <a:solidFill>
+                  <a:srgbClr val="2D2D2D"/>
+                </a:solidFill>
+                <a:effectLst/>
+                <a:uFillTx/>
+                <a:latin typeface="Arial"/>
+              </a:rPr>
+              <a:t>Для правки структуры щёлкните мышью</a:t>
+            </a:r>
+            <a:endParaRPr lang="ru-RU" sz="2000" b="0" u="none" strike="noStrike">
+              <a:solidFill>
+                <a:srgbClr val="2D2D2D"/>
+              </a:solidFill>
+              <a:effectLst/>
+              <a:uFillTx/>
+              <a:latin typeface="Arial"/>
+            </a:endParaRPr>
+          </a:p>
+          <a:p>
+            <a:pPr marL="864000" lvl="1" indent="-324000" algn="l">
+              <a:lnSpc>
+                <a:spcPct val="100000"/>
+              </a:lnSpc>
+              <a:spcBef>
+                <a:spcPts val="1134"/>
+              </a:spcBef>
+              <a:buClr>
+                <a:srgbClr val="000000"/>
+              </a:buClr>
+              <a:buSzPct val="75000"/>
+              <a:buFont typeface="Symbol" charset="2"/>
+              <a:buChar char=""/>
+            </a:pPr>
+            <a:r>
+              <a:rPr lang="ru-RU" sz="2000" b="0" u="none" strike="noStrike">
+                <a:solidFill>
+                  <a:srgbClr val="2D2D2D"/>
+                </a:solidFill>
+                <a:effectLst/>
+                <a:uFillTx/>
+                <a:latin typeface="Arial"/>
+              </a:rPr>
+              <a:t>Второй уровень структуры</a:t>
+            </a:r>
+            <a:endParaRPr lang="ru-RU" sz="2000" b="0" u="none" strike="noStrike">
+              <a:solidFill>
+                <a:srgbClr val="2D2D2D"/>
+              </a:solidFill>
+              <a:effectLst/>
+              <a:uFillTx/>
+              <a:latin typeface="Arial"/>
+            </a:endParaRPr>
+          </a:p>
+          <a:p>
+            <a:pPr marL="1296000" lvl="2" indent="-288000" algn="l">
+              <a:lnSpc>
+                <a:spcPct val="100000"/>
+              </a:lnSpc>
+              <a:spcBef>
+                <a:spcPts val="850"/>
+              </a:spcBef>
+              <a:buClr>
+                <a:srgbClr val="000000"/>
+              </a:buClr>
+              <a:buSzPct val="45000"/>
+              <a:buFont typeface="Wingdings" charset="2"/>
+              <a:buChar char=""/>
+            </a:pPr>
+            <a:r>
+              <a:rPr lang="ru-RU" sz="2000" b="0" u="none" strike="noStrike">
+                <a:solidFill>
+                  <a:srgbClr val="2D2D2D"/>
+                </a:solidFill>
+                <a:effectLst/>
+                <a:uFillTx/>
+                <a:latin typeface="Arial"/>
+              </a:rPr>
+              <a:t>Третий уровень структуры</a:t>
+            </a:r>
+            <a:endParaRPr lang="ru-RU" sz="2000" b="0" u="none" strike="noStrike">
+              <a:solidFill>
+                <a:srgbClr val="2D2D2D"/>
+              </a:solidFill>
+              <a:effectLst/>
+              <a:uFillTx/>
+              <a:latin typeface="Arial"/>
+            </a:endParaRPr>
+          </a:p>
+          <a:p>
+            <a:pPr marL="1728000" lvl="3" indent="-216000" algn="l">
+              <a:lnSpc>
+                <a:spcPct val="100000"/>
+              </a:lnSpc>
+              <a:spcBef>
+                <a:spcPts val="567"/>
+              </a:spcBef>
+              <a:buClr>
+                <a:srgbClr val="000000"/>
+              </a:buClr>
+              <a:buSzPct val="75000"/>
+              <a:buFont typeface="Symbol" charset="2"/>
+              <a:buChar char=""/>
+            </a:pPr>
+            <a:r>
+              <a:rPr lang="ru-RU" sz="2000" b="0" u="none" strike="noStrike">
+                <a:solidFill>
+                  <a:srgbClr val="2D2D2D"/>
+                </a:solidFill>
+                <a:effectLst/>
+                <a:uFillTx/>
+                <a:latin typeface="Arial"/>
+              </a:rPr>
+              <a:t>Четвёртый уровень структуры</a:t>
+            </a:r>
+            <a:endParaRPr lang="ru-RU" sz="2000" b="0" u="none" strike="noStrike">
+              <a:solidFill>
+                <a:srgbClr val="2D2D2D"/>
+              </a:solidFill>
+              <a:effectLst/>
+              <a:uFillTx/>
+              <a:latin typeface="Arial"/>
+            </a:endParaRPr>
+          </a:p>
+          <a:p>
+            <a:pPr marL="2160000" lvl="4" indent="-216000" algn="l">
+              <a:lnSpc>
+                <a:spcPct val="100000"/>
+              </a:lnSpc>
+              <a:spcBef>
+                <a:spcPts val="283"/>
+              </a:spcBef>
+              <a:buClr>
+                <a:srgbClr val="000000"/>
+              </a:buClr>
+              <a:buSzPct val="45000"/>
+              <a:buFont typeface="Wingdings" charset="2"/>
+              <a:buChar char=""/>
+            </a:pPr>
+            <a:r>
+              <a:rPr lang="ru-RU" sz="2000" b="0" u="none" strike="noStrike">
+                <a:solidFill>
+                  <a:srgbClr val="2D2D2D"/>
+                </a:solidFill>
+                <a:effectLst/>
+                <a:uFillTx/>
+                <a:latin typeface="Arial"/>
+              </a:rPr>
+              <a:t>Пятый уровень структуры</a:t>
+            </a:r>
+            <a:endParaRPr lang="ru-RU" sz="2000" b="0" u="none" strike="noStrike">
+              <a:solidFill>
+                <a:srgbClr val="2D2D2D"/>
+              </a:solidFill>
+              <a:effectLst/>
+              <a:uFillTx/>
+              <a:latin typeface="Arial"/>
+            </a:endParaRPr>
+          </a:p>
+          <a:p>
+            <a:pPr marL="2592000" lvl="5" indent="-216000" algn="l">
+              <a:lnSpc>
+                <a:spcPct val="100000"/>
+              </a:lnSpc>
+              <a:spcBef>
+                <a:spcPts val="283"/>
+              </a:spcBef>
+              <a:buClr>
+                <a:srgbClr val="000000"/>
+              </a:buClr>
+              <a:buSzPct val="45000"/>
+              <a:buFont typeface="Wingdings" charset="2"/>
+              <a:buChar char=""/>
+            </a:pPr>
+            <a:r>
+              <a:rPr lang="ru-RU" sz="2000" b="0" u="none" strike="noStrike">
+                <a:solidFill>
+                  <a:srgbClr val="2D2D2D"/>
+                </a:solidFill>
+                <a:effectLst/>
+                <a:uFillTx/>
+                <a:latin typeface="Arial"/>
+              </a:rPr>
+              <a:t>Шестой уровень структуры</a:t>
+            </a:r>
+            <a:endParaRPr lang="ru-RU" sz="2000" b="0" u="none" strike="noStrike">
+              <a:solidFill>
+                <a:srgbClr val="2D2D2D"/>
+              </a:solidFill>
+              <a:effectLst/>
+              <a:uFillTx/>
+              <a:latin typeface="Arial"/>
+            </a:endParaRPr>
+          </a:p>
+          <a:p>
+            <a:pPr marL="3024000" lvl="6" indent="-216000" algn="l">
+              <a:lnSpc>
+                <a:spcPct val="100000"/>
+              </a:lnSpc>
+              <a:spcBef>
+                <a:spcPts val="283"/>
+              </a:spcBef>
+              <a:buClr>
+                <a:srgbClr val="000000"/>
+              </a:buClr>
+              <a:buSzPct val="45000"/>
+              <a:buFont typeface="Wingdings" charset="2"/>
+              <a:buChar char=""/>
+            </a:pPr>
+            <a:r>
+              <a:rPr lang="ru-RU" sz="2000" b="0" u="none" strike="noStrike">
+                <a:solidFill>
+                  <a:srgbClr val="2D2D2D"/>
+                </a:solidFill>
+                <a:effectLst/>
+                <a:uFillTx/>
+                <a:latin typeface="Arial"/>
+              </a:rPr>
+              <a:t>Седьмой уровень структуры</a:t>
+            </a:r>
+            <a:endParaRPr lang="ru-RU" sz="2000" b="0" u="none" strike="noStrike">
+              <a:solidFill>
+                <a:srgbClr val="2D2D2D"/>
+              </a:solidFill>
+              <a:effectLst/>
+              <a:uFillTx/>
+              <a:latin typeface="Arial"/>
+            </a:endParaRPr>
+          </a:p>
+        </p:txBody>
+      </p:sp>
+      <p:sp>
+        <p:nvSpPr>
+          <p:cNvPr id="4" name="PlaceHolder 3"/>
+          <p:cNvSpPr>
+            <a:spLocks noGrp="1"/>
+          </p:cNvSpPr>
+          <p:nvPr>
+            <p:ph type="ftr" idx="1"/>
+          </p:nvPr>
+        </p:nvSpPr>
+        <p:spPr>
+          <a:xfrm>
+            <a:off x="3447360" y="5165280"/>
+            <a:ext cx="3194280" cy="389880"/>
+          </a:xfrm>
+          <a:prstGeom prst="rect">
+            <a:avLst/>
+          </a:prstGeom>
+          <a:noFill/>
+          <a:ln w="0">
+            <a:noFill/>
+          </a:ln>
+        </p:spPr>
+        <p:txBody>
+          <a:bodyPr lIns="0" tIns="0" rIns="0" bIns="0" anchor="t">
+            <a:noAutofit/>
+          </a:bodyPr>
+          <a:lstStyle>
+            <a:lvl1pPr indent="0" algn="ctr">
+              <a:lnSpc>
+                <a:spcPct val="100000"/>
+              </a:lnSpc>
+              <a:buNone/>
+              <a:tabLst>
+                <a:tab pos="0" algn="l"/>
+              </a:tabLst>
+              <a:defRPr lang="ru-RU" sz="1400" b="0" u="none" strike="noStrike">
+                <a:solidFill>
+                  <a:srgbClr val="000000"/>
+                </a:solidFill>
+                <a:effectLst/>
+                <a:uFillTx/>
+                <a:latin typeface="Times New Roman"/>
+              </a:defRPr>
+            </a:lvl1pPr>
+          </a:lstStyle>
+          <a:p>
+            <a:pPr indent="0" algn="ctr">
+              <a:lnSpc>
+                <a:spcPct val="100000"/>
+              </a:lnSpc>
+              <a:buNone/>
+              <a:tabLst>
+                <a:tab pos="0" algn="l"/>
+              </a:tabLst>
+            </a:pPr>
+            <a:r>
+              <a:rPr lang="ru-RU" sz="1400" b="0" u="none" strike="noStrike">
+                <a:solidFill>
+                  <a:srgbClr val="000000"/>
+                </a:solidFill>
+                <a:effectLst/>
+                <a:uFillTx/>
+                <a:latin typeface="Times New Roman"/>
+              </a:rPr>
+              <a:t>&lt;нижний колонтитул&gt;</a:t>
+            </a:r>
+            <a:endParaRPr lang="ru-RU" sz="1400" b="0" u="none" strike="noStrike">
+              <a:solidFill>
+                <a:srgbClr val="000000"/>
+              </a:solidFill>
+              <a:effectLst/>
+              <a:uFillTx/>
+              <a:latin typeface="Times New Roman"/>
+            </a:endParaRPr>
+          </a:p>
+        </p:txBody>
+      </p:sp>
+      <p:sp>
+        <p:nvSpPr>
+          <p:cNvPr id="5" name="PlaceHolder 4"/>
+          <p:cNvSpPr>
+            <a:spLocks noGrp="1"/>
+          </p:cNvSpPr>
+          <p:nvPr>
+            <p:ph type="sldNum" idx="2"/>
+          </p:nvPr>
+        </p:nvSpPr>
+        <p:spPr>
+          <a:xfrm>
+            <a:off x="7227360" y="5165280"/>
+            <a:ext cx="2347560" cy="389880"/>
+          </a:xfrm>
+          <a:prstGeom prst="rect">
+            <a:avLst/>
+          </a:prstGeom>
+          <a:noFill/>
+          <a:ln w="0">
+            <a:noFill/>
+          </a:ln>
+        </p:spPr>
+        <p:txBody>
+          <a:bodyPr lIns="0" tIns="0" rIns="0" bIns="0" anchor="t">
+            <a:noAutofit/>
+          </a:bodyPr>
+          <a:lstStyle>
+            <a:lvl1pPr indent="0" algn="r">
+              <a:lnSpc>
+                <a:spcPct val="100000"/>
+              </a:lnSpc>
+              <a:buNone/>
+              <a:tabLst>
+                <a:tab pos="0" algn="l"/>
+              </a:tabLst>
+              <a:defRPr lang="ru-RU" sz="1400" b="0" u="none" strike="noStrike">
+                <a:solidFill>
+                  <a:srgbClr val="000000"/>
+                </a:solidFill>
+                <a:effectLst/>
+                <a:uFillTx/>
+                <a:latin typeface="Times New Roman"/>
+              </a:defRPr>
+            </a:lvl1pPr>
+          </a:lstStyle>
+          <a:p>
+            <a:pPr indent="0" algn="r">
+              <a:lnSpc>
+                <a:spcPct val="100000"/>
+              </a:lnSpc>
+              <a:buNone/>
+              <a:tabLst>
+                <a:tab pos="0" algn="l"/>
+              </a:tabLst>
+            </a:pPr>
+            <a:fld id="{0C01CF58-C2DF-4A7D-A27A-B3DAB71CCAC3}" type="slidenum">
+              <a:rPr lang="ru-RU" sz="1400" b="0" u="none" strike="noStrike">
+                <a:solidFill>
+                  <a:srgbClr val="000000"/>
+                </a:solidFill>
+                <a:effectLst/>
+                <a:uFillTx/>
+                <a:latin typeface="Times New Roman"/>
+              </a:rPr>
+              <a:t>&lt;номер&gt;</a:t>
+            </a:fld>
+            <a:endParaRPr lang="ru-RU" sz="1400" b="0" u="none" strike="noStrike">
+              <a:solidFill>
+                <a:srgbClr val="000000"/>
+              </a:solidFill>
+              <a:effectLst/>
+              <a:uFillTx/>
+              <a:latin typeface="Times New Roman"/>
+            </a:endParaRPr>
+          </a:p>
+        </p:txBody>
+      </p:sp>
+      <p:sp>
+        <p:nvSpPr>
+          <p:cNvPr id="6" name="PlaceHolder 5"/>
+          <p:cNvSpPr>
+            <a:spLocks noGrp="1"/>
+          </p:cNvSpPr>
+          <p:nvPr>
+            <p:ph type="dt" idx="3"/>
+          </p:nvPr>
+        </p:nvSpPr>
+        <p:spPr>
+          <a:xfrm>
+            <a:off x="504000" y="5165280"/>
+            <a:ext cx="2347560" cy="389880"/>
+          </a:xfrm>
+          <a:prstGeom prst="rect">
+            <a:avLst/>
+          </a:prstGeom>
+          <a:noFill/>
+          <a:ln w="0">
+            <a:noFill/>
+          </a:ln>
+        </p:spPr>
+        <p:txBody>
+          <a:bodyPr lIns="0" tIns="0" rIns="0" bIns="0" anchor="t">
+            <a:noAutofit/>
+          </a:bodyPr>
+          <a:lstStyle>
+            <a:lvl1pPr indent="0" algn="l">
+              <a:lnSpc>
+                <a:spcPct val="100000"/>
+              </a:lnSpc>
+              <a:buNone/>
+              <a:tabLst>
+                <a:tab pos="0" algn="l"/>
+              </a:tabLst>
+              <a:defRPr lang="ru-RU" sz="1400" b="0" u="none" strike="noStrike">
+                <a:solidFill>
+                  <a:srgbClr val="000000"/>
+                </a:solidFill>
+                <a:effectLst/>
+                <a:uFillTx/>
+                <a:latin typeface="Times New Roman"/>
+              </a:defRPr>
+            </a:lvl1pPr>
+          </a:lstStyle>
+          <a:p>
+            <a:pPr indent="0" algn="l">
+              <a:lnSpc>
+                <a:spcPct val="100000"/>
+              </a:lnSpc>
+              <a:buNone/>
+              <a:tabLst>
+                <a:tab pos="0" algn="l"/>
+              </a:tabLst>
+            </a:pPr>
+            <a:r>
+              <a:rPr lang="ru-RU" sz="1400" b="0" u="none" strike="noStrike">
+                <a:solidFill>
+                  <a:srgbClr val="000000"/>
+                </a:solidFill>
+                <a:effectLst/>
+                <a:uFillTx/>
+                <a:latin typeface="Times New Roman"/>
+              </a:rPr>
+              <a:t>&lt;дата/время&gt;</a:t>
+            </a:r>
+            <a:endParaRPr lang="ru-RU" sz="1400" b="0" u="none" strike="noStrike">
+              <a:solidFill>
+                <a:srgbClr val="000000"/>
+              </a:solidFill>
+              <a:effectLst/>
+              <a:uFillTx/>
+              <a:latin typeface="Times New Roman"/>
+            </a:endParaRPr>
+          </a:p>
+        </p:txBody>
+      </p:sp>
+    </p:spTree>
+  </p:cSld>
+</p:sldLayout>
+</file>
+
+<file path=ppt/slideLayouts/slideLayout2.xml><?xml version="1.0" encoding="utf-8"?>
+<p:sldLayout xmlns:a="http://schemas.openxmlformats.org/drawingml/2006/main" xmlns:p="http://schemas.openxmlformats.org/presentationml/2006/main" xmlns:r="http://schemas.openxmlformats.org/officeDocument/2006/relationships" xmlns:p14="http://schemas.microsoft.com/office/powerpoint/2010/main" xmlns:p15="http://schemas.microsoft.com/office/powerpoint/2012/main" xmlns:mc="http://schemas.openxmlformats.org/markup-compatibility/2006" type="title" preserve="1">
+  <p:cSld name="Обычный 1">
+    <p:bg>
+      <p:bgPr>
+        <a:solidFill>
+          <a:srgbClr val="FFFFF0"/>
+        </a:solidFill>
+      </p:bgPr>
+    </p:bg>
+    <p:spTree>
+      <p:nvGrpSpPr>
+        <p:cNvPr id="1" name=""/>
+        <p:cNvGrpSpPr/>
+        <p:nvPr/>
+      </p:nvGrpSpPr>
+      <p:grpSpPr>
+        <a:xfrm>
+          <a:off x="0" y="0"/>
+          <a:ext cx="0" cy="0"/>
+          <a:chOff x="0" y="0"/>
+          <a:chExt cx="0" cy="0"/>
+        </a:xfrm>
+      </p:grpSpPr>
+      <p:sp>
+        <p:nvSpPr>
+          <p:cNvPr id="7" name="PlaceHolder 1"/>
+          <p:cNvSpPr>
+            <a:spLocks noGrp="1"/>
+          </p:cNvSpPr>
+          <p:nvPr>
+            <p:ph type="title"/>
+          </p:nvPr>
+        </p:nvSpPr>
+        <p:spPr>
+          <a:xfrm>
+            <a:off x="504000" y="455040"/>
+            <a:ext cx="9070920" cy="488160"/>
+          </a:xfrm>
+          <a:prstGeom prst="rect">
+            <a:avLst/>
+          </a:prstGeom>
+          <a:noFill/>
+          <a:ln w="0">
+            <a:noFill/>
+          </a:ln>
+        </p:spPr>
+        <p:txBody>
+          <a:bodyPr lIns="0" tIns="0" rIns="0" bIns="0" anchor="ctr">
+            <a:spAutoFit/>
+          </a:bodyPr>
+          <a:lstStyle>
+            <a:lvl1pPr indent="0" algn="l">
+              <a:lnSpc>
+                <a:spcPct val="100000"/>
+              </a:lnSpc>
+              <a:buNone/>
+              <a:tabLst>
+                <a:tab pos="0" algn="l"/>
+              </a:tabLst>
+              <a:defRPr lang="ru-RU" sz="3200" b="0" u="none" strike="noStrike">
+                <a:solidFill>
+                  <a:srgbClr val="1A3A5C"/>
+                </a:solidFill>
+                <a:effectLst/>
+                <a:uFillTx/>
+                <a:latin typeface="Arial"/>
+              </a:defRPr>
+            </a:lvl1pPr>
+          </a:lstStyle>
+          <a:p>
+            <a:pPr indent="0" algn="l">
+              <a:lnSpc>
+                <a:spcPct val="100000"/>
+              </a:lnSpc>
+              <a:buNone/>
+              <a:tabLst>
+                <a:tab pos="0" algn="l"/>
+              </a:tabLst>
+            </a:pPr>
+            <a:r>
+              <a:rPr lang="ru-RU" sz="3200" b="0" u="none" strike="noStrike">
+                <a:solidFill>
+                  <a:srgbClr val="1A3A5C"/>
+                </a:solidFill>
+                <a:effectLst/>
+                <a:uFillTx/>
+                <a:latin typeface="Arial"/>
+              </a:rPr>
+              <a:t>Для правки </a:t>
+            </a:r>
+            <a:r>
+              <a:rPr lang="ru-RU" sz="3200" b="0" u="none" strike="noStrike">
+                <a:solidFill>
+                  <a:srgbClr val="1A3A5C"/>
+                </a:solidFill>
+                <a:effectLst/>
+                <a:uFillTx/>
+                <a:latin typeface="Arial"/>
+              </a:rPr>
+              <a:t>текста </a:t>
+            </a:r>
+            <a:r>
+              <a:rPr lang="ru-RU" sz="3200" b="0" u="none" strike="noStrike">
+                <a:solidFill>
+                  <a:srgbClr val="1A3A5C"/>
+                </a:solidFill>
+                <a:effectLst/>
+                <a:uFillTx/>
+                <a:latin typeface="Arial"/>
+              </a:rPr>
+              <a:t>заглавия </a:t>
+            </a:r>
+            <a:r>
+              <a:rPr lang="ru-RU" sz="3200" b="0" u="none" strike="noStrike">
+                <a:solidFill>
+                  <a:srgbClr val="1A3A5C"/>
+                </a:solidFill>
+                <a:effectLst/>
+                <a:uFillTx/>
+                <a:latin typeface="Arial"/>
+              </a:rPr>
+              <a:t>щёлкните </a:t>
+            </a:r>
+            <a:r>
+              <a:rPr lang="ru-RU" sz="3200" b="0" u="none" strike="noStrike">
+                <a:solidFill>
+                  <a:srgbClr val="1A3A5C"/>
+                </a:solidFill>
+                <a:effectLst/>
+                <a:uFillTx/>
+                <a:latin typeface="Arial"/>
+              </a:rPr>
+              <a:t>мышью</a:t>
+            </a:r>
+            <a:endParaRPr lang="ru-RU" sz="3200" b="0" u="none" strike="noStrike">
+              <a:solidFill>
+                <a:srgbClr val="1A3A5C"/>
+              </a:solidFill>
+              <a:effectLst/>
+              <a:uFillTx/>
+              <a:latin typeface="Arial"/>
+            </a:endParaRPr>
+          </a:p>
+        </p:txBody>
+      </p:sp>
+      <p:sp>
+        <p:nvSpPr>
+          <p:cNvPr id="8" name="PlaceHolder 2"/>
+          <p:cNvSpPr>
+            <a:spLocks noGrp="1"/>
+          </p:cNvSpPr>
+          <p:nvPr>
+            <p:ph type="ftr" idx="4"/>
+          </p:nvPr>
+        </p:nvSpPr>
+        <p:spPr>
+          <a:xfrm>
+            <a:off x="3447360" y="5165280"/>
+            <a:ext cx="3194280" cy="389880"/>
+          </a:xfrm>
+          <a:prstGeom prst="rect">
+            <a:avLst/>
+          </a:prstGeom>
+          <a:noFill/>
+          <a:ln w="0">
+            <a:noFill/>
+          </a:ln>
+        </p:spPr>
+        <p:txBody>
+          <a:bodyPr lIns="0" tIns="0" rIns="0" bIns="0" anchor="t">
+            <a:noAutofit/>
+          </a:bodyPr>
+          <a:lstStyle>
+            <a:lvl1pPr indent="0" algn="ctr">
+              <a:lnSpc>
+                <a:spcPct val="100000"/>
+              </a:lnSpc>
+              <a:buNone/>
+              <a:tabLst>
+                <a:tab pos="0" algn="l"/>
+              </a:tabLst>
+              <a:defRPr lang="ru-RU" sz="1400" b="0" u="none" strike="noStrike">
+                <a:solidFill>
+                  <a:srgbClr val="000000"/>
+                </a:solidFill>
+                <a:effectLst/>
+                <a:uFillTx/>
+                <a:latin typeface="Times New Roman"/>
+              </a:defRPr>
+            </a:lvl1pPr>
+          </a:lstStyle>
+          <a:p>
+            <a:pPr indent="0" algn="ctr">
+              <a:lnSpc>
+                <a:spcPct val="100000"/>
+              </a:lnSpc>
+              <a:buNone/>
+              <a:tabLst>
+                <a:tab pos="0" algn="l"/>
+              </a:tabLst>
+            </a:pPr>
+            <a:r>
+              <a:rPr lang="ru-RU" sz="1400" b="0" u="none" strike="noStrike">
+                <a:solidFill>
+                  <a:srgbClr val="000000"/>
+                </a:solidFill>
+                <a:effectLst/>
+                <a:uFillTx/>
+                <a:latin typeface="Times New Roman"/>
+              </a:rPr>
+              <a:t>&lt;нижний колонтитул&gt;</a:t>
+            </a:r>
+            <a:endParaRPr lang="ru-RU" sz="1400" b="0" u="none" strike="noStrike">
+              <a:solidFill>
+                <a:srgbClr val="000000"/>
+              </a:solidFill>
+              <a:effectLst/>
+              <a:uFillTx/>
+              <a:latin typeface="Times New Roman"/>
+            </a:endParaRPr>
+          </a:p>
+        </p:txBody>
+      </p:sp>
+      <p:sp>
+        <p:nvSpPr>
+          <p:cNvPr id="9" name="PlaceHolder 3"/>
+          <p:cNvSpPr>
+            <a:spLocks noGrp="1"/>
+          </p:cNvSpPr>
+          <p:nvPr>
+            <p:ph type="sldNum" idx="5"/>
+          </p:nvPr>
+        </p:nvSpPr>
+        <p:spPr>
+          <a:xfrm>
+            <a:off x="7227360" y="5165280"/>
+            <a:ext cx="2347560" cy="389880"/>
+          </a:xfrm>
+          <a:prstGeom prst="rect">
+            <a:avLst/>
+          </a:prstGeom>
+          <a:noFill/>
+          <a:ln w="0">
+            <a:noFill/>
+          </a:ln>
+        </p:spPr>
+        <p:txBody>
+          <a:bodyPr lIns="0" tIns="0" rIns="0" bIns="0" anchor="t">
+            <a:noAutofit/>
+          </a:bodyPr>
+          <a:lstStyle>
+            <a:lvl1pPr indent="0" algn="r">
+              <a:lnSpc>
+                <a:spcPct val="100000"/>
+              </a:lnSpc>
+              <a:buNone/>
+              <a:tabLst>
+                <a:tab pos="0" algn="l"/>
+              </a:tabLst>
+              <a:defRPr lang="ru-RU" sz="1400" b="0" u="none" strike="noStrike">
+                <a:solidFill>
+                  <a:srgbClr val="000000"/>
+                </a:solidFill>
+                <a:effectLst/>
+                <a:uFillTx/>
+                <a:latin typeface="Times New Roman"/>
+              </a:defRPr>
+            </a:lvl1pPr>
+          </a:lstStyle>
+          <a:p>
+            <a:pPr indent="0" algn="r">
+              <a:lnSpc>
+                <a:spcPct val="100000"/>
+              </a:lnSpc>
+              <a:buNone/>
+              <a:tabLst>
+                <a:tab pos="0" algn="l"/>
+              </a:tabLst>
+            </a:pPr>
+            <a:fld id="{9383227E-8B12-4EBA-A194-3392EDBE1D0B}" type="slidenum">
+              <a:rPr lang="ru-RU" sz="1400" b="0" u="none" strike="noStrike">
+                <a:solidFill>
+                  <a:srgbClr val="000000"/>
+                </a:solidFill>
+                <a:effectLst/>
+                <a:uFillTx/>
+                <a:latin typeface="Times New Roman"/>
+              </a:rPr>
+              <a:t>&lt;номер&gt;</a:t>
+            </a:fld>
+            <a:endParaRPr lang="ru-RU" sz="1400" b="0" u="none" strike="noStrike">
+              <a:solidFill>
+                <a:srgbClr val="000000"/>
+              </a:solidFill>
+              <a:effectLst/>
+              <a:uFillTx/>
+              <a:latin typeface="Times New Roman"/>
+            </a:endParaRPr>
+          </a:p>
+        </p:txBody>
+      </p:sp>
+      <p:sp>
+        <p:nvSpPr>
+          <p:cNvPr id="10" name="PlaceHolder 4"/>
+          <p:cNvSpPr>
+            <a:spLocks noGrp="1"/>
+          </p:cNvSpPr>
+          <p:nvPr>
+            <p:ph type="dt" idx="6"/>
+          </p:nvPr>
+        </p:nvSpPr>
+        <p:spPr>
+          <a:xfrm>
+            <a:off x="504000" y="5165280"/>
+            <a:ext cx="2347560" cy="389880"/>
+          </a:xfrm>
+          <a:prstGeom prst="rect">
+            <a:avLst/>
+          </a:prstGeom>
+          <a:noFill/>
+          <a:ln w="0">
+            <a:noFill/>
+          </a:ln>
+        </p:spPr>
+        <p:txBody>
+          <a:bodyPr lIns="0" tIns="0" rIns="0" bIns="0" anchor="t">
+            <a:noAutofit/>
+          </a:bodyPr>
+          <a:lstStyle>
+            <a:lvl1pPr indent="0" algn="l">
+              <a:lnSpc>
+                <a:spcPct val="100000"/>
+              </a:lnSpc>
+              <a:buNone/>
+              <a:tabLst>
+                <a:tab pos="0" algn="l"/>
+              </a:tabLst>
+              <a:defRPr lang="ru-RU" sz="1400" b="0" u="none" strike="noStrike">
+                <a:solidFill>
+                  <a:srgbClr val="000000"/>
+                </a:solidFill>
+                <a:effectLst/>
+                <a:uFillTx/>
+                <a:latin typeface="Times New Roman"/>
+              </a:defRPr>
+            </a:lvl1pPr>
+          </a:lstStyle>
+          <a:p>
+            <a:pPr indent="0" algn="l">
+              <a:lnSpc>
+                <a:spcPct val="100000"/>
+              </a:lnSpc>
+              <a:buNone/>
+              <a:tabLst>
+                <a:tab pos="0" algn="l"/>
+              </a:tabLst>
+            </a:pPr>
+            <a:r>
+              <a:rPr lang="ru-RU" sz="1400" b="0" u="none" strike="noStrike">
+                <a:solidFill>
+                  <a:srgbClr val="000000"/>
+                </a:solidFill>
+                <a:effectLst/>
+                <a:uFillTx/>
+                <a:latin typeface="Times New Roman"/>
+              </a:rPr>
+              <a:t>&lt;дата/время&gt;</a:t>
+            </a:r>
+            <a:endParaRPr lang="ru-RU" sz="1400" b="0" u="none" strike="noStrike">
+              <a:solidFill>
+                <a:srgbClr val="000000"/>
+              </a:solidFill>
+              <a:effectLst/>
+              <a:uFillTx/>
+              <a:latin typeface="Times New Roman"/>
+            </a:endParaRPr>
+          </a:p>
+        </p:txBody>
+      </p:sp>
+      <p:sp>
+        <p:nvSpPr>
+          <p:cNvPr id="11" name="PlaceHolder 5"/>
           <p:cNvSpPr>
             <a:spLocks noGrp="1"/>
           </p:cNvSpPr>
@@ -483,6 +1251,9 @@
           </a:bodyPr>
           <a:lstStyle>
             <a:lvl1pPr algn="l">
+              <a:lnSpc>
+                <a:spcPct val="100000"/>
+              </a:lnSpc>
               <a:spcBef>
                 <a:spcPts val="884"/>
               </a:spcBef>
@@ -502,6 +1273,9 @@
               </a:defRPr>
             </a:lvl1pPr>
             <a:lvl2pPr lvl="1" algn="l">
+              <a:lnSpc>
+                <a:spcPct val="100000"/>
+              </a:lnSpc>
               <a:spcBef>
                 <a:spcPts val="1134"/>
               </a:spcBef>
@@ -521,6 +1295,9 @@
               </a:defRPr>
             </a:lvl2pPr>
             <a:lvl3pPr lvl="2" algn="l">
+              <a:lnSpc>
+                <a:spcPct val="100000"/>
+              </a:lnSpc>
               <a:spcBef>
                 <a:spcPts val="850"/>
               </a:spcBef>
@@ -540,6 +1317,9 @@
               </a:defRPr>
             </a:lvl3pPr>
             <a:lvl4pPr lvl="3" algn="l">
+              <a:lnSpc>
+                <a:spcPct val="100000"/>
+              </a:lnSpc>
               <a:spcBef>
                 <a:spcPts val="567"/>
               </a:spcBef>
@@ -559,6 +1339,9 @@
               </a:defRPr>
             </a:lvl4pPr>
             <a:lvl5pPr lvl="4" algn="l">
+              <a:lnSpc>
+                <a:spcPct val="100000"/>
+              </a:lnSpc>
               <a:spcBef>
                 <a:spcPts val="283"/>
               </a:spcBef>
@@ -578,6 +1361,9 @@
               </a:defRPr>
             </a:lvl5pPr>
             <a:lvl6pPr lvl="5" algn="l">
+              <a:lnSpc>
+                <a:spcPct val="100000"/>
+              </a:lnSpc>
               <a:spcBef>
                 <a:spcPts val="283"/>
               </a:spcBef>
@@ -597,6 +1383,9 @@
               </a:defRPr>
             </a:lvl6pPr>
             <a:lvl7pPr lvl="6" algn="l">
+              <a:lnSpc>
+                <a:spcPct val="100000"/>
+              </a:lnSpc>
               <a:spcBef>
                 <a:spcPts val="283"/>
               </a:spcBef>
@@ -618,6 +1407,9 @@
           </a:lstStyle>
           <a:p>
             <a:pPr marL="432000" indent="-324000" algn="l">
+              <a:lnSpc>
+                <a:spcPct val="100000"/>
+              </a:lnSpc>
               <a:spcBef>
                 <a:spcPts val="884"/>
               </a:spcBef>
@@ -650,6 +1442,9 @@
           </a:p>
           <a:p>
             <a:pPr marL="864000" lvl="1" indent="-324000" algn="l">
+              <a:lnSpc>
+                <a:spcPct val="100000"/>
+              </a:lnSpc>
               <a:spcBef>
                 <a:spcPts val="1134"/>
               </a:spcBef>
@@ -682,6 +1477,9 @@
           </a:p>
           <a:p>
             <a:pPr marL="1296000" lvl="2" indent="-288000" algn="l">
+              <a:lnSpc>
+                <a:spcPct val="100000"/>
+              </a:lnSpc>
               <a:spcBef>
                 <a:spcPts val="850"/>
               </a:spcBef>
@@ -714,6 +1512,9 @@
           </a:p>
           <a:p>
             <a:pPr marL="1728000" lvl="3" indent="-216000" algn="l">
+              <a:lnSpc>
+                <a:spcPct val="100000"/>
+              </a:lnSpc>
               <a:spcBef>
                 <a:spcPts val="567"/>
               </a:spcBef>
@@ -746,6 +1547,9 @@
           </a:p>
           <a:p>
             <a:pPr marL="2160000" lvl="4" indent="-216000" algn="l">
+              <a:lnSpc>
+                <a:spcPct val="100000"/>
+              </a:lnSpc>
               <a:spcBef>
                 <a:spcPts val="283"/>
               </a:spcBef>
@@ -778,6 +1582,9 @@
           </a:p>
           <a:p>
             <a:pPr marL="2592000" lvl="5" indent="-216000" algn="l">
+              <a:lnSpc>
+                <a:spcPct val="100000"/>
+              </a:lnSpc>
               <a:spcBef>
                 <a:spcPts val="283"/>
               </a:spcBef>
@@ -810,6 +1617,9 @@
           </a:p>
           <a:p>
             <a:pPr marL="3024000" lvl="6" indent="-216000" algn="l">
+              <a:lnSpc>
+                <a:spcPct val="100000"/>
+              </a:lnSpc>
               <a:spcBef>
                 <a:spcPts val="283"/>
               </a:spcBef>
@@ -842,204 +1652,28 @@
           </a:p>
         </p:txBody>
       </p:sp>
-      <p:sp>
-        <p:nvSpPr>
-          <p:cNvPr id="4" name="PlaceHolder 3"/>
-          <p:cNvSpPr>
-            <a:spLocks noGrp="1"/>
-          </p:cNvSpPr>
-          <p:nvPr>
-            <p:ph type="dt" idx="1"/>
-          </p:nvPr>
-        </p:nvSpPr>
-        <p:spPr>
-          <a:xfrm>
-            <a:off x="504000" y="5165280"/>
-            <a:ext cx="2348280" cy="390600"/>
-          </a:xfrm>
-          <a:prstGeom prst="rect">
-            <a:avLst/>
-          </a:prstGeom>
-          <a:noFill/>
-          <a:ln w="0">
-            <a:noFill/>
-          </a:ln>
-        </p:spPr>
-        <p:txBody>
-          <a:bodyPr lIns="0" tIns="0" rIns="0" bIns="0" anchor="t">
-            <a:noAutofit/>
-          </a:bodyPr>
-          <a:lstStyle>
-            <a:lvl1pPr indent="0" algn="l">
-              <a:buNone/>
-              <a:defRPr lang="ru-RU" sz="1400" b="0" u="none" strike="noStrike">
-                <a:solidFill>
-                  <a:srgbClr val="000000"/>
-                </a:solidFill>
-                <a:effectLst/>
-                <a:uFillTx/>
-                <a:latin typeface="Times New Roman"/>
-              </a:defRPr>
-            </a:lvl1pPr>
-          </a:lstStyle>
-          <a:p>
-            <a:pPr indent="0" algn="l">
-              <a:buNone/>
-            </a:pPr>
-            <a:r>
-              <a:rPr lang="ru-RU" sz="1400" b="0" u="none" strike="noStrike">
-                <a:solidFill>
-                  <a:srgbClr val="000000"/>
-                </a:solidFill>
-                <a:effectLst/>
-                <a:uFillTx/>
-                <a:latin typeface="Times New Roman"/>
-              </a:rPr>
-              <a:t>&lt;дата/время&gt;</a:t>
-            </a:r>
-            <a:endParaRPr lang="ru-RU" sz="1400" b="0" u="none" strike="noStrike">
-              <a:solidFill>
-                <a:srgbClr val="000000"/>
-              </a:solidFill>
-              <a:effectLst/>
-              <a:uFillTx/>
-              <a:latin typeface="Times New Roman"/>
-            </a:endParaRPr>
-          </a:p>
-        </p:txBody>
-      </p:sp>
-      <p:sp>
-        <p:nvSpPr>
-          <p:cNvPr id="5" name="PlaceHolder 4"/>
-          <p:cNvSpPr>
-            <a:spLocks noGrp="1"/>
-          </p:cNvSpPr>
-          <p:nvPr>
-            <p:ph type="ftr" idx="2"/>
-          </p:nvPr>
-        </p:nvSpPr>
-        <p:spPr>
-          <a:xfrm>
-            <a:off x="3447360" y="5165280"/>
-            <a:ext cx="3195000" cy="390600"/>
-          </a:xfrm>
-          <a:prstGeom prst="rect">
-            <a:avLst/>
-          </a:prstGeom>
-          <a:noFill/>
-          <a:ln w="0">
-            <a:noFill/>
-          </a:ln>
-        </p:spPr>
-        <p:txBody>
-          <a:bodyPr lIns="0" tIns="0" rIns="0" bIns="0" anchor="t">
-            <a:noAutofit/>
-          </a:bodyPr>
-          <a:lstStyle>
-            <a:lvl1pPr indent="0" algn="ctr">
-              <a:buNone/>
-              <a:defRPr lang="ru-RU" sz="1400" b="0" u="none" strike="noStrike">
-                <a:solidFill>
-                  <a:srgbClr val="000000"/>
-                </a:solidFill>
-                <a:effectLst/>
-                <a:uFillTx/>
-                <a:latin typeface="Times New Roman"/>
-              </a:defRPr>
-            </a:lvl1pPr>
-          </a:lstStyle>
-          <a:p>
-            <a:pPr indent="0" algn="ctr">
-              <a:buNone/>
-            </a:pPr>
-            <a:r>
-              <a:rPr lang="ru-RU" sz="1400" b="0" u="none" strike="noStrike">
-                <a:solidFill>
-                  <a:srgbClr val="000000"/>
-                </a:solidFill>
-                <a:effectLst/>
-                <a:uFillTx/>
-                <a:latin typeface="Times New Roman"/>
-              </a:rPr>
-              <a:t>&lt;нижний колонтитул&gt;</a:t>
-            </a:r>
-            <a:endParaRPr lang="ru-RU" sz="1400" b="0" u="none" strike="noStrike">
-              <a:solidFill>
-                <a:srgbClr val="000000"/>
-              </a:solidFill>
-              <a:effectLst/>
-              <a:uFillTx/>
-              <a:latin typeface="Times New Roman"/>
-            </a:endParaRPr>
-          </a:p>
-        </p:txBody>
-      </p:sp>
-      <p:sp>
-        <p:nvSpPr>
-          <p:cNvPr id="6" name="PlaceHolder 5"/>
-          <p:cNvSpPr>
-            <a:spLocks noGrp="1"/>
-          </p:cNvSpPr>
-          <p:nvPr>
-            <p:ph type="sldNum" idx="3"/>
-          </p:nvPr>
-        </p:nvSpPr>
-        <p:spPr>
-          <a:xfrm>
-            <a:off x="7227360" y="5165280"/>
-            <a:ext cx="2348280" cy="390600"/>
-          </a:xfrm>
-          <a:prstGeom prst="rect">
-            <a:avLst/>
-          </a:prstGeom>
-          <a:noFill/>
-          <a:ln w="0">
-            <a:noFill/>
-          </a:ln>
-        </p:spPr>
-        <p:txBody>
-          <a:bodyPr lIns="0" tIns="0" rIns="0" bIns="0" anchor="t">
-            <a:noAutofit/>
-          </a:bodyPr>
-          <a:lstStyle>
-            <a:lvl1pPr indent="0" algn="r">
-              <a:buNone/>
-              <a:defRPr lang="ru-RU" sz="1400" b="0" u="none" strike="noStrike">
-                <a:solidFill>
-                  <a:srgbClr val="000000"/>
-                </a:solidFill>
-                <a:effectLst/>
-                <a:uFillTx/>
-                <a:latin typeface="Times New Roman"/>
-              </a:defRPr>
-            </a:lvl1pPr>
-          </a:lstStyle>
-          <a:p>
-            <a:pPr indent="0" algn="r">
-              <a:buNone/>
-            </a:pPr>
-            <a:fld id="{B36F76B8-822B-423E-87D0-2634D4C68C98}" type="slidenum">
-              <a:rPr lang="ru-RU" sz="1400" b="0" u="none" strike="noStrike">
-                <a:solidFill>
-                  <a:srgbClr val="000000"/>
-                </a:solidFill>
-                <a:effectLst/>
-                <a:uFillTx/>
-                <a:latin typeface="Times New Roman"/>
-              </a:rPr>
-              <a:t>&lt;номер&gt;</a:t>
-            </a:fld>
-            <a:endParaRPr lang="ru-RU" sz="1400" b="0" u="none" strike="noStrike">
-              <a:solidFill>
-                <a:srgbClr val="000000"/>
-              </a:solidFill>
-              <a:effectLst/>
-              <a:uFillTx/>
-              <a:latin typeface="Times New Roman"/>
-            </a:endParaRPr>
-          </a:p>
-        </p:txBody>
-      </p:sp>
+    </p:spTree>
+  </p:cSld>
+</p:sldLayout>
+</file>
+
+<file path=ppt/slideMasters/slideMaster1.xml><?xml version="1.0" encoding="utf-8"?>
+<p:sldMaster xmlns:a="http://schemas.openxmlformats.org/drawingml/2006/main" xmlns:p="http://schemas.openxmlformats.org/presentationml/2006/main" xmlns:r="http://schemas.openxmlformats.org/officeDocument/2006/relationships" xmlns:p14="http://schemas.microsoft.com/office/powerpoint/2010/main" xmlns:p15="http://schemas.microsoft.com/office/powerpoint/2012/main" xmlns:mc="http://schemas.openxmlformats.org/markup-compatibility/2006">
+  <p:cSld>
+    <p:spTree>
+      <p:nvGrpSpPr>
+        <p:cNvPr id="1" name=""/>
+        <p:cNvGrpSpPr/>
+        <p:nvPr/>
+      </p:nvGrpSpPr>
+      <p:grpSpPr>
+        <a:xfrm>
+          <a:off x="0" y="0"/>
+          <a:ext cx="0" cy="0"/>
+          <a:chOff x="0" y="0"/>
+          <a:chExt cx="0" cy="0"/>
+        </a:xfrm>
+      </p:grpSpPr>
     </p:spTree>
   </p:cSld>
   <p:clrMap bg1="lt1" tx1="dk1" bg2="lt2" tx2="dk2" accent1="accent1" accent2="accent2" accent3="accent3" accent4="accent4" accent5="accent5" accent6="accent6" hlink="hlink" folHlink="folHlink"/>
@@ -1069,7 +1703,7 @@
       </p:grpSpPr>
       <p:sp>
         <p:nvSpPr>
-          <p:cNvPr id="11" name="PlaceHolder 1"/>
+          <p:cNvPr id="12" name="PlaceHolder 1"/>
           <p:cNvSpPr>
             <a:spLocks noGrp="1"/>
           </p:cNvSpPr>
@@ -1079,8 +1713,8 @@
         </p:nvSpPr>
         <p:spPr>
           <a:xfrm>
-            <a:off x="540000" y="1573560"/>
-            <a:ext cx="9071640" cy="946440"/>
+            <a:off x="540000" y="1572840"/>
+            <a:ext cx="9070920" cy="947160"/>
           </a:xfrm>
           <a:prstGeom prst="rect">
             <a:avLst/>
@@ -1096,7 +1730,13 @@
           </a:bodyPr>
           <a:p>
             <a:pPr indent="0" algn="ctr">
+              <a:lnSpc>
+                <a:spcPct val="100000"/>
+              </a:lnSpc>
               <a:buNone/>
+              <a:tabLst>
+                <a:tab pos="0" algn="l"/>
+              </a:tabLst>
             </a:pPr>
             <a:r>
               <a:rPr lang="ru-RU" sz="3200" b="1" u="none" strike="noStrike">
@@ -1107,7 +1747,29 @@
                 <a:uFillTx/>
                 <a:latin typeface="Arial"/>
               </a:rPr>
-              <a:t>Сравнение численных методов</a:t>
+              <a:t>Сравнение </a:t>
+            </a:r>
+            <a:r>
+              <a:rPr lang="ru-RU" sz="3200" b="1" u="none" strike="noStrike">
+                <a:solidFill>
+                  <a:srgbClr val="1A3A5C"/>
+                </a:solidFill>
+                <a:effectLst/>
+                <a:uFillTx/>
+                <a:latin typeface="Arial"/>
+              </a:rPr>
+              <a:t>численных </a:t>
+            </a:r>
+            <a:r>
+              <a:rPr lang="ru-RU" sz="3200" b="1" u="none" strike="noStrike">
+                <a:solidFill>
+                  <a:srgbClr val="1A3A5C"/>
+                </a:solidFill>
+                <a:effectLst/>
+                <a:uFillTx/>
+                <a:latin typeface="Arial"/>
+              </a:rPr>
+              <a:t>методов</a:t>
             </a:r>
             <a:br>
               <a:rPr sz="3200"/>
@@ -1121,7 +1783,18 @@
                 <a:uFillTx/>
                 <a:latin typeface="Arial"/>
               </a:rPr>
-              <a:t>решения уравнений</a:t>
+              <a:t>решения </a:t>
+            </a:r>
+            <a:r>
+              <a:rPr lang="ru-RU" sz="3200" b="1" u="none" strike="noStrike">
+                <a:solidFill>
+                  <a:srgbClr val="1A3A5C"/>
+                </a:solidFill>
+                <a:effectLst/>
+                <a:uFillTx/>
+                <a:latin typeface="Arial"/>
+              </a:rPr>
+              <a:t>уравнений</a:t>
             </a:r>
             <a:endParaRPr lang="ru-RU" sz="3200" b="0" u="none" strike="noStrike">
               <a:solidFill>
@@ -1136,7 +1809,7 @@
       </p:sp>
       <p:sp>
         <p:nvSpPr>
-          <p:cNvPr id="12" name="PlaceHolder 2"/>
+          <p:cNvPr id="13" name="PlaceHolder 2"/>
           <p:cNvSpPr>
             <a:spLocks noGrp="1"/>
           </p:cNvSpPr>
@@ -1147,7 +1820,7 @@
         <p:spPr>
           <a:xfrm>
             <a:off x="540000" y="3024720"/>
-            <a:ext cx="9071640" cy="2386080"/>
+            <a:ext cx="9070920" cy="2386800"/>
           </a:xfrm>
           <a:prstGeom prst="rect">
             <a:avLst/>
@@ -1163,7 +1836,16 @@
           </a:bodyPr>
           <a:p>
             <a:pPr indent="0" algn="just">
+              <a:lnSpc>
+                <a:spcPct val="100000"/>
+              </a:lnSpc>
+              <a:spcBef>
+                <a:spcPts val="884"/>
+              </a:spcBef>
               <a:buNone/>
+              <a:tabLst>
+                <a:tab pos="0" algn="l"/>
+              </a:tabLst>
             </a:pPr>
             <a:r>
               <a:rPr lang="ru-RU" sz="2000" b="0" u="none" strike="noStrike">
@@ -1174,11 +1856,33 @@
                 <a:uFillTx/>
                 <a:latin typeface="Arial"/>
               </a:rPr>
-              <a:t>Выполнил: ученик 10Б класса Субботин Матвей Денисович</a:t>
+              <a:t>Выполнил: ученик 10Б </a:t>
+            </a:r>
+            <a:r>
+              <a:rPr lang="ru-RU" sz="2000" b="0" u="none" strike="noStrike">
+                <a:solidFill>
+                  <a:srgbClr val="2D2D2D"/>
+                </a:solidFill>
+                <a:effectLst/>
+                <a:uFillTx/>
+                <a:latin typeface="Arial"/>
+              </a:rPr>
+              <a:t>класса Субботин </a:t>
+            </a:r>
+            <a:r>
+              <a:rPr lang="ru-RU" sz="2000" b="0" u="none" strike="noStrike">
+                <a:solidFill>
+                  <a:srgbClr val="2D2D2D"/>
+                </a:solidFill>
+                <a:effectLst/>
+                <a:uFillTx/>
+                <a:latin typeface="Arial"/>
+              </a:rPr>
+              <a:t>Матвей Денисович</a:t>
             </a:r>
             <a:endParaRPr lang="ru-RU" sz="2000" b="0" u="none" strike="noStrike">
               <a:solidFill>
-                <a:srgbClr val="2D2D2D"/>
+                <a:srgbClr val="000000"/>
               </a:solidFill>
               <a:effectLst/>
               <a:uFillTx/>
@@ -1187,11 +1891,20 @@
           </a:p>
           <a:p>
             <a:pPr indent="0" algn="just">
+              <a:lnSpc>
+                <a:spcPct val="100000"/>
+              </a:lnSpc>
+              <a:spcBef>
+                <a:spcPts val="884"/>
+              </a:spcBef>
               <a:buNone/>
+              <a:tabLst>
+                <a:tab pos="0" algn="l"/>
+              </a:tabLst>
             </a:pPr>
             <a:endParaRPr lang="ru-RU" sz="1800" b="0" u="none" strike="noStrike">
               <a:solidFill>
-                <a:srgbClr val="2D2D2D"/>
+                <a:srgbClr val="000000"/>
               </a:solidFill>
               <a:effectLst/>
               <a:uFillTx/>
@@ -1200,7 +1913,16 @@
           </a:p>
           <a:p>
             <a:pPr indent="0" algn="just">
+              <a:lnSpc>
+                <a:spcPct val="100000"/>
+              </a:lnSpc>
+              <a:spcBef>
+                <a:spcPts val="884"/>
+              </a:spcBef>
               <a:buNone/>
+              <a:tabLst>
+                <a:tab pos="0" algn="l"/>
+              </a:tabLst>
             </a:pPr>
             <a:r>
               <a:rPr lang="ru-RU" sz="2000" b="0" u="none" strike="noStrike">
@@ -1211,11 +1933,44 @@
                 <a:uFillTx/>
                 <a:latin typeface="Arial"/>
               </a:rPr>
-              <a:t>Руководитель: учитель информатики Филатов Алексей Александрович</a:t>
+              <a:t>Руководитель: учитель </a:t>
+            </a:r>
+            <a:r>
+              <a:rPr lang="ru-RU" sz="2000" b="0" u="none" strike="noStrike">
+                <a:solidFill>
+                  <a:srgbClr val="2D2D2D"/>
+                </a:solidFill>
+                <a:effectLst/>
+                <a:uFillTx/>
+                <a:latin typeface="Arial"/>
+              </a:rPr>
+              <a:t>информатики Филатов </a:t>
+            </a:r>
+            <a:r>
+              <a:rPr lang="ru-RU" sz="2000" b="0" u="none" strike="noStrike">
+                <a:solidFill>
+                  <a:srgbClr val="2D2D2D"/>
+                </a:solidFill>
+                <a:effectLst/>
+                <a:uFillTx/>
+                <a:latin typeface="Arial"/>
+              </a:rPr>
+              <a:t>Алексей </a:t>
+            </a:r>
+            <a:r>
+              <a:rPr lang="ru-RU" sz="2000" b="0" u="none" strike="noStrike">
+                <a:solidFill>
+                  <a:srgbClr val="2D2D2D"/>
+                </a:solidFill>
+                <a:effectLst/>
+                <a:uFillTx/>
+                <a:latin typeface="Arial"/>
+              </a:rPr>
+              <a:t>Александрович</a:t>
             </a:r>
             <a:endParaRPr lang="ru-RU" sz="2000" b="0" u="none" strike="noStrike">
               <a:solidFill>
-                <a:srgbClr val="2D2D2D"/>
+                <a:srgbClr val="000000"/>
               </a:solidFill>
               <a:effectLst/>
               <a:uFillTx/>
@@ -1224,11 +1979,20 @@
           </a:p>
           <a:p>
             <a:pPr indent="0" algn="just">
+              <a:lnSpc>
+                <a:spcPct val="100000"/>
+              </a:lnSpc>
+              <a:spcBef>
+                <a:spcPts val="884"/>
+              </a:spcBef>
               <a:buNone/>
+              <a:tabLst>
+                <a:tab pos="0" algn="l"/>
+              </a:tabLst>
             </a:pPr>
             <a:endParaRPr lang="ru-RU" sz="1800" b="0" u="none" strike="noStrike">
               <a:solidFill>
-                <a:srgbClr val="2D2D2D"/>
+                <a:srgbClr val="000000"/>
               </a:solidFill>
               <a:effectLst/>
               <a:uFillTx/>
@@ -1237,11 +2001,20 @@
           </a:p>
           <a:p>
             <a:pPr indent="0" algn="l">
+              <a:lnSpc>
+                <a:spcPct val="100000"/>
+              </a:lnSpc>
+              <a:spcBef>
+                <a:spcPts val="884"/>
+              </a:spcBef>
               <a:buNone/>
+              <a:tabLst>
+                <a:tab pos="0" algn="l"/>
+              </a:tabLst>
             </a:pPr>
             <a:endParaRPr lang="ru-RU" sz="1800" b="0" u="none" strike="noStrike">
               <a:solidFill>
-                <a:srgbClr val="2D2D2D"/>
+                <a:srgbClr val="000000"/>
               </a:solidFill>
               <a:effectLst/>
               <a:uFillTx/>
@@ -1250,11 +2023,20 @@
           </a:p>
           <a:p>
             <a:pPr indent="0" algn="l">
+              <a:lnSpc>
+                <a:spcPct val="100000"/>
+              </a:lnSpc>
+              <a:spcBef>
+                <a:spcPts val="884"/>
+              </a:spcBef>
               <a:buNone/>
+              <a:tabLst>
+                <a:tab pos="0" algn="l"/>
+              </a:tabLst>
             </a:pPr>
             <a:endParaRPr lang="ru-RU" sz="1800" b="0" u="none" strike="noStrike">
               <a:solidFill>
-                <a:srgbClr val="2D2D2D"/>
+                <a:srgbClr val="000000"/>
               </a:solidFill>
               <a:effectLst/>
               <a:uFillTx/>
@@ -1263,11 +2045,20 @@
           </a:p>
           <a:p>
             <a:pPr indent="0" algn="l">
+              <a:lnSpc>
+                <a:spcPct val="100000"/>
+              </a:lnSpc>
+              <a:spcBef>
+                <a:spcPts val="884"/>
+              </a:spcBef>
               <a:buNone/>
+              <a:tabLst>
+                <a:tab pos="0" algn="l"/>
+              </a:tabLst>
             </a:pPr>
             <a:endParaRPr lang="ru-RU" sz="1800" b="0" u="none" strike="noStrike">
               <a:solidFill>
-                <a:srgbClr val="2D2D2D"/>
+                <a:srgbClr val="000000"/>
               </a:solidFill>
               <a:effectLst/>
               <a:uFillTx/>
@@ -1276,11 +2067,20 @@
           </a:p>
           <a:p>
             <a:pPr indent="0" algn="l">
+              <a:lnSpc>
+                <a:spcPct val="100000"/>
+              </a:lnSpc>
+              <a:spcBef>
+                <a:spcPts val="884"/>
+              </a:spcBef>
               <a:buNone/>
+              <a:tabLst>
+                <a:tab pos="0" algn="l"/>
+              </a:tabLst>
             </a:pPr>
             <a:endParaRPr lang="ru-RU" sz="1800" b="0" u="none" strike="noStrike">
               <a:solidFill>
-                <a:srgbClr val="2D2D2D"/>
+                <a:srgbClr val="000000"/>
               </a:solidFill>
               <a:effectLst/>
               <a:uFillTx/>
@@ -1289,7 +2089,16 @@
           </a:p>
           <a:p>
             <a:pPr indent="0" algn="ctr">
+              <a:lnSpc>
+                <a:spcPct val="100000"/>
+              </a:lnSpc>
+              <a:spcBef>
+                <a:spcPts val="884"/>
+              </a:spcBef>
               <a:buNone/>
+              <a:tabLst>
+                <a:tab pos="0" algn="l"/>
+              </a:tabLst>
             </a:pPr>
             <a:r>
               <a:rPr lang="ru-RU" sz="2000" b="0" u="none" strike="noStrike">
@@ -1304,7 +2113,7 @@
             </a:r>
             <a:endParaRPr lang="ru-RU" sz="2000" b="0" u="none" strike="noStrike">
               <a:solidFill>
-                <a:srgbClr val="2D2D2D"/>
+                <a:srgbClr val="000000"/>
               </a:solidFill>
               <a:effectLst/>
               <a:uFillTx/>
@@ -1345,7 +2154,7 @@
       </p:grpSpPr>
       <p:sp>
         <p:nvSpPr>
-          <p:cNvPr id="29" name="PlaceHolder 1"/>
+          <p:cNvPr id="33" name="PlaceHolder 1"/>
           <p:cNvSpPr>
             <a:spLocks noGrp="1"/>
           </p:cNvSpPr>
@@ -1355,8 +2164,8 @@
         </p:nvSpPr>
         <p:spPr>
           <a:xfrm>
-            <a:off x="504000" y="226080"/>
-            <a:ext cx="9071640" cy="946440"/>
+            <a:off x="504000" y="-360"/>
+            <a:ext cx="9070920" cy="947160"/>
           </a:xfrm>
           <a:prstGeom prst="rect">
             <a:avLst/>
@@ -1372,7 +2181,13 @@
           </a:bodyPr>
           <a:p>
             <a:pPr indent="0" algn="ctr">
+              <a:lnSpc>
+                <a:spcPct val="100000"/>
+              </a:lnSpc>
               <a:buNone/>
+              <a:tabLst>
+                <a:tab pos="0" algn="l"/>
+              </a:tabLst>
             </a:pPr>
             <a:r>
               <a:rPr lang="ru-RU" sz="3200" b="1" u="none" strike="noStrike">
@@ -1385,7 +2200,7 @@
               </a:rPr>
               <a:t>Метод Ньютона (касательных)</a:t>
             </a:r>
-            <a:endParaRPr lang="ru-RU" sz="3200" b="1" u="none" strike="noStrike">
+            <a:endParaRPr lang="ru-RU" sz="3200" b="0" u="none" strike="noStrike">
               <a:solidFill>
                 <a:srgbClr val="1A3A5C"/>
               </a:solidFill>
@@ -1398,7 +2213,7 @@
       </p:sp>
       <p:sp>
         <p:nvSpPr>
-          <p:cNvPr id="30" name="PlaceHolder 2"/>
+          <p:cNvPr id="34" name="PlaceHolder 2"/>
           <p:cNvSpPr>
             <a:spLocks noGrp="1"/>
           </p:cNvSpPr>
@@ -1408,8 +2223,8 @@
         </p:nvSpPr>
         <p:spPr>
           <a:xfrm>
-            <a:off x="504000" y="1501200"/>
-            <a:ext cx="9071640" cy="3288240"/>
+            <a:off x="288360" y="946800"/>
+            <a:ext cx="9286560" cy="3287520"/>
           </a:xfrm>
           <a:prstGeom prst="rect">
             <a:avLst/>
@@ -1425,13 +2240,19 @@
           </a:bodyPr>
           <a:p>
             <a:pPr indent="0" algn="just">
+              <a:lnSpc>
+                <a:spcPct val="100000"/>
+              </a:lnSpc>
               <a:spcBef>
-                <a:spcPts val="1191"/>
+                <a:spcPts val="624"/>
               </a:spcBef>
               <a:spcAft>
-                <a:spcPts val="992"/>
+                <a:spcPts val="425"/>
               </a:spcAft>
               <a:buNone/>
+              <a:tabLst>
+                <a:tab pos="0" algn="l"/>
+              </a:tabLst>
             </a:pPr>
             <a:r>
               <a:rPr lang="ru-RU" sz="2000" b="1" u="none" strike="noStrike">
@@ -1466,13 +2287,19 @@
           </a:p>
           <a:p>
             <a:pPr indent="0" algn="just">
+              <a:lnSpc>
+                <a:spcPct val="100000"/>
+              </a:lnSpc>
               <a:spcBef>
-                <a:spcPts val="1191"/>
+                <a:spcPts val="624"/>
               </a:spcBef>
               <a:spcAft>
-                <a:spcPts val="992"/>
+                <a:spcPts val="425"/>
               </a:spcAft>
               <a:buNone/>
+              <a:tabLst>
+                <a:tab pos="0" algn="l"/>
+              </a:tabLst>
             </a:pPr>
             <a:r>
               <a:rPr lang="ru-RU" sz="2000" b="1" u="none" strike="noStrike">
@@ -1507,13 +2334,19 @@
           </a:p>
           <a:p>
             <a:pPr indent="0" algn="just">
+              <a:lnSpc>
+                <a:spcPct val="100000"/>
+              </a:lnSpc>
               <a:spcBef>
-                <a:spcPts val="1191"/>
+                <a:spcPts val="624"/>
               </a:spcBef>
               <a:spcAft>
-                <a:spcPts val="992"/>
+                <a:spcPts val="425"/>
               </a:spcAft>
               <a:buNone/>
+              <a:tabLst>
+                <a:tab pos="0" algn="l"/>
+              </a:tabLst>
             </a:pPr>
             <a:r>
               <a:rPr lang="ru-RU" sz="2000" b="1" u="none" strike="noStrike">
@@ -1548,13 +2381,19 @@
           </a:p>
           <a:p>
             <a:pPr indent="0" algn="just">
+              <a:lnSpc>
+                <a:spcPct val="100000"/>
+              </a:lnSpc>
               <a:spcBef>
-                <a:spcPts val="1191"/>
+                <a:spcPts val="624"/>
               </a:spcBef>
               <a:spcAft>
-                <a:spcPts val="992"/>
+                <a:spcPts val="425"/>
               </a:spcAft>
               <a:buNone/>
+              <a:tabLst>
+                <a:tab pos="0" algn="l"/>
+              </a:tabLst>
             </a:pPr>
             <a:endParaRPr lang="ru-RU" sz="1000" b="0" u="none" strike="noStrike">
               <a:solidFill>
@@ -1567,6 +2406,30 @@
           </a:p>
         </p:txBody>
       </p:sp>
+      <p:pic>
+        <p:nvPicPr>
+          <p:cNvPr id="35" name=""/>
+          <p:cNvPicPr/>
+          <p:nvPr/>
+        </p:nvPicPr>
+        <p:blipFill>
+          <a:blip r:embed="rId1"/>
+          <a:stretch/>
+        </p:blipFill>
+        <p:spPr>
+          <a:xfrm>
+            <a:off x="1344600" y="2716560"/>
+            <a:ext cx="4160160" cy="2703600"/>
+          </a:xfrm>
+          <a:prstGeom prst="rect">
+            <a:avLst/>
+          </a:prstGeom>
+          <a:noFill/>
+          <a:ln w="0">
+            <a:noFill/>
+          </a:ln>
+        </p:spPr>
+      </p:pic>
     </p:spTree>
   </p:cSld>
   <mc:AlternateContent>
@@ -1599,7 +2462,7 @@
       </p:grpSpPr>
       <p:sp>
         <p:nvSpPr>
-          <p:cNvPr id="31" name="PlaceHolder 1"/>
+          <p:cNvPr id="36" name="PlaceHolder 1"/>
           <p:cNvSpPr>
             <a:spLocks noGrp="1"/>
           </p:cNvSpPr>
@@ -1609,8 +2472,8 @@
         </p:nvSpPr>
         <p:spPr>
           <a:xfrm>
-            <a:off x="504000" y="226080"/>
-            <a:ext cx="9071640" cy="946440"/>
+            <a:off x="504000" y="225360"/>
+            <a:ext cx="9070920" cy="947160"/>
           </a:xfrm>
           <a:prstGeom prst="rect">
             <a:avLst/>
@@ -1626,7 +2489,13 @@
           </a:bodyPr>
           <a:p>
             <a:pPr indent="0" algn="ctr">
+              <a:lnSpc>
+                <a:spcPct val="100000"/>
+              </a:lnSpc>
               <a:buNone/>
+              <a:tabLst>
+                <a:tab pos="0" algn="l"/>
+              </a:tabLst>
             </a:pPr>
             <a:r>
               <a:rPr lang="ru-RU" sz="3200" b="1" u="none" strike="noStrike">
@@ -1637,9 +2506,31 @@
                 <a:uFillTx/>
                 <a:latin typeface="Arial"/>
               </a:rPr>
-              <a:t>Реализация метода Ньютона</a:t>
-            </a:r>
-            <a:endParaRPr lang="ru-RU" sz="3200" b="1" u="none" strike="noStrike">
+              <a:t>Реализаци</a:t>
+            </a:r>
+            <a:r>
+              <a:rPr lang="ru-RU" sz="3200" b="1" u="none" strike="noStrike">
+                <a:solidFill>
+                  <a:srgbClr val="1A3A5C"/>
+                </a:solidFill>
+                <a:effectLst/>
+                <a:uFillTx/>
+                <a:latin typeface="Arial"/>
+              </a:rPr>
+              <a:t>я метода </a:t>
+            </a:r>
+            <a:r>
+              <a:rPr lang="ru-RU" sz="3200" b="1" u="none" strike="noStrike">
+                <a:solidFill>
+                  <a:srgbClr val="1A3A5C"/>
+                </a:solidFill>
+                <a:effectLst/>
+                <a:uFillTx/>
+                <a:latin typeface="Arial"/>
+              </a:rPr>
+              <a:t>Ньютона</a:t>
+            </a:r>
+            <a:endParaRPr lang="ru-RU" sz="3200" b="0" u="none" strike="noStrike">
               <a:solidFill>
                 <a:srgbClr val="1A3A5C"/>
               </a:solidFill>
@@ -1652,7 +2543,7 @@
       </p:sp>
       <p:pic>
         <p:nvPicPr>
-          <p:cNvPr id="32" name=""/>
+          <p:cNvPr id="37" name=""/>
           <p:cNvPicPr/>
           <p:nvPr/>
         </p:nvPicPr>
@@ -1663,7 +2554,7 @@
         <p:spPr>
           <a:xfrm>
             <a:off x="286920" y="1210320"/>
-            <a:ext cx="9500040" cy="4289040"/>
+            <a:ext cx="9499320" cy="4288320"/>
           </a:xfrm>
           <a:prstGeom prst="rect">
             <a:avLst/>
@@ -1706,7 +2597,7 @@
       </p:grpSpPr>
       <p:sp>
         <p:nvSpPr>
-          <p:cNvPr id="33" name="PlaceHolder 1"/>
+          <p:cNvPr id="38" name="PlaceHolder 1"/>
           <p:cNvSpPr>
             <a:spLocks noGrp="1"/>
           </p:cNvSpPr>
@@ -1716,8 +2607,8 @@
         </p:nvSpPr>
         <p:spPr>
           <a:xfrm>
-            <a:off x="504000" y="-144720"/>
-            <a:ext cx="9071640" cy="946440"/>
+            <a:off x="504000" y="-145440"/>
+            <a:ext cx="9070920" cy="947160"/>
           </a:xfrm>
           <a:prstGeom prst="rect">
             <a:avLst/>
@@ -1733,7 +2624,13 @@
           </a:bodyPr>
           <a:p>
             <a:pPr indent="0" algn="ctr">
+              <a:lnSpc>
+                <a:spcPct val="100000"/>
+              </a:lnSpc>
               <a:buNone/>
+              <a:tabLst>
+                <a:tab pos="0" algn="l"/>
+              </a:tabLst>
             </a:pPr>
             <a:r>
               <a:rPr lang="ru-RU" sz="3200" b="1" u="none" strike="noStrike">
@@ -1746,7 +2643,7 @@
               </a:rPr>
               <a:t>Демонстрация работы программы</a:t>
             </a:r>
-            <a:endParaRPr lang="ru-RU" sz="3200" b="1" u="none" strike="noStrike">
+            <a:endParaRPr lang="ru-RU" sz="3200" b="0" u="none" strike="noStrike">
               <a:solidFill>
                 <a:srgbClr val="1A3A5C"/>
               </a:solidFill>
@@ -1759,7 +2656,7 @@
       </p:sp>
       <p:pic>
         <p:nvPicPr>
-          <p:cNvPr id="34" name=""/>
+          <p:cNvPr id="39" name=""/>
           <p:cNvPicPr/>
           <p:nvPr/>
         </p:nvPicPr>
@@ -1770,7 +2667,7 @@
         <p:spPr>
           <a:xfrm>
             <a:off x="504000" y="702360"/>
-            <a:ext cx="2722680" cy="1934280"/>
+            <a:ext cx="2721960" cy="1933560"/>
           </a:xfrm>
           <a:prstGeom prst="rect">
             <a:avLst/>
@@ -1783,7 +2680,7 @@
       </p:pic>
       <p:pic>
         <p:nvPicPr>
-          <p:cNvPr id="35" name=""/>
+          <p:cNvPr id="40" name=""/>
           <p:cNvPicPr/>
           <p:nvPr/>
         </p:nvPicPr>
@@ -1794,7 +2691,7 @@
         <p:spPr>
           <a:xfrm>
             <a:off x="3688920" y="702360"/>
-            <a:ext cx="2552760" cy="1926000"/>
+            <a:ext cx="2552040" cy="1925280"/>
           </a:xfrm>
           <a:prstGeom prst="rect">
             <a:avLst/>
@@ -1807,7 +2704,7 @@
       </p:pic>
       <p:pic>
         <p:nvPicPr>
-          <p:cNvPr id="36" name=""/>
+          <p:cNvPr id="41" name=""/>
           <p:cNvPicPr/>
           <p:nvPr/>
         </p:nvPicPr>
@@ -1818,7 +2715,7 @@
         <p:spPr>
           <a:xfrm>
             <a:off x="784440" y="2793240"/>
-            <a:ext cx="4139280" cy="2328480"/>
+            <a:ext cx="4138560" cy="2327760"/>
           </a:xfrm>
           <a:prstGeom prst="rect">
             <a:avLst/>
@@ -1831,7 +2728,7 @@
       </p:pic>
       <p:pic>
         <p:nvPicPr>
-          <p:cNvPr id="37" name=""/>
+          <p:cNvPr id="42" name=""/>
           <p:cNvPicPr/>
           <p:nvPr/>
         </p:nvPicPr>
@@ -1842,7 +2739,7 @@
         <p:spPr>
           <a:xfrm>
             <a:off x="5287680" y="2792880"/>
-            <a:ext cx="3995280" cy="2328840"/>
+            <a:ext cx="3994560" cy="2328120"/>
           </a:xfrm>
           <a:prstGeom prst="rect">
             <a:avLst/>
@@ -1855,7 +2752,7 @@
       </p:pic>
       <p:pic>
         <p:nvPicPr>
-          <p:cNvPr id="38" name=""/>
+          <p:cNvPr id="43" name=""/>
           <p:cNvPicPr/>
           <p:nvPr/>
         </p:nvPicPr>
@@ -1866,7 +2763,7 @@
         <p:spPr>
           <a:xfrm>
             <a:off x="6693120" y="702360"/>
-            <a:ext cx="2882520" cy="1921680"/>
+            <a:ext cx="2881800" cy="1920960"/>
           </a:xfrm>
           <a:prstGeom prst="rect">
             <a:avLst/>
@@ -1879,14 +2776,14 @@
       </p:pic>
       <p:sp>
         <p:nvSpPr>
-          <p:cNvPr id="39" name=""/>
-          <p:cNvSpPr txBox="1"/>
+          <p:cNvPr id="44" name=""/>
+          <p:cNvSpPr/>
           <p:nvPr/>
         </p:nvSpPr>
         <p:spPr>
           <a:xfrm>
             <a:off x="718560" y="5269680"/>
-            <a:ext cx="8771760" cy="602280"/>
+            <a:ext cx="8771040" cy="601560"/>
           </a:xfrm>
           <a:prstGeom prst="rect">
             <a:avLst/>
@@ -1896,12 +2793,21 @@
             <a:noFill/>
           </a:ln>
         </p:spPr>
+        <p:style>
+          <a:lnRef idx="0"/>
+          <a:fillRef idx="0"/>
+          <a:effectRef idx="0"/>
+          <a:fontRef idx="minor"/>
+        </p:style>
         <p:txBody>
           <a:bodyPr lIns="90000" tIns="45000" rIns="90000" bIns="45000" anchor="t" anchorCtr="1">
             <a:spAutoFit/>
           </a:bodyPr>
           <a:p>
             <a:pPr algn="ctr">
+              <a:lnSpc>
+                <a:spcPct val="100000"/>
+              </a:lnSpc>
               <a:spcBef>
                 <a:spcPts val="1191"/>
               </a:spcBef>
@@ -1917,6 +2823,7 @@
                 <a:effectLst/>
                 <a:uFillTx/>
                 <a:latin typeface="Arial"/>
+                <a:ea typeface="DejaVu Sans"/>
               </a:rPr>
               <a:t>Пример работы программы: решение уравнения x² − 2 = 0 методом Ньютона</a:t>
             </a:r>
@@ -1963,7 +2870,7 @@
       </p:grpSpPr>
       <p:sp>
         <p:nvSpPr>
-          <p:cNvPr id="40" name="PlaceHolder 1"/>
+          <p:cNvPr id="45" name="PlaceHolder 1"/>
           <p:cNvSpPr>
             <a:spLocks noGrp="1"/>
           </p:cNvSpPr>
@@ -1973,8 +2880,8 @@
         </p:nvSpPr>
         <p:spPr>
           <a:xfrm>
-            <a:off x="504000" y="226080"/>
-            <a:ext cx="9071640" cy="946440"/>
+            <a:off x="504000" y="225360"/>
+            <a:ext cx="9070920" cy="947160"/>
           </a:xfrm>
           <a:prstGeom prst="rect">
             <a:avLst/>
@@ -1990,7 +2897,13 @@
           </a:bodyPr>
           <a:p>
             <a:pPr indent="0" algn="ctr">
+              <a:lnSpc>
+                <a:spcPct val="100000"/>
+              </a:lnSpc>
               <a:buNone/>
+              <a:tabLst>
+                <a:tab pos="0" algn="l"/>
+              </a:tabLst>
             </a:pPr>
             <a:r>
               <a:rPr lang="ru-RU" sz="3200" b="1" u="none" strike="noStrike">
@@ -2003,7 +2916,7 @@
               </a:rPr>
               <a:t>Сравнительная характеристика методов</a:t>
             </a:r>
-            <a:endParaRPr lang="ru-RU" sz="3200" b="1" u="none" strike="noStrike">
+            <a:endParaRPr lang="ru-RU" sz="3200" b="0" u="none" strike="noStrike">
               <a:solidFill>
                 <a:srgbClr val="1A3A5C"/>
               </a:solidFill>
@@ -2016,13 +2929,13 @@
       </p:sp>
       <p:graphicFrame>
         <p:nvGraphicFramePr>
-          <p:cNvPr id="41" name=""/>
+          <p:cNvPr id="46" name=""/>
           <p:cNvGraphicFramePr/>
           <p:nvPr/>
         </p:nvGraphicFramePr>
         <p:xfrm>
           <a:off x="504000" y="1517400"/>
-          <a:ext cx="9071280" cy="2077560"/>
+          <a:ext cx="9071280" cy="2080080"/>
         </p:xfrm>
         <a:graphic>
           <a:graphicData uri="http://schemas.openxmlformats.org/drawingml/2006/table">
@@ -2041,8 +2954,13 @@
                       <a:noAutofit/>
                     </a:bodyPr>
                     <a:p>
-                      <a:pPr indent="0" algn="ctr">
-                        <a:buNone/>
+                      <a:pPr algn="ctr">
+                        <a:lnSpc>
+                          <a:spcPct val="100000"/>
+                        </a:lnSpc>
+                        <a:tabLst>
+                          <a:tab pos="0" algn="l"/>
+                        </a:tabLst>
                       </a:pPr>
                       <a:r>
                         <a:rPr lang="ru-RU" sz="1800" b="0" u="none" strike="noStrike">
@@ -2099,8 +3017,13 @@
                       <a:noAutofit/>
                     </a:bodyPr>
                     <a:p>
-                      <a:pPr indent="0" algn="ctr">
-                        <a:buNone/>
+                      <a:pPr algn="ctr">
+                        <a:lnSpc>
+                          <a:spcPct val="100000"/>
+                        </a:lnSpc>
+                        <a:tabLst>
+                          <a:tab pos="0" algn="l"/>
+                        </a:tabLst>
                       </a:pPr>
                       <a:r>
                         <a:rPr lang="ru-RU" sz="1800" b="0" u="none" strike="noStrike">
@@ -2157,8 +3080,13 @@
                       <a:noAutofit/>
                     </a:bodyPr>
                     <a:p>
-                      <a:pPr indent="0" algn="ctr">
-                        <a:buNone/>
+                      <a:pPr algn="ctr">
+                        <a:lnSpc>
+                          <a:spcPct val="100000"/>
+                        </a:lnSpc>
+                        <a:tabLst>
+                          <a:tab pos="0" algn="l"/>
+                        </a:tabLst>
                       </a:pPr>
                       <a:r>
                         <a:rPr lang="ru-RU" sz="1800" b="0" u="none" strike="noStrike">
@@ -2215,8 +3143,13 @@
                       <a:noAutofit/>
                     </a:bodyPr>
                     <a:p>
-                      <a:pPr indent="0" algn="ctr">
-                        <a:buNone/>
+                      <a:pPr algn="ctr">
+                        <a:lnSpc>
+                          <a:spcPct val="100000"/>
+                        </a:lnSpc>
+                        <a:tabLst>
+                          <a:tab pos="0" algn="l"/>
+                        </a:tabLst>
                       </a:pPr>
                       <a:r>
                         <a:rPr lang="ru-RU" sz="1800" b="0" u="none" strike="noStrike">
@@ -2275,8 +3208,13 @@
                       <a:noAutofit/>
                     </a:bodyPr>
                     <a:p>
-                      <a:pPr indent="0" algn="l">
-                        <a:buNone/>
+                      <a:pPr>
+                        <a:lnSpc>
+                          <a:spcPct val="100000"/>
+                        </a:lnSpc>
+                        <a:tabLst>
+                          <a:tab pos="0" algn="l"/>
+                        </a:tabLst>
                       </a:pPr>
                       <a:r>
                         <a:rPr lang="ru-RU" sz="1800" b="0" u="none" strike="noStrike">
@@ -2333,8 +3271,13 @@
                       <a:noAutofit/>
                     </a:bodyPr>
                     <a:p>
-                      <a:pPr indent="0" algn="l">
-                        <a:buNone/>
+                      <a:pPr>
+                        <a:lnSpc>
+                          <a:spcPct val="100000"/>
+                        </a:lnSpc>
+                        <a:tabLst>
+                          <a:tab pos="0" algn="l"/>
+                        </a:tabLst>
                       </a:pPr>
                       <a:r>
                         <a:rPr lang="ru-RU" sz="1800" b="0" u="none" strike="noStrike">
@@ -2391,8 +3334,13 @@
                       <a:noAutofit/>
                     </a:bodyPr>
                     <a:p>
-                      <a:pPr indent="0" algn="l">
-                        <a:buNone/>
+                      <a:pPr>
+                        <a:lnSpc>
+                          <a:spcPct val="100000"/>
+                        </a:lnSpc>
+                        <a:tabLst>
+                          <a:tab pos="0" algn="l"/>
+                        </a:tabLst>
                       </a:pPr>
                       <a:r>
                         <a:rPr lang="ru-RU" sz="1800" b="0" u="none" strike="noStrike">
@@ -2449,8 +3397,13 @@
                       <a:noAutofit/>
                     </a:bodyPr>
                     <a:p>
-                      <a:pPr indent="0" algn="l">
-                        <a:buNone/>
+                      <a:pPr>
+                        <a:lnSpc>
+                          <a:spcPct val="100000"/>
+                        </a:lnSpc>
+                        <a:tabLst>
+                          <a:tab pos="0" algn="l"/>
+                        </a:tabLst>
                       </a:pPr>
                       <a:r>
                         <a:rPr lang="ru-RU" sz="1800" b="0" u="none" strike="noStrike">
@@ -2509,8 +3462,13 @@
                       <a:noAutofit/>
                     </a:bodyPr>
                     <a:p>
-                      <a:pPr indent="0" algn="l">
-                        <a:buNone/>
+                      <a:pPr>
+                        <a:lnSpc>
+                          <a:spcPct val="100000"/>
+                        </a:lnSpc>
+                        <a:tabLst>
+                          <a:tab pos="0" algn="l"/>
+                        </a:tabLst>
                       </a:pPr>
                       <a:r>
                         <a:rPr lang="ru-RU" sz="1800" b="0" u="none" strike="noStrike">
@@ -2567,8 +3525,13 @@
                       <a:noAutofit/>
                     </a:bodyPr>
                     <a:p>
-                      <a:pPr indent="0" algn="l">
-                        <a:buNone/>
+                      <a:pPr>
+                        <a:lnSpc>
+                          <a:spcPct val="100000"/>
+                        </a:lnSpc>
+                        <a:tabLst>
+                          <a:tab pos="0" algn="l"/>
+                        </a:tabLst>
                       </a:pPr>
                       <a:r>
                         <a:rPr lang="ru-RU" sz="1800" b="0" u="none" strike="noStrike">
@@ -2625,8 +3588,13 @@
                       <a:noAutofit/>
                     </a:bodyPr>
                     <a:p>
-                      <a:pPr indent="0" algn="l">
-                        <a:buNone/>
+                      <a:pPr>
+                        <a:lnSpc>
+                          <a:spcPct val="100000"/>
+                        </a:lnSpc>
+                        <a:tabLst>
+                          <a:tab pos="0" algn="l"/>
+                        </a:tabLst>
                       </a:pPr>
                       <a:r>
                         <a:rPr lang="ru-RU" sz="1800" b="0" u="none" strike="noStrike">
@@ -2683,8 +3651,13 @@
                       <a:noAutofit/>
                     </a:bodyPr>
                     <a:p>
-                      <a:pPr indent="0" algn="l">
-                        <a:buNone/>
+                      <a:pPr>
+                        <a:lnSpc>
+                          <a:spcPct val="100000"/>
+                        </a:lnSpc>
+                        <a:tabLst>
+                          <a:tab pos="0" algn="l"/>
+                        </a:tabLst>
                       </a:pPr>
                       <a:r>
                         <a:rPr lang="ru-RU" sz="1800" b="0" u="none" strike="noStrike">
@@ -2743,8 +3716,13 @@
                       <a:noAutofit/>
                     </a:bodyPr>
                     <a:p>
-                      <a:pPr indent="0" algn="l">
-                        <a:buNone/>
+                      <a:pPr>
+                        <a:lnSpc>
+                          <a:spcPct val="100000"/>
+                        </a:lnSpc>
+                        <a:tabLst>
+                          <a:tab pos="0" algn="l"/>
+                        </a:tabLst>
                       </a:pPr>
                       <a:r>
                         <a:rPr lang="ru-RU" sz="1800" b="0" u="none" strike="noStrike">
@@ -2801,8 +3779,13 @@
                       <a:noAutofit/>
                     </a:bodyPr>
                     <a:p>
-                      <a:pPr indent="0" algn="l">
-                        <a:buNone/>
+                      <a:pPr>
+                        <a:lnSpc>
+                          <a:spcPct val="100000"/>
+                        </a:lnSpc>
+                        <a:tabLst>
+                          <a:tab pos="0" algn="l"/>
+                        </a:tabLst>
                       </a:pPr>
                       <a:r>
                         <a:rPr lang="ru-RU" sz="1800" b="0" u="none" strike="noStrike">
@@ -2859,8 +3842,13 @@
                       <a:noAutofit/>
                     </a:bodyPr>
                     <a:p>
-                      <a:pPr indent="0" algn="l">
-                        <a:buNone/>
+                      <a:pPr>
+                        <a:lnSpc>
+                          <a:spcPct val="100000"/>
+                        </a:lnSpc>
+                        <a:tabLst>
+                          <a:tab pos="0" algn="l"/>
+                        </a:tabLst>
                       </a:pPr>
                       <a:r>
                         <a:rPr lang="ru-RU" sz="1800" b="0" u="none" strike="noStrike">
@@ -2950,8 +3938,13 @@
                       <a:noAutofit/>
                     </a:bodyPr>
                     <a:p>
-                      <a:pPr indent="0" algn="l">
-                        <a:buNone/>
+                      <a:pPr>
+                        <a:lnSpc>
+                          <a:spcPct val="100000"/>
+                        </a:lnSpc>
+                        <a:tabLst>
+                          <a:tab pos="0" algn="l"/>
+                        </a:tabLst>
                       </a:pPr>
                       <a:r>
                         <a:rPr lang="ru-RU" sz="1800" b="0" u="none" strike="noStrike">
@@ -3021,8 +4014,13 @@
                       <a:noAutofit/>
                     </a:bodyPr>
                     <a:p>
-                      <a:pPr indent="0" algn="l">
-                        <a:buNone/>
+                      <a:pPr>
+                        <a:lnSpc>
+                          <a:spcPct val="100000"/>
+                        </a:lnSpc>
+                        <a:tabLst>
+                          <a:tab pos="0" algn="l"/>
+                        </a:tabLst>
                       </a:pPr>
                       <a:r>
                         <a:rPr lang="ru-RU" sz="1800" b="0" u="none" strike="noStrike">
@@ -3079,8 +4077,13 @@
                       <a:noAutofit/>
                     </a:bodyPr>
                     <a:p>
-                      <a:pPr indent="0" algn="l">
-                        <a:buNone/>
+                      <a:pPr>
+                        <a:lnSpc>
+                          <a:spcPct val="100000"/>
+                        </a:lnSpc>
+                        <a:tabLst>
+                          <a:tab pos="0" algn="l"/>
+                        </a:tabLst>
                       </a:pPr>
                       <a:r>
                         <a:rPr lang="ru-RU" sz="1800" b="0" u="none" strike="noStrike">
@@ -3137,8 +4140,13 @@
                       <a:noAutofit/>
                     </a:bodyPr>
                     <a:p>
-                      <a:pPr indent="0" algn="l">
-                        <a:buNone/>
+                      <a:pPr>
+                        <a:lnSpc>
+                          <a:spcPct val="100000"/>
+                        </a:lnSpc>
+                        <a:tabLst>
+                          <a:tab pos="0" algn="l"/>
+                        </a:tabLst>
                       </a:pPr>
                       <a:r>
                         <a:rPr lang="ru-RU" sz="1800" b="0" u="none" strike="noStrike">
@@ -3195,8 +4203,13 @@
                       <a:noAutofit/>
                     </a:bodyPr>
                     <a:p>
-                      <a:pPr indent="0" algn="l">
-                        <a:buNone/>
+                      <a:pPr>
+                        <a:lnSpc>
+                          <a:spcPct val="100000"/>
+                        </a:lnSpc>
+                        <a:tabLst>
+                          <a:tab pos="0" algn="l"/>
+                        </a:tabLst>
                       </a:pPr>
                       <a:r>
                         <a:rPr lang="ru-RU" sz="1800" b="0" u="none" strike="noStrike">
@@ -3255,8 +4268,13 @@
                       <a:noAutofit/>
                     </a:bodyPr>
                     <a:p>
-                      <a:pPr indent="0" algn="l">
-                        <a:buNone/>
+                      <a:pPr>
+                        <a:lnSpc>
+                          <a:spcPct val="100000"/>
+                        </a:lnSpc>
+                        <a:tabLst>
+                          <a:tab pos="0" algn="l"/>
+                        </a:tabLst>
                       </a:pPr>
                       <a:r>
                         <a:rPr lang="ru-RU" sz="1800" b="0" u="none" strike="noStrike">
@@ -3313,8 +4331,13 @@
                       <a:noAutofit/>
                     </a:bodyPr>
                     <a:p>
-                      <a:pPr indent="0" algn="l">
-                        <a:buNone/>
+                      <a:pPr>
+                        <a:lnSpc>
+                          <a:spcPct val="100000"/>
+                        </a:lnSpc>
+                        <a:tabLst>
+                          <a:tab pos="0" algn="l"/>
+                        </a:tabLst>
                       </a:pPr>
                       <a:r>
                         <a:rPr lang="ru-RU" sz="1800" b="0" u="none" strike="noStrike">
@@ -3371,8 +4394,13 @@
                       <a:noAutofit/>
                     </a:bodyPr>
                     <a:p>
-                      <a:pPr indent="0" algn="l">
-                        <a:buNone/>
+                      <a:pPr>
+                        <a:lnSpc>
+                          <a:spcPct val="100000"/>
+                        </a:lnSpc>
+                        <a:tabLst>
+                          <a:tab pos="0" algn="l"/>
+                        </a:tabLst>
                       </a:pPr>
                       <a:r>
                         <a:rPr lang="ru-RU" sz="1800" b="0" u="none" strike="noStrike">
@@ -3429,8 +4457,13 @@
                       <a:noAutofit/>
                     </a:bodyPr>
                     <a:p>
-                      <a:pPr indent="0" algn="l">
-                        <a:buNone/>
+                      <a:pPr>
+                        <a:lnSpc>
+                          <a:spcPct val="100000"/>
+                        </a:lnSpc>
+                        <a:tabLst>
+                          <a:tab pos="0" algn="l"/>
+                        </a:tabLst>
                       </a:pPr>
                       <a:r>
                         <a:rPr lang="ru-RU" sz="1800" b="0" u="none" strike="noStrike">
@@ -3518,7 +4551,7 @@
       </p:grpSpPr>
       <p:sp>
         <p:nvSpPr>
-          <p:cNvPr id="42" name="PlaceHolder 1"/>
+          <p:cNvPr id="47" name="PlaceHolder 1"/>
           <p:cNvSpPr>
             <a:spLocks noGrp="1"/>
           </p:cNvSpPr>
@@ -3528,8 +4561,8 @@
         </p:nvSpPr>
         <p:spPr>
           <a:xfrm>
-            <a:off x="504000" y="226080"/>
-            <a:ext cx="9071640" cy="946440"/>
+            <a:off x="504000" y="225360"/>
+            <a:ext cx="9070920" cy="947160"/>
           </a:xfrm>
           <a:prstGeom prst="rect">
             <a:avLst/>
@@ -3545,6 +4578,9 @@
           </a:bodyPr>
           <a:p>
             <a:pPr indent="0" algn="ctr">
+              <a:lnSpc>
+                <a:spcPct val="100000"/>
+              </a:lnSpc>
               <a:spcBef>
                 <a:spcPts val="1191"/>
               </a:spcBef>
@@ -3552,6 +4588,9 @@
                 <a:spcPts val="992"/>
               </a:spcAft>
               <a:buNone/>
+              <a:tabLst>
+                <a:tab pos="0" algn="l"/>
+              </a:tabLst>
             </a:pPr>
             <a:r>
               <a:rPr lang="ru-RU" sz="3200" b="1" u="none" strike="noStrike">
@@ -3565,9 +4604,9 @@
               <a:t>Результаты экспериментов (ε = 0.0001)</a:t>
             </a:r>
             <a:br>
-              <a:rPr sz="1600"/>
+              <a:rPr sz="3200"/>
             </a:br>
-            <a:endParaRPr lang="ru-RU" sz="3200" b="1" u="none" strike="noStrike">
+            <a:endParaRPr lang="ru-RU" sz="3200" b="0" u="none" strike="noStrike">
               <a:solidFill>
                 <a:srgbClr val="1A3A5C"/>
               </a:solidFill>
@@ -3580,13 +4619,13 @@
       </p:sp>
       <p:graphicFrame>
         <p:nvGraphicFramePr>
-          <p:cNvPr id="43" name=""/>
+          <p:cNvPr id="48" name=""/>
           <p:cNvGraphicFramePr/>
           <p:nvPr/>
         </p:nvGraphicFramePr>
         <p:xfrm>
           <a:off x="512280" y="1453680"/>
-          <a:ext cx="9071280" cy="2077560"/>
+          <a:ext cx="9071280" cy="2426760"/>
         </p:xfrm>
         <a:graphic>
           <a:graphicData uri="http://schemas.openxmlformats.org/drawingml/2006/table">
@@ -3601,12 +4640,17 @@
               <a:tr h="346320">
                 <a:tc>
                   <a:txBody>
-                    <a:bodyPr lIns="36000" tIns="36000" rIns="36000" bIns="36000" anchor="t" anchorCtr="1">
+                    <a:bodyPr lIns="36000" tIns="36000" rIns="36000" bIns="36000" anchor="t">
                       <a:noAutofit/>
                     </a:bodyPr>
                     <a:p>
-                      <a:pPr indent="0" algn="ctr">
-                        <a:buNone/>
+                      <a:pPr algn="ctr">
+                        <a:lnSpc>
+                          <a:spcPct val="100000"/>
+                        </a:lnSpc>
+                        <a:tabLst>
+                          <a:tab pos="0" algn="l"/>
+                        </a:tabLst>
                       </a:pPr>
                       <a:r>
                         <a:rPr lang="ru-RU" sz="1800" b="0" u="none" strike="noStrike">
@@ -3663,8 +4707,13 @@
                       <a:noAutofit/>
                     </a:bodyPr>
                     <a:p>
-                      <a:pPr indent="0" algn="ctr">
-                        <a:buNone/>
+                      <a:pPr algn="ctr">
+                        <a:lnSpc>
+                          <a:spcPct val="100000"/>
+                        </a:lnSpc>
+                        <a:tabLst>
+                          <a:tab pos="0" algn="l"/>
+                        </a:tabLst>
                       </a:pPr>
                       <a:r>
                         <a:rPr lang="ru-RU" sz="1800" b="0" u="none" strike="noStrike">
@@ -3721,8 +4770,13 @@
                       <a:noAutofit/>
                     </a:bodyPr>
                     <a:p>
-                      <a:pPr indent="0" algn="ctr">
-                        <a:buNone/>
+                      <a:pPr algn="ctr">
+                        <a:lnSpc>
+                          <a:spcPct val="100000"/>
+                        </a:lnSpc>
+                        <a:tabLst>
+                          <a:tab pos="0" algn="l"/>
+                        </a:tabLst>
                       </a:pPr>
                       <a:r>
                         <a:rPr lang="ru-RU" sz="1800" b="0" u="none" strike="noStrike">
@@ -3779,8 +4833,13 @@
                       <a:noAutofit/>
                     </a:bodyPr>
                     <a:p>
-                      <a:pPr indent="0" algn="ctr">
-                        <a:buNone/>
+                      <a:pPr algn="ctr">
+                        <a:lnSpc>
+                          <a:spcPct val="100000"/>
+                        </a:lnSpc>
+                        <a:tabLst>
+                          <a:tab pos="0" algn="l"/>
+                        </a:tabLst>
                       </a:pPr>
                       <a:r>
                         <a:rPr lang="ru-RU" sz="1800" b="0" u="none" strike="noStrike">
@@ -3839,14 +4898,19 @@
                       <a:noAutofit/>
                     </a:bodyPr>
                     <a:p>
-                      <a:pPr indent="0" algn="l">
+                      <a:pPr>
+                        <a:lnSpc>
+                          <a:spcPct val="100000"/>
+                        </a:lnSpc>
                         <a:spcBef>
                           <a:spcPts val="1191"/>
                         </a:spcBef>
                         <a:spcAft>
                           <a:spcPts val="992"/>
                         </a:spcAft>
-                        <a:buNone/>
+                        <a:tabLst>
+                          <a:tab pos="0" algn="l"/>
+                        </a:tabLst>
                       </a:pPr>
                       <a:r>
                         <a:rPr lang="ru-RU" sz="1800" b="0" u="none" strike="noStrike">
@@ -3903,8 +4967,13 @@
                       <a:noAutofit/>
                     </a:bodyPr>
                     <a:p>
-                      <a:pPr indent="0" algn="l">
-                        <a:buNone/>
+                      <a:pPr>
+                        <a:lnSpc>
+                          <a:spcPct val="100000"/>
+                        </a:lnSpc>
+                        <a:tabLst>
+                          <a:tab pos="0" algn="l"/>
+                        </a:tabLst>
                       </a:pPr>
                       <a:r>
                         <a:rPr lang="ru-RU" sz="1800" b="0" u="none" strike="noStrike">
@@ -3961,8 +5030,13 @@
                       <a:noAutofit/>
                     </a:bodyPr>
                     <a:p>
-                      <a:pPr indent="0" algn="l">
-                        <a:buNone/>
+                      <a:pPr>
+                        <a:lnSpc>
+                          <a:spcPct val="100000"/>
+                        </a:lnSpc>
+                        <a:tabLst>
+                          <a:tab pos="0" algn="l"/>
+                        </a:tabLst>
                       </a:pPr>
                       <a:r>
                         <a:rPr lang="ru-RU" sz="1800" b="0" u="none" strike="noStrike">
@@ -4019,8 +5093,13 @@
                       <a:noAutofit/>
                     </a:bodyPr>
                     <a:p>
-                      <a:pPr indent="0" algn="l">
-                        <a:buNone/>
+                      <a:pPr>
+                        <a:lnSpc>
+                          <a:spcPct val="100000"/>
+                        </a:lnSpc>
+                        <a:tabLst>
+                          <a:tab pos="0" algn="l"/>
+                        </a:tabLst>
                       </a:pPr>
                       <a:r>
                         <a:rPr lang="ru-RU" sz="1800" b="0" u="none" strike="noStrike">
@@ -4079,14 +5158,19 @@
                       <a:noAutofit/>
                     </a:bodyPr>
                     <a:p>
-                      <a:pPr indent="0" algn="l">
+                      <a:pPr>
+                        <a:lnSpc>
+                          <a:spcPct val="100000"/>
+                        </a:lnSpc>
                         <a:spcBef>
                           <a:spcPts val="1191"/>
                         </a:spcBef>
                         <a:spcAft>
                           <a:spcPts val="992"/>
                         </a:spcAft>
-                        <a:buNone/>
+                        <a:tabLst>
+                          <a:tab pos="0" algn="l"/>
+                        </a:tabLst>
                       </a:pPr>
                       <a:r>
                         <a:rPr lang="ru-RU" sz="1800" b="0" u="none" strike="noStrike">
@@ -4105,7 +5189,7 @@
                         </a:solidFill>
                         <a:effectLst/>
                         <a:uFillTx/>
-                        <a:latin typeface="Times New Roman"/>
+                        <a:latin typeface="Arial"/>
                       </a:endParaRPr>
                     </a:p>
                   </a:txBody>
@@ -4143,8 +5227,13 @@
                       <a:noAutofit/>
                     </a:bodyPr>
                     <a:p>
-                      <a:pPr indent="0" algn="l">
-                        <a:buNone/>
+                      <a:pPr>
+                        <a:lnSpc>
+                          <a:spcPct val="100000"/>
+                        </a:lnSpc>
+                        <a:tabLst>
+                          <a:tab pos="0" algn="l"/>
+                        </a:tabLst>
                       </a:pPr>
                       <a:r>
                         <a:rPr lang="ru-RU" sz="1800" b="0" u="none" strike="noStrike">
@@ -4201,8 +5290,13 @@
                       <a:noAutofit/>
                     </a:bodyPr>
                     <a:p>
-                      <a:pPr indent="0" algn="l">
-                        <a:buNone/>
+                      <a:pPr>
+                        <a:lnSpc>
+                          <a:spcPct val="100000"/>
+                        </a:lnSpc>
+                        <a:tabLst>
+                          <a:tab pos="0" algn="l"/>
+                        </a:tabLst>
                       </a:pPr>
                       <a:r>
                         <a:rPr lang="ru-RU" sz="1800" b="0" u="none" strike="noStrike">
@@ -4259,8 +5353,13 @@
                       <a:noAutofit/>
                     </a:bodyPr>
                     <a:p>
-                      <a:pPr indent="0" algn="l">
-                        <a:buNone/>
+                      <a:pPr>
+                        <a:lnSpc>
+                          <a:spcPct val="100000"/>
+                        </a:lnSpc>
+                        <a:tabLst>
+                          <a:tab pos="0" algn="l"/>
+                        </a:tabLst>
                       </a:pPr>
                       <a:r>
                         <a:rPr lang="ru-RU" sz="1800" b="0" u="none" strike="noStrike">
@@ -4319,14 +5418,19 @@
                       <a:noAutofit/>
                     </a:bodyPr>
                     <a:p>
-                      <a:pPr indent="0" algn="l">
+                      <a:pPr>
+                        <a:lnSpc>
+                          <a:spcPct val="100000"/>
+                        </a:lnSpc>
                         <a:spcBef>
                           <a:spcPts val="1191"/>
                         </a:spcBef>
                         <a:spcAft>
                           <a:spcPts val="992"/>
                         </a:spcAft>
-                        <a:buNone/>
+                        <a:tabLst>
+                          <a:tab pos="0" algn="l"/>
+                        </a:tabLst>
                       </a:pPr>
                       <a:r>
                         <a:rPr lang="ru-RU" sz="1800" b="0" u="none" strike="noStrike">
@@ -4383,8 +5487,13 @@
                       <a:noAutofit/>
                     </a:bodyPr>
                     <a:p>
-                      <a:pPr indent="0" algn="l">
-                        <a:buNone/>
+                      <a:pPr>
+                        <a:lnSpc>
+                          <a:spcPct val="100000"/>
+                        </a:lnSpc>
+                        <a:tabLst>
+                          <a:tab pos="0" algn="l"/>
+                        </a:tabLst>
                       </a:pPr>
                       <a:r>
                         <a:rPr lang="ru-RU" sz="1800" b="0" u="none" strike="noStrike">
@@ -4441,8 +5550,13 @@
                       <a:noAutofit/>
                     </a:bodyPr>
                     <a:p>
-                      <a:pPr indent="0" algn="l">
-                        <a:buNone/>
+                      <a:pPr>
+                        <a:lnSpc>
+                          <a:spcPct val="100000"/>
+                        </a:lnSpc>
+                        <a:tabLst>
+                          <a:tab pos="0" algn="l"/>
+                        </a:tabLst>
                       </a:pPr>
                       <a:r>
                         <a:rPr lang="ru-RU" sz="1800" b="0" u="none" strike="noStrike">
@@ -4499,8 +5613,13 @@
                       <a:noAutofit/>
                     </a:bodyPr>
                     <a:p>
-                      <a:pPr indent="0" algn="l">
-                        <a:buNone/>
+                      <a:pPr>
+                        <a:lnSpc>
+                          <a:spcPct val="100000"/>
+                        </a:lnSpc>
+                        <a:tabLst>
+                          <a:tab pos="0" algn="l"/>
+                        </a:tabLst>
                       </a:pPr>
                       <a:r>
                         <a:rPr lang="ru-RU" sz="1800" b="0" u="none" strike="noStrike">
@@ -4559,14 +5678,19 @@
                       <a:noAutofit/>
                     </a:bodyPr>
                     <a:p>
-                      <a:pPr indent="0" algn="l">
+                      <a:pPr>
+                        <a:lnSpc>
+                          <a:spcPct val="100000"/>
+                        </a:lnSpc>
                         <a:spcBef>
                           <a:spcPts val="1191"/>
                         </a:spcBef>
                         <a:spcAft>
                           <a:spcPts val="992"/>
                         </a:spcAft>
-                        <a:buNone/>
+                        <a:tabLst>
+                          <a:tab pos="0" algn="l"/>
+                        </a:tabLst>
                       </a:pPr>
                       <a:r>
                         <a:rPr lang="ru-RU" sz="1800" b="0" u="none" strike="noStrike">
@@ -4623,8 +5747,13 @@
                       <a:noAutofit/>
                     </a:bodyPr>
                     <a:p>
-                      <a:pPr indent="0" algn="l">
-                        <a:buNone/>
+                      <a:pPr>
+                        <a:lnSpc>
+                          <a:spcPct val="100000"/>
+                        </a:lnSpc>
+                        <a:tabLst>
+                          <a:tab pos="0" algn="l"/>
+                        </a:tabLst>
                       </a:pPr>
                       <a:r>
                         <a:rPr lang="ru-RU" sz="1800" b="0" u="none" strike="noStrike">
@@ -4681,8 +5810,13 @@
                       <a:noAutofit/>
                     </a:bodyPr>
                     <a:p>
-                      <a:pPr indent="0" algn="l">
-                        <a:buNone/>
+                      <a:pPr>
+                        <a:lnSpc>
+                          <a:spcPct val="100000"/>
+                        </a:lnSpc>
+                        <a:tabLst>
+                          <a:tab pos="0" algn="l"/>
+                        </a:tabLst>
                       </a:pPr>
                       <a:r>
                         <a:rPr lang="ru-RU" sz="1800" b="0" u="none" strike="noStrike">
@@ -4739,8 +5873,13 @@
                       <a:noAutofit/>
                     </a:bodyPr>
                     <a:p>
-                      <a:pPr indent="0" algn="l">
-                        <a:buNone/>
+                      <a:pPr>
+                        <a:lnSpc>
+                          <a:spcPct val="100000"/>
+                        </a:lnSpc>
+                        <a:tabLst>
+                          <a:tab pos="0" algn="l"/>
+                        </a:tabLst>
                       </a:pPr>
                       <a:r>
                         <a:rPr lang="ru-RU" sz="1800" b="0" u="none" strike="noStrike">
@@ -4799,14 +5938,19 @@
                       <a:noAutofit/>
                     </a:bodyPr>
                     <a:p>
-                      <a:pPr indent="0" algn="l">
+                      <a:pPr>
+                        <a:lnSpc>
+                          <a:spcPct val="100000"/>
+                        </a:lnSpc>
                         <a:spcBef>
                           <a:spcPts val="1191"/>
                         </a:spcBef>
                         <a:spcAft>
                           <a:spcPts val="992"/>
                         </a:spcAft>
-                        <a:buNone/>
+                        <a:tabLst>
+                          <a:tab pos="0" algn="l"/>
+                        </a:tabLst>
                       </a:pPr>
                       <a:r>
                         <a:rPr lang="ru-RU" sz="1800" b="0" u="none" strike="noStrike">
@@ -4863,8 +6007,13 @@
                       <a:noAutofit/>
                     </a:bodyPr>
                     <a:p>
-                      <a:pPr indent="0" algn="l">
-                        <a:buNone/>
+                      <a:pPr>
+                        <a:lnSpc>
+                          <a:spcPct val="100000"/>
+                        </a:lnSpc>
+                        <a:tabLst>
+                          <a:tab pos="0" algn="l"/>
+                        </a:tabLst>
                       </a:pPr>
                       <a:r>
                         <a:rPr lang="ru-RU" sz="1800" b="0" u="none" strike="noStrike">
@@ -4921,8 +6070,13 @@
                       <a:noAutofit/>
                     </a:bodyPr>
                     <a:p>
-                      <a:pPr indent="0" algn="l">
-                        <a:buNone/>
+                      <a:pPr>
+                        <a:lnSpc>
+                          <a:spcPct val="100000"/>
+                        </a:lnSpc>
+                        <a:tabLst>
+                          <a:tab pos="0" algn="l"/>
+                        </a:tabLst>
                       </a:pPr>
                       <a:r>
                         <a:rPr lang="ru-RU" sz="1800" b="0" u="none" strike="noStrike">
@@ -4979,8 +6133,13 @@
                       <a:noAutofit/>
                     </a:bodyPr>
                     <a:p>
-                      <a:pPr indent="0" algn="l">
-                        <a:buNone/>
+                      <a:pPr>
+                        <a:lnSpc>
+                          <a:spcPct val="100000"/>
+                        </a:lnSpc>
+                        <a:tabLst>
+                          <a:tab pos="0" algn="l"/>
+                        </a:tabLst>
                       </a:pPr>
                       <a:r>
                         <a:rPr lang="ru-RU" sz="1800" b="0" u="none" strike="noStrike">
@@ -5039,14 +6198,19 @@
                       <a:noAutofit/>
                     </a:bodyPr>
                     <a:p>
-                      <a:pPr indent="0" algn="l">
+                      <a:pPr>
+                        <a:lnSpc>
+                          <a:spcPct val="100000"/>
+                        </a:lnSpc>
                         <a:spcBef>
                           <a:spcPts val="1191"/>
                         </a:spcBef>
                         <a:spcAft>
                           <a:spcPts val="992"/>
                         </a:spcAft>
-                        <a:buNone/>
+                        <a:tabLst>
+                          <a:tab pos="0" algn="l"/>
+                        </a:tabLst>
                       </a:pPr>
                       <a:r>
                         <a:rPr lang="ru-RU" sz="1800" b="0" u="none" strike="noStrike">
@@ -5103,8 +6267,13 @@
                       <a:noAutofit/>
                     </a:bodyPr>
                     <a:p>
-                      <a:pPr indent="0" algn="l">
-                        <a:buNone/>
+                      <a:pPr>
+                        <a:lnSpc>
+                          <a:spcPct val="100000"/>
+                        </a:lnSpc>
+                        <a:tabLst>
+                          <a:tab pos="0" algn="l"/>
+                        </a:tabLst>
                       </a:pPr>
                       <a:r>
                         <a:rPr lang="ru-RU" sz="1800" b="0" u="none" strike="noStrike">
@@ -5161,8 +6330,13 @@
                       <a:noAutofit/>
                     </a:bodyPr>
                     <a:p>
-                      <a:pPr indent="0" algn="l">
-                        <a:buNone/>
+                      <a:pPr>
+                        <a:lnSpc>
+                          <a:spcPct val="100000"/>
+                        </a:lnSpc>
+                        <a:tabLst>
+                          <a:tab pos="0" algn="l"/>
+                        </a:tabLst>
                       </a:pPr>
                       <a:r>
                         <a:rPr lang="ru-RU" sz="1800" b="0" u="none" strike="noStrike">
@@ -5219,8 +6393,13 @@
                       <a:noAutofit/>
                     </a:bodyPr>
                     <a:p>
-                      <a:pPr indent="0" algn="l">
-                        <a:buNone/>
+                      <a:pPr>
+                        <a:lnSpc>
+                          <a:spcPct val="100000"/>
+                        </a:lnSpc>
+                        <a:tabLst>
+                          <a:tab pos="0" algn="l"/>
+                        </a:tabLst>
                       </a:pPr>
                       <a:r>
                         <a:rPr lang="ru-RU" sz="1800" b="0" u="none" strike="noStrike">
@@ -5308,7 +6487,7 @@
       </p:grpSpPr>
       <p:sp>
         <p:nvSpPr>
-          <p:cNvPr id="44" name="PlaceHolder 1"/>
+          <p:cNvPr id="49" name="PlaceHolder 1"/>
           <p:cNvSpPr>
             <a:spLocks noGrp="1"/>
           </p:cNvSpPr>
@@ -5318,8 +6497,8 @@
         </p:nvSpPr>
         <p:spPr>
           <a:xfrm>
-            <a:off x="504000" y="226080"/>
-            <a:ext cx="9071640" cy="946440"/>
+            <a:off x="504000" y="225360"/>
+            <a:ext cx="9070920" cy="947160"/>
           </a:xfrm>
           <a:prstGeom prst="rect">
             <a:avLst/>
@@ -5335,7 +6514,13 @@
           </a:bodyPr>
           <a:p>
             <a:pPr indent="0" algn="ctr">
+              <a:lnSpc>
+                <a:spcPct val="100000"/>
+              </a:lnSpc>
               <a:buNone/>
+              <a:tabLst>
+                <a:tab pos="0" algn="l"/>
+              </a:tabLst>
             </a:pPr>
             <a:r>
               <a:rPr lang="ru-RU" sz="3200" b="1" u="none" strike="noStrike">
@@ -5348,7 +6533,7 @@
               </a:rPr>
               <a:t>Выводы</a:t>
             </a:r>
-            <a:endParaRPr lang="ru-RU" sz="3200" b="1" u="none" strike="noStrike">
+            <a:endParaRPr lang="ru-RU" sz="3200" b="0" u="none" strike="noStrike">
               <a:solidFill>
                 <a:srgbClr val="1A3A5C"/>
               </a:solidFill>
@@ -5361,7 +6546,7 @@
       </p:sp>
       <p:sp>
         <p:nvSpPr>
-          <p:cNvPr id="45" name="PlaceHolder 2"/>
+          <p:cNvPr id="50" name="PlaceHolder 2"/>
           <p:cNvSpPr>
             <a:spLocks noGrp="1"/>
           </p:cNvSpPr>
@@ -5372,7 +6557,7 @@
         <p:spPr>
           <a:xfrm>
             <a:off x="504000" y="1326600"/>
-            <a:ext cx="9071640" cy="3288240"/>
+            <a:ext cx="9070920" cy="3287520"/>
           </a:xfrm>
           <a:prstGeom prst="rect">
             <a:avLst/>
@@ -5384,10 +6569,13 @@
         </p:spPr>
         <p:txBody>
           <a:bodyPr lIns="0" tIns="0" rIns="0" bIns="0" anchor="t">
-            <a:normAutofit lnSpcReduction="9999"/>
+            <a:normAutofit fontScale="85000" lnSpcReduction="9999"/>
           </a:bodyPr>
           <a:p>
             <a:pPr marL="432000" indent="-324000" algn="l">
+              <a:lnSpc>
+                <a:spcPct val="100000"/>
+              </a:lnSpc>
               <a:spcBef>
                 <a:spcPts val="1191"/>
               </a:spcBef>
@@ -5423,6 +6611,9 @@
           </a:p>
           <a:p>
             <a:pPr marL="432000" indent="-324000" algn="l">
+              <a:lnSpc>
+                <a:spcPct val="100000"/>
+              </a:lnSpc>
               <a:spcBef>
                 <a:spcPts val="1191"/>
               </a:spcBef>
@@ -5458,6 +6649,9 @@
           </a:p>
           <a:p>
             <a:pPr marL="432000" indent="-324000" algn="l">
+              <a:lnSpc>
+                <a:spcPct val="100000"/>
+              </a:lnSpc>
               <a:spcBef>
                 <a:spcPts val="1191"/>
               </a:spcBef>
@@ -5493,6 +6687,9 @@
           </a:p>
           <a:p>
             <a:pPr indent="0" algn="l">
+              <a:lnSpc>
+                <a:spcPct val="100000"/>
+              </a:lnSpc>
               <a:spcBef>
                 <a:spcPts val="1191"/>
               </a:spcBef>
@@ -5500,6 +6697,9 @@
                 <a:spcPts val="992"/>
               </a:spcAft>
               <a:buNone/>
+              <a:tabLst>
+                <a:tab pos="0" algn="l"/>
+              </a:tabLst>
             </a:pPr>
             <a:r>
               <a:rPr lang="ru-RU" sz="1800" b="1" u="none" strike="noStrike">
@@ -5523,6 +6723,9 @@
           </a:p>
           <a:p>
             <a:pPr marL="432000" indent="-324000" algn="l">
+              <a:lnSpc>
+                <a:spcPct val="100000"/>
+              </a:lnSpc>
               <a:spcBef>
                 <a:spcPts val="1191"/>
               </a:spcBef>
@@ -5535,6 +6738,9 @@
               <a:buSzPct val="45000"/>
               <a:buFont typeface="Wingdings" charset="2"/>
               <a:buChar char=""/>
+              <a:tabLst>
+                <a:tab pos="0" algn="l"/>
+              </a:tabLst>
             </a:pPr>
             <a:r>
               <a:rPr lang="ru-RU" sz="1800" b="0" u="none" strike="noStrike">
@@ -5558,6 +6764,9 @@
           </a:p>
           <a:p>
             <a:pPr marL="432000" indent="-324000" algn="l">
+              <a:lnSpc>
+                <a:spcPct val="100000"/>
+              </a:lnSpc>
               <a:spcBef>
                 <a:spcPts val="1191"/>
               </a:spcBef>
@@ -5570,6 +6779,9 @@
               <a:buSzPct val="45000"/>
               <a:buFont typeface="Wingdings" charset="2"/>
               <a:buChar char=""/>
+              <a:tabLst>
+                <a:tab pos="0" algn="l"/>
+              </a:tabLst>
             </a:pPr>
             <a:r>
               <a:rPr lang="ru-RU" sz="1800" b="0" u="none" strike="noStrike">
@@ -5593,6 +6805,9 @@
           </a:p>
           <a:p>
             <a:pPr marL="432000" indent="-324000" algn="l">
+              <a:lnSpc>
+                <a:spcPct val="100000"/>
+              </a:lnSpc>
               <a:spcBef>
                 <a:spcPts val="1191"/>
               </a:spcBef>
@@ -5605,6 +6820,9 @@
               <a:buSzPct val="45000"/>
               <a:buFont typeface="Wingdings" charset="2"/>
               <a:buChar char=""/>
+              <a:tabLst>
+                <a:tab pos="0" algn="l"/>
+              </a:tabLst>
             </a:pPr>
             <a:r>
               <a:rPr lang="ru-RU" sz="1800" b="0" u="none" strike="noStrike">
@@ -5628,6 +6846,9 @@
           </a:p>
           <a:p>
             <a:pPr marL="432000" indent="0" algn="l">
+              <a:lnSpc>
+                <a:spcPct val="100000"/>
+              </a:lnSpc>
               <a:spcBef>
                 <a:spcPts val="1191"/>
               </a:spcBef>
@@ -5635,6 +6856,9 @@
                 <a:spcPts val="992"/>
               </a:spcAft>
               <a:buNone/>
+              <a:tabLst>
+                <a:tab pos="0" algn="l"/>
+              </a:tabLst>
             </a:pPr>
             <a:endParaRPr lang="ru-RU" sz="1800" b="0" u="none" strike="noStrike">
               <a:solidFill>
@@ -5679,7 +6903,7 @@
       </p:grpSpPr>
       <p:sp>
         <p:nvSpPr>
-          <p:cNvPr id="46" name="PlaceHolder 1"/>
+          <p:cNvPr id="51" name="PlaceHolder 1"/>
           <p:cNvSpPr>
             <a:spLocks noGrp="1"/>
           </p:cNvSpPr>
@@ -5689,8 +6913,8 @@
         </p:nvSpPr>
         <p:spPr>
           <a:xfrm>
-            <a:off x="504000" y="226080"/>
-            <a:ext cx="9071640" cy="946440"/>
+            <a:off x="504000" y="225360"/>
+            <a:ext cx="9070920" cy="947160"/>
           </a:xfrm>
           <a:prstGeom prst="rect">
             <a:avLst/>
@@ -5706,7 +6930,13 @@
           </a:bodyPr>
           <a:p>
             <a:pPr indent="0" algn="ctr">
+              <a:lnSpc>
+                <a:spcPct val="100000"/>
+              </a:lnSpc>
               <a:buNone/>
+              <a:tabLst>
+                <a:tab pos="0" algn="l"/>
+              </a:tabLst>
             </a:pPr>
             <a:r>
               <a:rPr lang="ru-RU" sz="3200" b="1" u="none" strike="noStrike">
@@ -5719,7 +6949,7 @@
               </a:rPr>
               <a:t>Заключение</a:t>
             </a:r>
-            <a:endParaRPr lang="ru-RU" sz="3200" b="1" u="none" strike="noStrike">
+            <a:endParaRPr lang="ru-RU" sz="3200" b="0" u="none" strike="noStrike">
               <a:solidFill>
                 <a:srgbClr val="1A3A5C"/>
               </a:solidFill>
@@ -5732,7 +6962,7 @@
       </p:sp>
       <p:sp>
         <p:nvSpPr>
-          <p:cNvPr id="47" name="PlaceHolder 2"/>
+          <p:cNvPr id="52" name="PlaceHolder 2"/>
           <p:cNvSpPr>
             <a:spLocks noGrp="1"/>
           </p:cNvSpPr>
@@ -5743,7 +6973,7 @@
         <p:spPr>
           <a:xfrm>
             <a:off x="504000" y="1541160"/>
-            <a:ext cx="9071640" cy="3288240"/>
+            <a:ext cx="9070920" cy="3287520"/>
           </a:xfrm>
           <a:prstGeom prst="rect">
             <a:avLst/>
@@ -5759,6 +6989,9 @@
           </a:bodyPr>
           <a:p>
             <a:pPr marL="432000" indent="-324000" algn="l">
+              <a:lnSpc>
+                <a:spcPct val="100000"/>
+              </a:lnSpc>
               <a:spcBef>
                 <a:spcPts val="1191"/>
               </a:spcBef>
@@ -5781,7 +7014,7 @@
                 <a:uFillTx/>
                 <a:latin typeface="Arial"/>
               </a:rPr>
-              <a:t>Цели проекта достигнуты</a:t>
+              <a:t>Цели проекта достигнуты, гипотеза подтверждена</a:t>
             </a:r>
             <a:endParaRPr lang="ru-RU" sz="2000" b="0" u="none" strike="noStrike">
               <a:solidFill>
@@ -5794,6 +7027,9 @@
           </a:p>
           <a:p>
             <a:pPr marL="432000" indent="-324000" algn="l">
+              <a:lnSpc>
+                <a:spcPct val="100000"/>
+              </a:lnSpc>
               <a:spcBef>
                 <a:spcPts val="1191"/>
               </a:spcBef>
@@ -5829,6 +7065,9 @@
           </a:p>
           <a:p>
             <a:pPr marL="432000" indent="-324000" algn="l">
+              <a:lnSpc>
+                <a:spcPct val="100000"/>
+              </a:lnSpc>
               <a:spcBef>
                 <a:spcPts val="1191"/>
               </a:spcBef>
@@ -5864,6 +7103,9 @@
           </a:p>
           <a:p>
             <a:pPr marL="432000" indent="-324000" algn="l">
+              <a:lnSpc>
+                <a:spcPct val="100000"/>
+              </a:lnSpc>
               <a:spcBef>
                 <a:spcPts val="1191"/>
               </a:spcBef>
@@ -5899,6 +7141,9 @@
           </a:p>
           <a:p>
             <a:pPr indent="0" algn="l">
+              <a:lnSpc>
+                <a:spcPct val="100000"/>
+              </a:lnSpc>
               <a:spcBef>
                 <a:spcPts val="1191"/>
               </a:spcBef>
@@ -5906,6 +7151,9 @@
                 <a:spcPts val="992"/>
               </a:spcAft>
               <a:buNone/>
+              <a:tabLst>
+                <a:tab pos="0" algn="l"/>
+              </a:tabLst>
             </a:pPr>
             <a:r>
               <a:rPr lang="ru-RU" sz="2000" b="0" u="none" strike="noStrike">
@@ -5922,7 +7170,7 @@
             <a:r>
               <a:rPr lang="ru-RU" sz="2000" b="0" u="sng" strike="noStrike">
                 <a:solidFill>
-                  <a:srgbClr val="2D2D2D"/>
+                  <a:srgbClr val="0000EE"/>
                 </a:solidFill>
                 <a:effectLst/>
                 <a:uFillTx/>
@@ -5943,6 +7191,9 @@
           </a:p>
           <a:p>
             <a:pPr marL="432000" indent="0" algn="l">
+              <a:lnSpc>
+                <a:spcPct val="100000"/>
+              </a:lnSpc>
               <a:spcBef>
                 <a:spcPts val="1191"/>
               </a:spcBef>
@@ -5950,6 +7201,9 @@
                 <a:spcPts val="992"/>
               </a:spcAft>
               <a:buNone/>
+              <a:tabLst>
+                <a:tab pos="0" algn="l"/>
+              </a:tabLst>
             </a:pPr>
             <a:endParaRPr lang="ru-RU" sz="2000" b="0" u="none" strike="noStrike">
               <a:solidFill>
@@ -5994,7 +7248,7 @@
       </p:grpSpPr>
       <p:sp>
         <p:nvSpPr>
-          <p:cNvPr id="13" name="PlaceHolder 1"/>
+          <p:cNvPr id="14" name="PlaceHolder 1"/>
           <p:cNvSpPr>
             <a:spLocks noGrp="1"/>
           </p:cNvSpPr>
@@ -6005,7 +7259,7 @@
         <p:spPr>
           <a:xfrm>
             <a:off x="360000" y="1326600"/>
-            <a:ext cx="9540000" cy="3713400"/>
+            <a:ext cx="9539280" cy="3712680"/>
           </a:xfrm>
           <a:prstGeom prst="rect">
             <a:avLst/>
@@ -6021,6 +7275,9 @@
           </a:bodyPr>
           <a:p>
             <a:pPr marL="432000" indent="-324000" algn="just">
+              <a:lnSpc>
+                <a:spcPct val="100000"/>
+              </a:lnSpc>
               <a:spcBef>
                 <a:spcPts val="884"/>
               </a:spcBef>
@@ -6053,6 +7310,9 @@
           </a:p>
           <a:p>
             <a:pPr marL="432000" indent="-324000" algn="just">
+              <a:lnSpc>
+                <a:spcPct val="100000"/>
+              </a:lnSpc>
               <a:spcBef>
                 <a:spcPts val="1191"/>
               </a:spcBef>
@@ -6075,18 +7335,7 @@
                 <a:uFillTx/>
                 <a:latin typeface="Arial"/>
               </a:rPr>
-              <a:t>Пример: x⁵+x−1 = 0</a:t>
-            </a:r>
-            <a:r>
-              <a:rPr lang="ru-RU" sz="2000" b="0" u="none" strike="noStrike">
-                <a:solidFill>
-                  <a:srgbClr val="2D2D2D"/>
-                </a:solidFill>
-                <a:effectLst/>
-                <a:uFillTx/>
-                <a:latin typeface="Arial"/>
-              </a:rPr>
-              <a:t> — не имеет решения в радикалах.</a:t>
+              <a:t>Пример: x⁵+x−1 = 0 — не имеет решения в радикалах.</a:t>
             </a:r>
             <a:endParaRPr lang="ru-RU" sz="2000" b="0" u="none" strike="noStrike">
               <a:solidFill>
@@ -6099,6 +7348,9 @@
           </a:p>
           <a:p>
             <a:pPr marL="432000" indent="-324000" algn="just">
+              <a:lnSpc>
+                <a:spcPct val="100000"/>
+              </a:lnSpc>
               <a:spcBef>
                 <a:spcPts val="1191"/>
               </a:spcBef>
@@ -6121,18 +7373,7 @@
                 <a:uFillTx/>
                 <a:latin typeface="Arial"/>
               </a:rPr>
-              <a:t>Уравнения с тригонометрическими, показательными и логарифмическими функциями (например, sin(x) = 0.5, eˣ = 10, ln(x) = 2) также </a:t>
-            </a:r>
-            <a:r>
-              <a:rPr lang="ru-RU" sz="2000" b="0" u="none" strike="noStrike">
-                <a:solidFill>
-                  <a:srgbClr val="2D2D2D"/>
-                </a:solidFill>
-                <a:effectLst/>
-                <a:uFillTx/>
-                <a:latin typeface="Arial"/>
-              </a:rPr>
-              <a:t>не имеют аналитического решения в элементарных функциях.</a:t>
+              <a:t>Уравнения с тригонометрическими, показательными и логарифмическими функциями (например, sin(x) = 0.5, eˣ = 10, ln(x) = 2) также не имеют аналитического решения в элементарных функциях.</a:t>
             </a:r>
             <a:endParaRPr lang="ru-RU" sz="2000" b="0" u="none" strike="noStrike">
               <a:solidFill>
@@ -6145,6 +7386,9 @@
           </a:p>
           <a:p>
             <a:pPr marL="432000" indent="-324000" algn="l">
+              <a:lnSpc>
+                <a:spcPct val="100000"/>
+              </a:lnSpc>
               <a:spcBef>
                 <a:spcPts val="1191"/>
               </a:spcBef>
@@ -6180,6 +7424,9 @@
           </a:p>
           <a:p>
             <a:pPr marL="432000" indent="-324000" algn="l">
+              <a:lnSpc>
+                <a:spcPct val="100000"/>
+              </a:lnSpc>
               <a:spcBef>
                 <a:spcPts val="1191"/>
               </a:spcBef>
@@ -6217,7 +7464,7 @@
       </p:sp>
       <p:sp>
         <p:nvSpPr>
-          <p:cNvPr id="14" name="PlaceHolder 2"/>
+          <p:cNvPr id="15" name="PlaceHolder 2"/>
           <p:cNvSpPr>
             <a:spLocks noGrp="1"/>
           </p:cNvSpPr>
@@ -6227,8 +7474,8 @@
         </p:nvSpPr>
         <p:spPr>
           <a:xfrm>
-            <a:off x="504000" y="226080"/>
-            <a:ext cx="9071640" cy="946440"/>
+            <a:off x="504000" y="225360"/>
+            <a:ext cx="9070920" cy="947160"/>
           </a:xfrm>
           <a:prstGeom prst="rect">
             <a:avLst/>
@@ -6244,7 +7491,13 @@
           </a:bodyPr>
           <a:p>
             <a:pPr indent="0" algn="ctr">
+              <a:lnSpc>
+                <a:spcPct val="100000"/>
+              </a:lnSpc>
               <a:buNone/>
+              <a:tabLst>
+                <a:tab pos="0" algn="l"/>
+              </a:tabLst>
             </a:pPr>
             <a:r>
               <a:rPr lang="ru-RU" sz="3200" b="1" u="none" strike="noStrike">
@@ -6255,7 +7508,18 @@
                 <a:uFillTx/>
                 <a:latin typeface="Arial"/>
               </a:rPr>
-              <a:t>Актуальность</a:t>
+              <a:t>Актуальност</a:t>
+            </a:r>
+            <a:r>
+              <a:rPr lang="ru-RU" sz="3200" b="1" u="none" strike="noStrike">
+                <a:solidFill>
+                  <a:srgbClr val="1A3A5C"/>
+                </a:solidFill>
+                <a:effectLst/>
+                <a:uFillTx/>
+                <a:latin typeface="Arial"/>
+              </a:rPr>
+              <a:t>ь</a:t>
             </a:r>
             <a:r>
               <a:rPr lang="ru-RU" sz="2800" b="1" u="none" strike="noStrike">
@@ -6311,7 +7575,7 @@
       </p:grpSpPr>
       <p:sp>
         <p:nvSpPr>
-          <p:cNvPr id="15" name="PlaceHolder 1"/>
+          <p:cNvPr id="16" name="PlaceHolder 1"/>
           <p:cNvSpPr>
             <a:spLocks noGrp="1"/>
           </p:cNvSpPr>
@@ -6321,8 +7585,8 @@
         </p:nvSpPr>
         <p:spPr>
           <a:xfrm>
-            <a:off x="504000" y="226080"/>
-            <a:ext cx="9071640" cy="946440"/>
+            <a:off x="504000" y="225360"/>
+            <a:ext cx="9070920" cy="947160"/>
           </a:xfrm>
           <a:prstGeom prst="rect">
             <a:avLst/>
@@ -6338,7 +7602,13 @@
           </a:bodyPr>
           <a:p>
             <a:pPr indent="0" algn="ctr">
+              <a:lnSpc>
+                <a:spcPct val="100000"/>
+              </a:lnSpc>
               <a:buNone/>
+              <a:tabLst>
+                <a:tab pos="0" algn="l"/>
+              </a:tabLst>
             </a:pPr>
             <a:r>
               <a:rPr lang="ru-RU" sz="3200" b="1" u="none" strike="noStrike">
@@ -6349,7 +7619,18 @@
                 <a:uFillTx/>
                 <a:latin typeface="Arial"/>
               </a:rPr>
-              <a:t>Цель и задачи</a:t>
+              <a:t>Цель и </a:t>
+            </a:r>
+            <a:r>
+              <a:rPr lang="ru-RU" sz="3200" b="1" u="none" strike="noStrike">
+                <a:solidFill>
+                  <a:srgbClr val="1A3A5C"/>
+                </a:solidFill>
+                <a:effectLst/>
+                <a:uFillTx/>
+                <a:latin typeface="Arial"/>
+              </a:rPr>
+              <a:t>задачи</a:t>
             </a:r>
             <a:endParaRPr lang="ru-RU" sz="3200" b="0" u="none" strike="noStrike">
               <a:solidFill>
@@ -6364,7 +7645,7 @@
       </p:sp>
       <p:sp>
         <p:nvSpPr>
-          <p:cNvPr id="16" name="PlaceHolder 2"/>
+          <p:cNvPr id="17" name="PlaceHolder 2"/>
           <p:cNvSpPr>
             <a:spLocks noGrp="1"/>
           </p:cNvSpPr>
@@ -6374,8 +7655,8 @@
         </p:nvSpPr>
         <p:spPr>
           <a:xfrm>
-            <a:off x="360000" y="1326600"/>
-            <a:ext cx="9360000" cy="4073400"/>
+            <a:off x="360000" y="1080000"/>
+            <a:ext cx="9359280" cy="4072680"/>
           </a:xfrm>
           <a:prstGeom prst="rect">
             <a:avLst/>
@@ -6387,10 +7668,13 @@
         </p:spPr>
         <p:txBody>
           <a:bodyPr lIns="0" tIns="0" rIns="0" bIns="0" anchor="t">
-            <a:normAutofit/>
+            <a:normAutofit fontScale="85000" lnSpcReduction="9999"/>
           </a:bodyPr>
           <a:p>
             <a:pPr indent="0" algn="just">
+              <a:lnSpc>
+                <a:spcPct val="100000"/>
+              </a:lnSpc>
               <a:spcBef>
                 <a:spcPts val="1191"/>
               </a:spcBef>
@@ -6398,6 +7682,9 @@
                 <a:spcPts val="992"/>
               </a:spcAft>
               <a:buNone/>
+              <a:tabLst>
+                <a:tab pos="0" algn="l"/>
+              </a:tabLst>
             </a:pPr>
             <a:r>
               <a:rPr lang="ru-RU" sz="2000" b="1" u="none" strike="noStrike">
@@ -6487,6 +7774,9 @@
           </a:p>
           <a:p>
             <a:pPr indent="0" algn="just">
+              <a:lnSpc>
+                <a:spcPct val="100000"/>
+              </a:lnSpc>
               <a:spcBef>
                 <a:spcPts val="1191"/>
               </a:spcBef>
@@ -6494,6 +7784,9 @@
                 <a:spcPts val="992"/>
               </a:spcAft>
               <a:buNone/>
+              <a:tabLst>
+                <a:tab pos="0" algn="l"/>
+              </a:tabLst>
             </a:pPr>
             <a:r>
               <a:rPr lang="ru-RU" sz="2000" b="1" u="none" strike="noStrike">
@@ -6516,7 +7809,10 @@
             </a:endParaRPr>
           </a:p>
           <a:p>
-            <a:pPr marL="432000" indent="-324000" algn="just">
+            <a:pPr indent="-324000" algn="just">
+              <a:lnSpc>
+                <a:spcPct val="100000"/>
+              </a:lnSpc>
               <a:spcBef>
                 <a:spcPts val="1191"/>
               </a:spcBef>
@@ -6526,8 +7822,12 @@
               <a:buClr>
                 <a:srgbClr val="000000"/>
               </a:buClr>
-              <a:buFont typeface="OpenSymbol"/>
+              <a:buSzPct val="45000"/>
+              <a:buFont typeface="Wingdings" charset="2"/>
               <a:buAutoNum type="arabicPeriod"/>
+              <a:tabLst>
+                <a:tab pos="0" algn="l"/>
+              </a:tabLst>
             </a:pPr>
             <a:r>
               <a:rPr lang="ru-RU" sz="2000" b="0" u="none" strike="noStrike">
@@ -6550,7 +7850,10 @@
             </a:endParaRPr>
           </a:p>
           <a:p>
-            <a:pPr marL="432000" indent="-324000" algn="just">
+            <a:pPr indent="-324000" algn="just">
+              <a:lnSpc>
+                <a:spcPct val="100000"/>
+              </a:lnSpc>
               <a:spcBef>
                 <a:spcPts val="1191"/>
               </a:spcBef>
@@ -6560,8 +7863,12 @@
               <a:buClr>
                 <a:srgbClr val="000000"/>
               </a:buClr>
-              <a:buFont typeface="OpenSymbol"/>
+              <a:buSzPct val="45000"/>
+              <a:buFont typeface="Wingdings" charset="2"/>
               <a:buAutoNum type="arabicPeriod"/>
+              <a:tabLst>
+                <a:tab pos="0" algn="l"/>
+              </a:tabLst>
             </a:pPr>
             <a:r>
               <a:rPr lang="ru-RU" sz="2000" b="0" u="none" strike="noStrike">
@@ -6584,7 +7891,10 @@
             </a:endParaRPr>
           </a:p>
           <a:p>
-            <a:pPr marL="432000" indent="-324000" algn="just">
+            <a:pPr indent="-324000" algn="just">
+              <a:lnSpc>
+                <a:spcPct val="100000"/>
+              </a:lnSpc>
               <a:spcBef>
                 <a:spcPts val="1191"/>
               </a:spcBef>
@@ -6594,8 +7904,12 @@
               <a:buClr>
                 <a:srgbClr val="000000"/>
               </a:buClr>
-              <a:buFont typeface="OpenSymbol"/>
+              <a:buSzPct val="45000"/>
+              <a:buFont typeface="Wingdings" charset="2"/>
               <a:buAutoNum type="arabicPeriod"/>
+              <a:tabLst>
+                <a:tab pos="0" algn="l"/>
+              </a:tabLst>
             </a:pPr>
             <a:r>
               <a:rPr lang="ru-RU" sz="2000" b="0" u="none" strike="noStrike">
@@ -6618,7 +7932,10 @@
             </a:endParaRPr>
           </a:p>
           <a:p>
-            <a:pPr marL="432000" indent="-324000" algn="just">
+            <a:pPr indent="-324000" algn="just">
+              <a:lnSpc>
+                <a:spcPct val="100000"/>
+              </a:lnSpc>
               <a:spcBef>
                 <a:spcPts val="1191"/>
               </a:spcBef>
@@ -6628,8 +7945,12 @@
               <a:buClr>
                 <a:srgbClr val="000000"/>
               </a:buClr>
-              <a:buFont typeface="OpenSymbol"/>
+              <a:buSzPct val="45000"/>
+              <a:buFont typeface="Wingdings" charset="2"/>
               <a:buAutoNum type="arabicPeriod"/>
+              <a:tabLst>
+                <a:tab pos="0" algn="l"/>
+              </a:tabLst>
             </a:pPr>
             <a:r>
               <a:rPr lang="ru-RU" sz="2000" b="0" u="none" strike="noStrike">
@@ -6652,7 +7973,10 @@
             </a:endParaRPr>
           </a:p>
           <a:p>
-            <a:pPr marL="432000" indent="-324000" algn="just">
+            <a:pPr indent="-324000" algn="just">
+              <a:lnSpc>
+                <a:spcPct val="100000"/>
+              </a:lnSpc>
               <a:spcBef>
                 <a:spcPts val="1191"/>
               </a:spcBef>
@@ -6662,8 +7986,12 @@
               <a:buClr>
                 <a:srgbClr val="000000"/>
               </a:buClr>
-              <a:buFont typeface="OpenSymbol"/>
+              <a:buSzPct val="45000"/>
+              <a:buFont typeface="Wingdings" charset="2"/>
               <a:buAutoNum type="arabicPeriod"/>
+              <a:tabLst>
+                <a:tab pos="0" algn="l"/>
+              </a:tabLst>
             </a:pPr>
             <a:r>
               <a:rPr lang="ru-RU" sz="2000" b="0" u="none" strike="noStrike">
@@ -6686,7 +8014,10 @@
             </a:endParaRPr>
           </a:p>
           <a:p>
-            <a:pPr marL="432000" indent="-324000" algn="just">
+            <a:pPr indent="-324000" algn="just">
+              <a:lnSpc>
+                <a:spcPct val="100000"/>
+              </a:lnSpc>
               <a:spcBef>
                 <a:spcPts val="1191"/>
               </a:spcBef>
@@ -6696,8 +8027,12 @@
               <a:buClr>
                 <a:srgbClr val="000000"/>
               </a:buClr>
-              <a:buFont typeface="OpenSymbol"/>
+              <a:buSzPct val="45000"/>
+              <a:buFont typeface="Wingdings" charset="2"/>
               <a:buAutoNum type="arabicPeriod"/>
+              <a:tabLst>
+                <a:tab pos="0" algn="l"/>
+              </a:tabLst>
             </a:pPr>
             <a:r>
               <a:rPr lang="ru-RU" sz="2000" b="0" u="none" strike="noStrike">
@@ -6721,6 +8056,9 @@
           </a:p>
           <a:p>
             <a:pPr indent="0" algn="just">
+              <a:lnSpc>
+                <a:spcPct val="100000"/>
+              </a:lnSpc>
               <a:spcBef>
                 <a:spcPts val="1191"/>
               </a:spcBef>
@@ -6728,6 +8066,9 @@
                 <a:spcPts val="992"/>
               </a:spcAft>
               <a:buNone/>
+              <a:tabLst>
+                <a:tab pos="0" algn="l"/>
+              </a:tabLst>
             </a:pPr>
             <a:endParaRPr lang="ru-RU" sz="2000" b="0" u="none" strike="noStrike">
               <a:solidFill>
@@ -6772,7 +8113,7 @@
       </p:grpSpPr>
       <p:sp>
         <p:nvSpPr>
-          <p:cNvPr id="17" name="PlaceHolder 1"/>
+          <p:cNvPr id="18" name="PlaceHolder 1"/>
           <p:cNvSpPr>
             <a:spLocks noGrp="1"/>
           </p:cNvSpPr>
@@ -6782,8 +8123,8 @@
         </p:nvSpPr>
         <p:spPr>
           <a:xfrm>
-            <a:off x="504000" y="226080"/>
-            <a:ext cx="9071640" cy="946440"/>
+            <a:off x="504000" y="225360"/>
+            <a:ext cx="9070920" cy="947160"/>
           </a:xfrm>
           <a:prstGeom prst="rect">
             <a:avLst/>
@@ -6799,7 +8140,13 @@
           </a:bodyPr>
           <a:p>
             <a:pPr indent="0" algn="ctr">
+              <a:lnSpc>
+                <a:spcPct val="100000"/>
+              </a:lnSpc>
               <a:buNone/>
+              <a:tabLst>
+                <a:tab pos="0" algn="l"/>
+              </a:tabLst>
             </a:pPr>
             <a:r>
               <a:rPr lang="ru-RU" sz="3200" b="1" u="none" strike="noStrike">
@@ -6810,7 +8157,51 @@
                 <a:uFillTx/>
                 <a:latin typeface="Arial"/>
               </a:rPr>
-              <a:t>Объект и предмет исследования</a:t>
+              <a:t>Объект, </a:t>
+            </a:r>
+            <a:r>
+              <a:rPr lang="ru-RU" sz="3200" b="1" u="none" strike="noStrike">
+                <a:solidFill>
+                  <a:srgbClr val="1A3A5C"/>
+                </a:solidFill>
+                <a:effectLst/>
+                <a:uFillTx/>
+                <a:latin typeface="Arial"/>
+              </a:rPr>
+              <a:t>предмет и </a:t>
+            </a:r>
+            <a:r>
+              <a:rPr lang="ru-RU" sz="3200" b="1" u="none" strike="noStrike">
+                <a:solidFill>
+                  <a:srgbClr val="1A3A5C"/>
+                </a:solidFill>
+                <a:effectLst/>
+                <a:uFillTx/>
+                <a:latin typeface="Arial"/>
+              </a:rPr>
+              <a:t>гипотеза </a:t>
+            </a:r>
+            <a:r>
+              <a:rPr lang="ru-RU" sz="3200" b="1" u="none" strike="noStrike">
+                <a:solidFill>
+                  <a:srgbClr val="1A3A5C"/>
+                </a:solidFill>
+                <a:effectLst/>
+                <a:uFillTx/>
+                <a:latin typeface="Arial"/>
+              </a:rPr>
+              <a:t>исследовани</a:t>
+            </a:r>
+            <a:r>
+              <a:rPr lang="ru-RU" sz="3200" b="1" u="none" strike="noStrike">
+                <a:solidFill>
+                  <a:srgbClr val="1A3A5C"/>
+                </a:solidFill>
+                <a:effectLst/>
+                <a:uFillTx/>
+                <a:latin typeface="Arial"/>
+              </a:rPr>
+              <a:t>я</a:t>
             </a:r>
             <a:endParaRPr lang="ru-RU" sz="3200" b="0" u="none" strike="noStrike">
               <a:solidFill>
@@ -6825,7 +8216,7 @@
       </p:sp>
       <p:sp>
         <p:nvSpPr>
-          <p:cNvPr id="18" name="PlaceHolder 2"/>
+          <p:cNvPr id="19" name="PlaceHolder 2"/>
           <p:cNvSpPr>
             <a:spLocks noGrp="1"/>
           </p:cNvSpPr>
@@ -6835,8 +8226,8 @@
         </p:nvSpPr>
         <p:spPr>
           <a:xfrm>
-            <a:off x="504000" y="1596600"/>
-            <a:ext cx="9290880" cy="3288240"/>
+            <a:off x="429480" y="1440000"/>
+            <a:ext cx="9290160" cy="3287520"/>
           </a:xfrm>
           <a:prstGeom prst="rect">
             <a:avLst/>
@@ -6852,10 +8243,16 @@
           </a:bodyPr>
           <a:p>
             <a:pPr indent="0" algn="just">
+              <a:lnSpc>
+                <a:spcPct val="100000"/>
+              </a:lnSpc>
               <a:spcBef>
                 <a:spcPts val="884"/>
               </a:spcBef>
               <a:buNone/>
+              <a:tabLst>
+                <a:tab pos="0" algn="l"/>
+              </a:tabLst>
             </a:pPr>
             <a:r>
               <a:rPr lang="ru-RU" sz="2000" b="1" u="none" strike="noStrike">
@@ -6890,10 +8287,16 @@
           </a:p>
           <a:p>
             <a:pPr indent="0" algn="l">
+              <a:lnSpc>
+                <a:spcPct val="100000"/>
+              </a:lnSpc>
               <a:spcBef>
                 <a:spcPts val="884"/>
               </a:spcBef>
               <a:buNone/>
+              <a:tabLst>
+                <a:tab pos="0" algn="l"/>
+              </a:tabLst>
             </a:pPr>
             <a:endParaRPr lang="ru-RU" sz="2000" b="0" u="none" strike="noStrike">
               <a:solidFill>
@@ -6905,11 +8308,17 @@
             </a:endParaRPr>
           </a:p>
           <a:p>
-            <a:pPr indent="0" algn="just">
+            <a:pPr indent="0" algn="l">
+              <a:lnSpc>
+                <a:spcPct val="100000"/>
+              </a:lnSpc>
               <a:spcBef>
                 <a:spcPts val="884"/>
               </a:spcBef>
               <a:buNone/>
+              <a:tabLst>
+                <a:tab pos="0" algn="l"/>
+              </a:tabLst>
             </a:pPr>
             <a:r>
               <a:rPr lang="ru-RU" sz="2000" b="1" u="none" strike="noStrike">
@@ -6932,6 +8341,75 @@
                 <a:latin typeface="Arial"/>
               </a:rPr>
               <a:t> скорость сходимости и количество итераций при заданной точности.</a:t>
+            </a:r>
+            <a:endParaRPr lang="ru-RU" sz="2000" b="0" u="none" strike="noStrike">
+              <a:solidFill>
+                <a:srgbClr val="2D2D2D"/>
+              </a:solidFill>
+              <a:effectLst/>
+              <a:uFillTx/>
+              <a:latin typeface="Arial"/>
+            </a:endParaRPr>
+          </a:p>
+          <a:p>
+            <a:pPr indent="0" algn="l">
+              <a:lnSpc>
+                <a:spcPct val="100000"/>
+              </a:lnSpc>
+              <a:spcBef>
+                <a:spcPts val="884"/>
+              </a:spcBef>
+              <a:buNone/>
+              <a:tabLst>
+                <a:tab pos="0" algn="l"/>
+              </a:tabLst>
+            </a:pPr>
+            <a:endParaRPr lang="ru-RU" sz="2000" b="0" u="none" strike="noStrike">
+              <a:solidFill>
+                <a:srgbClr val="2D2D2D"/>
+              </a:solidFill>
+              <a:effectLst/>
+              <a:uFillTx/>
+              <a:latin typeface="Arial"/>
+            </a:endParaRPr>
+          </a:p>
+          <a:p>
+            <a:pPr indent="0" algn="l">
+              <a:lnSpc>
+                <a:spcPct val="100000"/>
+              </a:lnSpc>
+              <a:spcBef>
+                <a:spcPts val="1191"/>
+              </a:spcBef>
+              <a:spcAft>
+                <a:spcPts val="992"/>
+              </a:spcAft>
+              <a:buNone/>
+              <a:tabLst>
+                <a:tab pos="0" algn="l"/>
+              </a:tabLst>
+            </a:pPr>
+            <a:r>
+              <a:rPr lang="ru-RU" sz="2000" b="1" u="none" strike="noStrike">
+                <a:solidFill>
+                  <a:srgbClr val="2D2D2D"/>
+                </a:solidFill>
+                <a:effectLst/>
+                <a:uFillTx/>
+                <a:latin typeface="Arial"/>
+              </a:rPr>
+              <a:t>Гипотеза исследования: </a:t>
+            </a:r>
+            <a:r>
+              <a:rPr lang="ru-RU" sz="2000" b="0" u="none" strike="noStrike">
+                <a:solidFill>
+                  <a:srgbClr val="2D2D2D"/>
+                </a:solidFill>
+                <a:effectLst/>
+                <a:uFillTx/>
+                <a:latin typeface="Arial"/>
+              </a:rPr>
+              <a:t>Если для решения уравнения использовать метод Ньютона, то количество итераций будет меньше, чем при использовании метода хорд или метода половинного деления, благодаря квадратичной сходимости.</a:t>
             </a:r>
             <a:endParaRPr lang="ru-RU" sz="2000" b="0" u="none" strike="noStrike">
               <a:solidFill>
@@ -6976,7 +8454,7 @@
       </p:grpSpPr>
       <p:sp>
         <p:nvSpPr>
-          <p:cNvPr id="19" name="PlaceHolder 1"/>
+          <p:cNvPr id="20" name="PlaceHolder 1"/>
           <p:cNvSpPr>
             <a:spLocks noGrp="1"/>
           </p:cNvSpPr>
@@ -6986,8 +8464,8 @@
         </p:nvSpPr>
         <p:spPr>
           <a:xfrm>
-            <a:off x="504000" y="226080"/>
-            <a:ext cx="9071640" cy="946440"/>
+            <a:off x="504000" y="225360"/>
+            <a:ext cx="9070920" cy="947160"/>
           </a:xfrm>
           <a:prstGeom prst="rect">
             <a:avLst/>
@@ -7003,7 +8481,13 @@
           </a:bodyPr>
           <a:p>
             <a:pPr indent="0" algn="ctr">
+              <a:lnSpc>
+                <a:spcPct val="100000"/>
+              </a:lnSpc>
               <a:buNone/>
+              <a:tabLst>
+                <a:tab pos="0" algn="l"/>
+              </a:tabLst>
             </a:pPr>
             <a:r>
               <a:rPr lang="ru-RU" sz="3200" b="1" u="none" strike="noStrike">
@@ -7014,9 +8498,20 @@
                 <a:uFillTx/>
                 <a:latin typeface="Arial"/>
               </a:rPr>
-              <a:t>Основные понятия</a:t>
-            </a:r>
-            <a:endParaRPr lang="ru-RU" sz="3200" b="1" u="none" strike="noStrike">
+              <a:t>Основные </a:t>
+            </a:r>
+            <a:r>
+              <a:rPr lang="ru-RU" sz="3200" b="1" u="none" strike="noStrike">
+                <a:solidFill>
+                  <a:srgbClr val="1A3A5C"/>
+                </a:solidFill>
+                <a:effectLst/>
+                <a:uFillTx/>
+                <a:latin typeface="Arial"/>
+              </a:rPr>
+              <a:t>понятия</a:t>
+            </a:r>
+            <a:endParaRPr lang="ru-RU" sz="3200" b="0" u="none" strike="noStrike">
               <a:solidFill>
                 <a:srgbClr val="1A3A5C"/>
               </a:solidFill>
@@ -7029,7 +8524,7 @@
       </p:sp>
       <p:sp>
         <p:nvSpPr>
-          <p:cNvPr id="20" name="PlaceHolder 2"/>
+          <p:cNvPr id="21" name="PlaceHolder 2"/>
           <p:cNvSpPr>
             <a:spLocks noGrp="1"/>
           </p:cNvSpPr>
@@ -7040,7 +8535,7 @@
         <p:spPr>
           <a:xfrm>
             <a:off x="504000" y="1326600"/>
-            <a:ext cx="9071640" cy="3385800"/>
+            <a:ext cx="9070920" cy="3385080"/>
           </a:xfrm>
           <a:prstGeom prst="rect">
             <a:avLst/>
@@ -7052,10 +8547,13 @@
         </p:spPr>
         <p:txBody>
           <a:bodyPr lIns="0" tIns="0" rIns="0" bIns="0" anchor="t">
-            <a:normAutofit lnSpcReduction="9999"/>
+            <a:normAutofit fontScale="85000" lnSpcReduction="9999"/>
           </a:bodyPr>
           <a:p>
             <a:pPr indent="0" algn="just">
+              <a:lnSpc>
+                <a:spcPct val="100000"/>
+              </a:lnSpc>
               <a:spcBef>
                 <a:spcPts val="1191"/>
               </a:spcBef>
@@ -7063,6 +8561,9 @@
                 <a:spcPts val="992"/>
               </a:spcAft>
               <a:buNone/>
+              <a:tabLst>
+                <a:tab pos="0" algn="l"/>
+              </a:tabLst>
             </a:pPr>
             <a:r>
               <a:rPr lang="ru-RU" sz="2000" b="1" u="none" strike="noStrike">
@@ -7097,6 +8598,9 @@
           </a:p>
           <a:p>
             <a:pPr indent="0" algn="just">
+              <a:lnSpc>
+                <a:spcPct val="100000"/>
+              </a:lnSpc>
               <a:spcBef>
                 <a:spcPts val="1191"/>
               </a:spcBef>
@@ -7104,6 +8608,9 @@
                 <a:spcPts val="992"/>
               </a:spcAft>
               <a:buNone/>
+              <a:tabLst>
+                <a:tab pos="0" algn="l"/>
+              </a:tabLst>
             </a:pPr>
             <a:r>
               <a:rPr lang="ru-RU" sz="2000" b="1" u="none" strike="noStrike">
@@ -7138,6 +8645,9 @@
           </a:p>
           <a:p>
             <a:pPr indent="0" algn="just">
+              <a:lnSpc>
+                <a:spcPct val="100000"/>
+              </a:lnSpc>
               <a:spcBef>
                 <a:spcPts val="1191"/>
               </a:spcBef>
@@ -7145,6 +8655,9 @@
                 <a:spcPts val="992"/>
               </a:spcAft>
               <a:buNone/>
+              <a:tabLst>
+                <a:tab pos="0" algn="l"/>
+              </a:tabLst>
             </a:pPr>
             <a:r>
               <a:rPr lang="ru-RU" sz="2000" b="1" u="none" strike="noStrike">
@@ -7179,6 +8692,9 @@
           </a:p>
           <a:p>
             <a:pPr marL="432000" indent="-324000" algn="just">
+              <a:lnSpc>
+                <a:spcPct val="100000"/>
+              </a:lnSpc>
               <a:spcBef>
                 <a:spcPts val="1191"/>
               </a:spcBef>
@@ -7191,6 +8707,9 @@
               <a:buSzPct val="45000"/>
               <a:buFont typeface="Wingdings" charset="2"/>
               <a:buChar char=""/>
+              <a:tabLst>
+                <a:tab pos="0" algn="l"/>
+              </a:tabLst>
             </a:pPr>
             <a:r>
               <a:rPr lang="ru-RU" sz="2000" b="0" u="sng" strike="noStrike">
@@ -7214,6 +8733,9 @@
           </a:p>
           <a:p>
             <a:pPr marL="432000" indent="-324000" algn="just">
+              <a:lnSpc>
+                <a:spcPct val="100000"/>
+              </a:lnSpc>
               <a:spcBef>
                 <a:spcPts val="1191"/>
               </a:spcBef>
@@ -7226,6 +8748,9 @@
               <a:buSzPct val="45000"/>
               <a:buFont typeface="Wingdings" charset="2"/>
               <a:buChar char=""/>
+              <a:tabLst>
+                <a:tab pos="0" algn="l"/>
+              </a:tabLst>
             </a:pPr>
             <a:r>
               <a:rPr lang="ru-RU" sz="2000" b="0" u="sng" strike="noStrike">
@@ -7249,6 +8774,9 @@
           </a:p>
           <a:p>
             <a:pPr marL="432000" indent="-324000" algn="just">
+              <a:lnSpc>
+                <a:spcPct val="100000"/>
+              </a:lnSpc>
               <a:spcBef>
                 <a:spcPts val="1191"/>
               </a:spcBef>
@@ -7261,6 +8789,9 @@
               <a:buSzPct val="45000"/>
               <a:buFont typeface="Wingdings" charset="2"/>
               <a:buChar char=""/>
+              <a:tabLst>
+                <a:tab pos="0" algn="l"/>
+              </a:tabLst>
             </a:pPr>
             <a:r>
               <a:rPr lang="ru-RU" sz="2000" b="0" u="sng" strike="noStrike">
@@ -7284,6 +8815,9 @@
           </a:p>
           <a:p>
             <a:pPr indent="0" algn="just">
+              <a:lnSpc>
+                <a:spcPct val="100000"/>
+              </a:lnSpc>
               <a:spcBef>
                 <a:spcPts val="1191"/>
               </a:spcBef>
@@ -7291,6 +8825,9 @@
                 <a:spcPts val="992"/>
               </a:spcAft>
               <a:buNone/>
+              <a:tabLst>
+                <a:tab pos="0" algn="l"/>
+              </a:tabLst>
             </a:pPr>
             <a:r>
               <a:rPr lang="ru-RU" sz="2000" b="1" u="none" strike="noStrike">
@@ -7325,6 +8862,9 @@
           </a:p>
           <a:p>
             <a:pPr indent="0" algn="l">
+              <a:lnSpc>
+                <a:spcPct val="100000"/>
+              </a:lnSpc>
               <a:spcBef>
                 <a:spcPts val="1191"/>
               </a:spcBef>
@@ -7332,6 +8872,9 @@
                 <a:spcPts val="992"/>
               </a:spcAft>
               <a:buNone/>
+              <a:tabLst>
+                <a:tab pos="0" algn="l"/>
+              </a:tabLst>
             </a:pPr>
             <a:endParaRPr lang="ru-RU" sz="1000" b="0" u="none" strike="noStrike">
               <a:solidFill>
@@ -7376,7 +8919,7 @@
       </p:grpSpPr>
       <p:sp>
         <p:nvSpPr>
-          <p:cNvPr id="21" name="PlaceHolder 1"/>
+          <p:cNvPr id="22" name="PlaceHolder 1"/>
           <p:cNvSpPr>
             <a:spLocks noGrp="1"/>
           </p:cNvSpPr>
@@ -7386,8 +8929,8 @@
         </p:nvSpPr>
         <p:spPr>
           <a:xfrm>
-            <a:off x="504000" y="226080"/>
-            <a:ext cx="9071640" cy="946440"/>
+            <a:off x="504000" y="-360"/>
+            <a:ext cx="9070920" cy="947160"/>
           </a:xfrm>
           <a:prstGeom prst="rect">
             <a:avLst/>
@@ -7403,7 +8946,13 @@
           </a:bodyPr>
           <a:p>
             <a:pPr indent="0" algn="ctr">
+              <a:lnSpc>
+                <a:spcPct val="100000"/>
+              </a:lnSpc>
               <a:buNone/>
+              <a:tabLst>
+                <a:tab pos="0" algn="l"/>
+              </a:tabLst>
             </a:pPr>
             <a:r>
               <a:rPr lang="ru-RU" sz="3200" b="1" u="none" strike="noStrike">
@@ -7414,9 +8963,42 @@
                 <a:uFillTx/>
                 <a:latin typeface="Arial"/>
               </a:rPr>
-              <a:t>Метод бисекции (половинного деления)</a:t>
-            </a:r>
-            <a:endParaRPr lang="ru-RU" sz="3200" b="1" u="none" strike="noStrike">
+              <a:t>Метод </a:t>
+            </a:r>
+            <a:r>
+              <a:rPr lang="ru-RU" sz="3200" b="1" u="none" strike="noStrike">
+                <a:solidFill>
+                  <a:srgbClr val="1A3A5C"/>
+                </a:solidFill>
+                <a:effectLst/>
+                <a:uFillTx/>
+                <a:latin typeface="Arial"/>
+              </a:rPr>
+              <a:t>бисекции </a:t>
+            </a:r>
+            <a:r>
+              <a:rPr lang="ru-RU" sz="3200" b="1" u="none" strike="noStrike">
+                <a:solidFill>
+                  <a:srgbClr val="1A3A5C"/>
+                </a:solidFill>
+                <a:effectLst/>
+                <a:uFillTx/>
+                <a:latin typeface="Arial"/>
+              </a:rPr>
+              <a:t>(половинног</a:t>
+            </a:r>
+            <a:r>
+              <a:rPr lang="ru-RU" sz="3200" b="1" u="none" strike="noStrike">
+                <a:solidFill>
+                  <a:srgbClr val="1A3A5C"/>
+                </a:solidFill>
+                <a:effectLst/>
+                <a:uFillTx/>
+                <a:latin typeface="Arial"/>
+              </a:rPr>
+              <a:t>о деления)</a:t>
+            </a:r>
+            <a:endParaRPr lang="ru-RU" sz="3200" b="0" u="none" strike="noStrike">
               <a:solidFill>
                 <a:srgbClr val="1A3A5C"/>
               </a:solidFill>
@@ -7429,7 +9011,7 @@
       </p:sp>
       <p:sp>
         <p:nvSpPr>
-          <p:cNvPr id="22" name="PlaceHolder 2"/>
+          <p:cNvPr id="23" name="PlaceHolder 2"/>
           <p:cNvSpPr>
             <a:spLocks noGrp="1"/>
           </p:cNvSpPr>
@@ -7439,8 +9021,8 @@
         </p:nvSpPr>
         <p:spPr>
           <a:xfrm>
-            <a:off x="536040" y="1382400"/>
-            <a:ext cx="9071640" cy="3288240"/>
+            <a:off x="306360" y="946800"/>
+            <a:ext cx="9300600" cy="3287520"/>
           </a:xfrm>
           <a:prstGeom prst="rect">
             <a:avLst/>
@@ -7455,14 +9037,20 @@
             <a:normAutofit/>
           </a:bodyPr>
           <a:p>
-            <a:pPr indent="0" algn="l">
+            <a:pPr indent="0" algn="just">
+              <a:lnSpc>
+                <a:spcPct val="100000"/>
+              </a:lnSpc>
               <a:spcBef>
-                <a:spcPts val="1191"/>
+                <a:spcPts val="624"/>
               </a:spcBef>
               <a:spcAft>
-                <a:spcPts val="992"/>
+                <a:spcPts val="425"/>
               </a:spcAft>
               <a:buNone/>
+              <a:tabLst>
+                <a:tab pos="0" algn="l"/>
+              </a:tabLst>
             </a:pPr>
             <a:r>
               <a:rPr lang="ru-RU" sz="2000" b="1" u="none" strike="noStrike">
@@ -7496,14 +9084,20 @@
             </a:endParaRPr>
           </a:p>
           <a:p>
-            <a:pPr indent="0" algn="l">
+            <a:pPr indent="0" algn="just">
+              <a:lnSpc>
+                <a:spcPct val="100000"/>
+              </a:lnSpc>
               <a:spcBef>
-                <a:spcPts val="1191"/>
+                <a:spcPts val="624"/>
               </a:spcBef>
               <a:spcAft>
-                <a:spcPts val="992"/>
+                <a:spcPts val="425"/>
               </a:spcAft>
               <a:buNone/>
+              <a:tabLst>
+                <a:tab pos="0" algn="l"/>
+              </a:tabLst>
             </a:pPr>
             <a:r>
               <a:rPr lang="ru-RU" sz="2000" b="1" u="none" strike="noStrike">
@@ -7537,14 +9131,20 @@
             </a:endParaRPr>
           </a:p>
           <a:p>
-            <a:pPr indent="0" algn="l">
+            <a:pPr indent="0" algn="just">
+              <a:lnSpc>
+                <a:spcPct val="100000"/>
+              </a:lnSpc>
               <a:spcBef>
-                <a:spcPts val="1191"/>
+                <a:spcPts val="624"/>
               </a:spcBef>
               <a:spcAft>
-                <a:spcPts val="992"/>
+                <a:spcPts val="425"/>
               </a:spcAft>
               <a:buNone/>
+              <a:tabLst>
+                <a:tab pos="0" algn="l"/>
+              </a:tabLst>
             </a:pPr>
             <a:r>
               <a:rPr lang="ru-RU" sz="2000" b="1" u="none" strike="noStrike">
@@ -7578,14 +9178,20 @@
             </a:endParaRPr>
           </a:p>
           <a:p>
-            <a:pPr indent="0" algn="l">
+            <a:pPr indent="0" algn="just">
+              <a:lnSpc>
+                <a:spcPct val="100000"/>
+              </a:lnSpc>
               <a:spcBef>
-                <a:spcPts val="1191"/>
+                <a:spcPts val="624"/>
               </a:spcBef>
               <a:spcAft>
-                <a:spcPts val="992"/>
+                <a:spcPts val="425"/>
               </a:spcAft>
               <a:buNone/>
+              <a:tabLst>
+                <a:tab pos="0" algn="l"/>
+              </a:tabLst>
             </a:pPr>
             <a:r>
               <a:rPr lang="ru-RU" sz="2000" b="1" u="none" strike="noStrike">
@@ -7620,15 +9226,21 @@
           </a:p>
           <a:p>
             <a:pPr indent="0" algn="l">
+              <a:lnSpc>
+                <a:spcPct val="100000"/>
+              </a:lnSpc>
               <a:spcBef>
-                <a:spcPts val="1191"/>
+                <a:spcPts val="624"/>
               </a:spcBef>
               <a:spcAft>
-                <a:spcPts val="992"/>
+                <a:spcPts val="425"/>
               </a:spcAft>
               <a:buNone/>
-            </a:pPr>
-            <a:endParaRPr lang="ru-RU" sz="1000" b="0" u="none" strike="noStrike">
+              <a:tabLst>
+                <a:tab pos="0" algn="l"/>
+              </a:tabLst>
+            </a:pPr>
+            <a:endParaRPr lang="ru-RU" sz="2000" b="0" u="none" strike="noStrike">
               <a:solidFill>
                 <a:srgbClr val="2D2D2D"/>
               </a:solidFill>
@@ -7639,6 +9251,30 @@
           </a:p>
         </p:txBody>
       </p:sp>
+      <p:pic>
+        <p:nvPicPr>
+          <p:cNvPr id="24" name=""/>
+          <p:cNvPicPr/>
+          <p:nvPr/>
+        </p:nvPicPr>
+        <p:blipFill>
+          <a:blip r:embed="rId1"/>
+          <a:stretch/>
+        </p:blipFill>
+        <p:spPr>
+          <a:xfrm>
+            <a:off x="1702440" y="3006720"/>
+            <a:ext cx="3780720" cy="2437560"/>
+          </a:xfrm>
+          <a:prstGeom prst="rect">
+            <a:avLst/>
+          </a:prstGeom>
+          <a:noFill/>
+          <a:ln w="0">
+            <a:noFill/>
+          </a:ln>
+        </p:spPr>
+      </p:pic>
     </p:spTree>
   </p:cSld>
   <mc:AlternateContent>
@@ -7671,7 +9307,7 @@
       </p:grpSpPr>
       <p:sp>
         <p:nvSpPr>
-          <p:cNvPr id="23" name="PlaceHolder 1"/>
+          <p:cNvPr id="25" name="PlaceHolder 1"/>
           <p:cNvSpPr>
             <a:spLocks noGrp="1"/>
           </p:cNvSpPr>
@@ -7681,8 +9317,8 @@
         </p:nvSpPr>
         <p:spPr>
           <a:xfrm>
-            <a:off x="504000" y="226080"/>
-            <a:ext cx="9071640" cy="946440"/>
+            <a:off x="504000" y="225360"/>
+            <a:ext cx="9070920" cy="947160"/>
           </a:xfrm>
           <a:prstGeom prst="rect">
             <a:avLst/>
@@ -7698,7 +9334,13 @@
           </a:bodyPr>
           <a:p>
             <a:pPr indent="0" algn="ctr">
+              <a:lnSpc>
+                <a:spcPct val="100000"/>
+              </a:lnSpc>
               <a:buNone/>
+              <a:tabLst>
+                <a:tab pos="0" algn="l"/>
+              </a:tabLst>
             </a:pPr>
             <a:r>
               <a:rPr lang="ru-RU" sz="3200" b="1" u="none" strike="noStrike">
@@ -7709,9 +9351,31 @@
                 <a:uFillTx/>
                 <a:latin typeface="Arial"/>
               </a:rPr>
-              <a:t>Реализация метода бисекции</a:t>
-            </a:r>
-            <a:endParaRPr lang="ru-RU" sz="3200" b="1" u="none" strike="noStrike">
+              <a:t>Реализация </a:t>
+            </a:r>
+            <a:r>
+              <a:rPr lang="ru-RU" sz="3200" b="1" u="none" strike="noStrike">
+                <a:solidFill>
+                  <a:srgbClr val="1A3A5C"/>
+                </a:solidFill>
+                <a:effectLst/>
+                <a:uFillTx/>
+                <a:latin typeface="Arial"/>
+              </a:rPr>
+              <a:t>метода </a:t>
+            </a:r>
+            <a:r>
+              <a:rPr lang="ru-RU" sz="3200" b="1" u="none" strike="noStrike">
+                <a:solidFill>
+                  <a:srgbClr val="1A3A5C"/>
+                </a:solidFill>
+                <a:effectLst/>
+                <a:uFillTx/>
+                <a:latin typeface="Arial"/>
+              </a:rPr>
+              <a:t>бисекции</a:t>
+            </a:r>
+            <a:endParaRPr lang="ru-RU" sz="3200" b="0" u="none" strike="noStrike">
               <a:solidFill>
                 <a:srgbClr val="1A3A5C"/>
               </a:solidFill>
@@ -7724,7 +9388,7 @@
       </p:sp>
       <p:pic>
         <p:nvPicPr>
-          <p:cNvPr id="24" name=""/>
+          <p:cNvPr id="26" name=""/>
           <p:cNvPicPr/>
           <p:nvPr/>
         </p:nvPicPr>
@@ -7735,7 +9399,7 @@
         <p:spPr>
           <a:xfrm>
             <a:off x="720000" y="1452240"/>
-            <a:ext cx="8672760" cy="3227760"/>
+            <a:ext cx="8672040" cy="3227040"/>
           </a:xfrm>
           <a:prstGeom prst="rect">
             <a:avLst/>
@@ -7778,7 +9442,7 @@
       </p:grpSpPr>
       <p:sp>
         <p:nvSpPr>
-          <p:cNvPr id="25" name="PlaceHolder 1"/>
+          <p:cNvPr id="27" name="PlaceHolder 1"/>
           <p:cNvSpPr>
             <a:spLocks noGrp="1"/>
           </p:cNvSpPr>
@@ -7788,8 +9452,8 @@
         </p:nvSpPr>
         <p:spPr>
           <a:xfrm>
-            <a:off x="504000" y="226080"/>
-            <a:ext cx="9071640" cy="946440"/>
+            <a:off x="504000" y="-360"/>
+            <a:ext cx="9070920" cy="947160"/>
           </a:xfrm>
           <a:prstGeom prst="rect">
             <a:avLst/>
@@ -7805,7 +9469,13 @@
           </a:bodyPr>
           <a:p>
             <a:pPr indent="0" algn="ctr">
+              <a:lnSpc>
+                <a:spcPct val="100000"/>
+              </a:lnSpc>
               <a:buNone/>
+              <a:tabLst>
+                <a:tab pos="0" algn="l"/>
+              </a:tabLst>
             </a:pPr>
             <a:r>
               <a:rPr lang="ru-RU" sz="3200" b="1" u="none" strike="noStrike">
@@ -7816,9 +9486,20 @@
                 <a:uFillTx/>
                 <a:latin typeface="Arial"/>
               </a:rPr>
-              <a:t>Метод хорд (секущих)</a:t>
-            </a:r>
-            <a:endParaRPr lang="ru-RU" sz="3200" b="1" u="none" strike="noStrike">
+              <a:t>Метод хорд </a:t>
+            </a:r>
+            <a:r>
+              <a:rPr lang="ru-RU" sz="3200" b="1" u="none" strike="noStrike">
+                <a:solidFill>
+                  <a:srgbClr val="1A3A5C"/>
+                </a:solidFill>
+                <a:effectLst/>
+                <a:uFillTx/>
+                <a:latin typeface="Arial"/>
+              </a:rPr>
+              <a:t>(секущих)</a:t>
+            </a:r>
+            <a:endParaRPr lang="ru-RU" sz="3200" b="0" u="none" strike="noStrike">
               <a:solidFill>
                 <a:srgbClr val="1A3A5C"/>
               </a:solidFill>
@@ -7831,7 +9512,7 @@
       </p:sp>
       <p:sp>
         <p:nvSpPr>
-          <p:cNvPr id="26" name="PlaceHolder 2"/>
+          <p:cNvPr id="28" name="PlaceHolder 2"/>
           <p:cNvSpPr>
             <a:spLocks noGrp="1"/>
           </p:cNvSpPr>
@@ -7841,8 +9522,8 @@
         </p:nvSpPr>
         <p:spPr>
           <a:xfrm>
-            <a:off x="535680" y="1445760"/>
-            <a:ext cx="9071640" cy="3288240"/>
+            <a:off x="294840" y="946800"/>
+            <a:ext cx="9311760" cy="3287520"/>
           </a:xfrm>
           <a:prstGeom prst="rect">
             <a:avLst/>
@@ -7858,16 +9539,22 @@
           </a:bodyPr>
           <a:p>
             <a:pPr indent="0" algn="just">
+              <a:lnSpc>
+                <a:spcPct val="100000"/>
+              </a:lnSpc>
               <a:spcBef>
-                <a:spcPts val="1191"/>
+                <a:spcPts val="624"/>
               </a:spcBef>
               <a:spcAft>
-                <a:spcPts val="992"/>
+                <a:spcPts val="425"/>
               </a:spcAft>
               <a:buNone/>
-            </a:pPr>
-            <a:r>
-              <a:rPr lang="ru-RU" sz="2100" b="1" u="none" strike="noStrike">
+              <a:tabLst>
+                <a:tab pos="0" algn="l"/>
+              </a:tabLst>
+            </a:pPr>
+            <a:r>
+              <a:rPr lang="ru-RU" sz="2000" b="1" u="none" strike="noStrike">
                 <a:solidFill>
                   <a:srgbClr val="2D2D2D"/>
                 </a:solidFill>
@@ -7878,7 +9565,7 @@
               <a:t>Формула:</a:t>
             </a:r>
             <a:r>
-              <a:rPr lang="ru-RU" sz="2100" b="0" u="none" strike="noStrike">
+              <a:rPr lang="ru-RU" sz="2000" b="0" u="none" strike="noStrike">
                 <a:solidFill>
                   <a:srgbClr val="2D2D2D"/>
                 </a:solidFill>
@@ -7888,7 +9575,7 @@
               </a:rPr>
               <a:t> xₙ₊₁ = xₙ − f(xₙ) · (xₙ − xₙ₋₁) / (f(xₙ) − f(xₙ₋₁))</a:t>
             </a:r>
-            <a:endParaRPr lang="ru-RU" sz="2100" b="0" u="none" strike="noStrike">
+            <a:endParaRPr lang="ru-RU" sz="2000" b="0" u="none" strike="noStrike">
               <a:solidFill>
                 <a:srgbClr val="2D2D2D"/>
               </a:solidFill>
@@ -7899,16 +9586,22 @@
           </a:p>
           <a:p>
             <a:pPr indent="0" algn="just">
+              <a:lnSpc>
+                <a:spcPct val="100000"/>
+              </a:lnSpc>
               <a:spcBef>
-                <a:spcPts val="1191"/>
+                <a:spcPts val="624"/>
               </a:spcBef>
               <a:spcAft>
-                <a:spcPts val="992"/>
+                <a:spcPts val="425"/>
               </a:spcAft>
               <a:buNone/>
-            </a:pPr>
-            <a:r>
-              <a:rPr lang="ru-RU" sz="2100" b="1" u="none" strike="noStrike">
+              <a:tabLst>
+                <a:tab pos="0" algn="l"/>
+              </a:tabLst>
+            </a:pPr>
+            <a:r>
+              <a:rPr lang="ru-RU" sz="2000" b="1" u="none" strike="noStrike">
                 <a:solidFill>
                   <a:srgbClr val="2D2D2D"/>
                 </a:solidFill>
@@ -7919,7 +9612,7 @@
               <a:t>Достоинства:</a:t>
             </a:r>
             <a:r>
-              <a:rPr lang="ru-RU" sz="2100" b="0" u="none" strike="noStrike">
+              <a:rPr lang="ru-RU" sz="2000" b="0" u="none" strike="noStrike">
                 <a:solidFill>
                   <a:srgbClr val="2D2D2D"/>
                 </a:solidFill>
@@ -7929,7 +9622,7 @@
               </a:rPr>
               <a:t> быстрее бисекции, не требует производной</a:t>
             </a:r>
-            <a:endParaRPr lang="ru-RU" sz="2100" b="0" u="none" strike="noStrike">
+            <a:endParaRPr lang="ru-RU" sz="2000" b="0" u="none" strike="noStrike">
               <a:solidFill>
                 <a:srgbClr val="2D2D2D"/>
               </a:solidFill>
@@ -7940,16 +9633,22 @@
           </a:p>
           <a:p>
             <a:pPr indent="0" algn="just">
+              <a:lnSpc>
+                <a:spcPct val="100000"/>
+              </a:lnSpc>
               <a:spcBef>
-                <a:spcPts val="1191"/>
+                <a:spcPts val="624"/>
               </a:spcBef>
               <a:spcAft>
-                <a:spcPts val="992"/>
+                <a:spcPts val="425"/>
               </a:spcAft>
               <a:buNone/>
-            </a:pPr>
-            <a:r>
-              <a:rPr lang="ru-RU" sz="2100" b="1" u="none" strike="noStrike">
+              <a:tabLst>
+                <a:tab pos="0" algn="l"/>
+              </a:tabLst>
+            </a:pPr>
+            <a:r>
+              <a:rPr lang="ru-RU" sz="2000" b="1" u="none" strike="noStrike">
                 <a:solidFill>
                   <a:srgbClr val="2D2D2D"/>
                 </a:solidFill>
@@ -7960,7 +9659,7 @@
               <a:t>Недостатки:</a:t>
             </a:r>
             <a:r>
-              <a:rPr lang="ru-RU" sz="2100" b="0" u="none" strike="noStrike">
+              <a:rPr lang="ru-RU" sz="2000" b="0" u="none" strike="noStrike">
                 <a:solidFill>
                   <a:srgbClr val="2D2D2D"/>
                 </a:solidFill>
@@ -7970,7 +9669,7 @@
               </a:rPr>
               <a:t> сверхлинейная сходимость (средняя), может расходиться</a:t>
             </a:r>
-            <a:endParaRPr lang="ru-RU" sz="2100" b="0" u="none" strike="noStrike">
+            <a:endParaRPr lang="ru-RU" sz="2000" b="0" u="none" strike="noStrike">
               <a:solidFill>
                 <a:srgbClr val="2D2D2D"/>
               </a:solidFill>
@@ -7981,13 +9680,19 @@
           </a:p>
           <a:p>
             <a:pPr indent="0" algn="l">
+              <a:lnSpc>
+                <a:spcPct val="100000"/>
+              </a:lnSpc>
               <a:spcBef>
-                <a:spcPts val="1191"/>
+                <a:spcPts val="624"/>
               </a:spcBef>
               <a:spcAft>
-                <a:spcPts val="992"/>
+                <a:spcPts val="425"/>
               </a:spcAft>
               <a:buNone/>
+              <a:tabLst>
+                <a:tab pos="0" algn="l"/>
+              </a:tabLst>
             </a:pPr>
             <a:endParaRPr lang="ru-RU" sz="1000" b="0" u="none" strike="noStrike">
               <a:solidFill>
@@ -8000,6 +9705,54 @@
           </a:p>
         </p:txBody>
       </p:sp>
+      <p:pic>
+        <p:nvPicPr>
+          <p:cNvPr id="29" name=""/>
+          <p:cNvPicPr/>
+          <p:nvPr/>
+        </p:nvPicPr>
+        <p:blipFill>
+          <a:blip r:embed="rId1"/>
+          <a:stretch/>
+        </p:blipFill>
+        <p:spPr>
+          <a:xfrm>
+            <a:off x="1266480" y="2393640"/>
+            <a:ext cx="3847680" cy="3195360"/>
+          </a:xfrm>
+          <a:prstGeom prst="rect">
+            <a:avLst/>
+          </a:prstGeom>
+          <a:noFill/>
+          <a:ln w="0">
+            <a:noFill/>
+          </a:ln>
+        </p:spPr>
+      </p:pic>
+      <p:pic>
+        <p:nvPicPr>
+          <p:cNvPr id="30" name=""/>
+          <p:cNvPicPr/>
+          <p:nvPr/>
+        </p:nvPicPr>
+        <p:blipFill>
+          <a:blip r:embed="rId2"/>
+          <a:stretch/>
+        </p:blipFill>
+        <p:spPr>
+          <a:xfrm>
+            <a:off x="5613120" y="2406600"/>
+            <a:ext cx="3846240" cy="3034800"/>
+          </a:xfrm>
+          <a:prstGeom prst="rect">
+            <a:avLst/>
+          </a:prstGeom>
+          <a:noFill/>
+          <a:ln w="0">
+            <a:noFill/>
+          </a:ln>
+        </p:spPr>
+      </p:pic>
     </p:spTree>
   </p:cSld>
   <mc:AlternateContent>
@@ -8032,7 +9785,7 @@
       </p:grpSpPr>
       <p:sp>
         <p:nvSpPr>
-          <p:cNvPr id="27" name="PlaceHolder 1"/>
+          <p:cNvPr id="31" name="PlaceHolder 1"/>
           <p:cNvSpPr>
             <a:spLocks noGrp="1"/>
           </p:cNvSpPr>
@@ -8042,8 +9795,8 @@
         </p:nvSpPr>
         <p:spPr>
           <a:xfrm>
-            <a:off x="504000" y="226080"/>
-            <a:ext cx="9071640" cy="946440"/>
+            <a:off x="504000" y="225360"/>
+            <a:ext cx="9070920" cy="947160"/>
           </a:xfrm>
           <a:prstGeom prst="rect">
             <a:avLst/>
@@ -8059,7 +9812,13 @@
           </a:bodyPr>
           <a:p>
             <a:pPr indent="0" algn="ctr">
+              <a:lnSpc>
+                <a:spcPct val="100000"/>
+              </a:lnSpc>
               <a:buNone/>
+              <a:tabLst>
+                <a:tab pos="0" algn="l"/>
+              </a:tabLst>
             </a:pPr>
             <a:r>
               <a:rPr lang="ru-RU" sz="3200" b="1" u="none" strike="noStrike">
@@ -8070,9 +9829,20 @@
                 <a:uFillTx/>
                 <a:latin typeface="Arial"/>
               </a:rPr>
-              <a:t>Реализация метода хорд</a:t>
-            </a:r>
-            <a:endParaRPr lang="ru-RU" sz="3200" b="1" u="none" strike="noStrike">
+              <a:t>Реализация </a:t>
+            </a:r>
+            <a:r>
+              <a:rPr lang="ru-RU" sz="3200" b="1" u="none" strike="noStrike">
+                <a:solidFill>
+                  <a:srgbClr val="1A3A5C"/>
+                </a:solidFill>
+                <a:effectLst/>
+                <a:uFillTx/>
+                <a:latin typeface="Arial"/>
+              </a:rPr>
+              <a:t>метода хорд</a:t>
+            </a:r>
+            <a:endParaRPr lang="ru-RU" sz="3200" b="0" u="none" strike="noStrike">
               <a:solidFill>
                 <a:srgbClr val="1A3A5C"/>
               </a:solidFill>
@@ -8085,7 +9855,7 @@
       </p:sp>
       <p:pic>
         <p:nvPicPr>
-          <p:cNvPr id="28" name=""/>
+          <p:cNvPr id="32" name=""/>
           <p:cNvPicPr/>
           <p:nvPr/>
         </p:nvPicPr>
@@ -8096,7 +9866,7 @@
         <p:spPr>
           <a:xfrm>
             <a:off x="720000" y="1260000"/>
-            <a:ext cx="8713080" cy="4142160"/>
+            <a:ext cx="8712360" cy="4141440"/>
           </a:xfrm>
           <a:prstGeom prst="rect">
             <a:avLst/>

--- a/Презентация по проекту.pptx
+++ b/Презентация по проекту.pptx
@@ -116,51 +116,7 @@
                 <a:uFillTx/>
                 <a:latin typeface="Arial"/>
               </a:rPr>
-              <a:t>Для правки </a:t>
-            </a:r>
-            <a:r>
-              <a:rPr lang="ru-RU" sz="3200" b="0" u="none" strike="noStrike">
-                <a:solidFill>
-                  <a:srgbClr val="1A3A5C"/>
-                </a:solidFill>
-                <a:effectLst/>
-                <a:uFillTx/>
-                <a:latin typeface="Arial"/>
-              </a:rPr>
-              <a:t>текста </a:t>
-            </a:r>
-            <a:r>
-              <a:rPr lang="ru-RU" sz="3200" b="0" u="none" strike="noStrike">
-                <a:solidFill>
-                  <a:srgbClr val="1A3A5C"/>
-                </a:solidFill>
-                <a:effectLst/>
-                <a:uFillTx/>
-                <a:latin typeface="Arial"/>
-              </a:rPr>
-              <a:t>заглавия </a:t>
-            </a:r>
-            <a:r>
-              <a:rPr lang="ru-RU" sz="3200" b="0" u="none" strike="noStrike">
-                <a:solidFill>
-                  <a:srgbClr val="1A3A5C"/>
-                </a:solidFill>
-                <a:effectLst/>
-                <a:uFillTx/>
-                <a:latin typeface="Arial"/>
-              </a:rPr>
-              <a:t>щёлкните </a:t>
-            </a:r>
-            <a:r>
-              <a:rPr lang="ru-RU" sz="3200" b="0" u="none" strike="noStrike">
-                <a:solidFill>
-                  <a:srgbClr val="1A3A5C"/>
-                </a:solidFill>
-                <a:effectLst/>
-                <a:uFillTx/>
-                <a:latin typeface="Arial"/>
-              </a:rPr>
-              <a:t>мышью</a:t>
+              <a:t>Для правки текста заглавия щёлкните мышью</a:t>
             </a:r>
             <a:endParaRPr lang="ru-RU" sz="3200" b="0" u="none" strike="noStrike">
               <a:solidFill>
@@ -737,7 +693,7 @@
                 <a:tab pos="0" algn="l"/>
               </a:tabLst>
             </a:pPr>
-            <a:fld id="{0C01CF58-C2DF-4A7D-A27A-B3DAB71CCAC3}" type="slidenum">
+            <a:fld id="{3F6910FE-42F3-4A9F-99AA-35A23EE15791}" type="slidenum">
               <a:rPr lang="ru-RU" sz="1400" b="0" u="none" strike="noStrike">
                 <a:solidFill>
                   <a:srgbClr val="000000"/>
@@ -1122,7 +1078,7 @@
                 <a:tab pos="0" algn="l"/>
               </a:tabLst>
             </a:pPr>
-            <a:fld id="{9383227E-8B12-4EBA-A194-3392EDBE1D0B}" type="slidenum">
+            <a:fld id="{3C7CDDB5-60EC-47E5-B05C-055C76D43C9B}" type="slidenum">
               <a:rPr lang="ru-RU" sz="1400" b="0" u="none" strike="noStrike">
                 <a:solidFill>
                   <a:srgbClr val="000000"/>
@@ -2506,29 +2462,7 @@
                 <a:uFillTx/>
                 <a:latin typeface="Arial"/>
               </a:rPr>
-              <a:t>Реализаци</a:t>
-            </a:r>
-            <a:r>
-              <a:rPr lang="ru-RU" sz="3200" b="1" u="none" strike="noStrike">
-                <a:solidFill>
-                  <a:srgbClr val="1A3A5C"/>
-                </a:solidFill>
-                <a:effectLst/>
-                <a:uFillTx/>
-                <a:latin typeface="Arial"/>
-              </a:rPr>
-              <a:t>я метода </a:t>
-            </a:r>
-            <a:r>
-              <a:rPr lang="ru-RU" sz="3200" b="1" u="none" strike="noStrike">
-                <a:solidFill>
-                  <a:srgbClr val="1A3A5C"/>
-                </a:solidFill>
-                <a:effectLst/>
-                <a:uFillTx/>
-                <a:latin typeface="Arial"/>
-              </a:rPr>
-              <a:t>Ньютона</a:t>
+              <a:t>Реализация метода Ньютона</a:t>
             </a:r>
             <a:endParaRPr lang="ru-RU" sz="3200" b="0" u="none" strike="noStrike">
               <a:solidFill>
@@ -2641,7 +2575,51 @@
                 <a:uFillTx/>
                 <a:latin typeface="Arial"/>
               </a:rPr>
-              <a:t>Демонстрация работы программы</a:t>
+              <a:t>Демонстр</a:t>
+            </a:r>
+            <a:r>
+              <a:rPr lang="ru-RU" sz="3200" b="1" u="none" strike="noStrike">
+                <a:solidFill>
+                  <a:srgbClr val="1A3A5C"/>
+                </a:solidFill>
+                <a:effectLst/>
+                <a:uFillTx/>
+                <a:latin typeface="Arial"/>
+              </a:rPr>
+              <a:t>ация </a:t>
+            </a:r>
+            <a:r>
+              <a:rPr lang="ru-RU" sz="3200" b="1" u="none" strike="noStrike">
+                <a:solidFill>
+                  <a:srgbClr val="1A3A5C"/>
+                </a:solidFill>
+                <a:effectLst/>
+                <a:uFillTx/>
+                <a:latin typeface="Arial"/>
+              </a:rPr>
+              <a:t>работы </a:t>
+            </a:r>
+            <a:r>
+              <a:rPr lang="ru-RU" sz="3200" b="1" u="none" strike="noStrike">
+                <a:solidFill>
+                  <a:srgbClr val="1A3A5C"/>
+                </a:solidFill>
+                <a:effectLst/>
+                <a:uFillTx/>
+                <a:latin typeface="Arial"/>
+              </a:rPr>
+              <a:t>программ</a:t>
+            </a:r>
+            <a:r>
+              <a:rPr lang="ru-RU" sz="3200" b="1" u="none" strike="noStrike">
+                <a:solidFill>
+                  <a:srgbClr val="1A3A5C"/>
+                </a:solidFill>
+                <a:effectLst/>
+                <a:uFillTx/>
+                <a:latin typeface="Arial"/>
+              </a:rPr>
+              <a:t>ы</a:t>
             </a:r>
             <a:endParaRPr lang="ru-RU" sz="3200" b="0" u="none" strike="noStrike">
               <a:solidFill>
@@ -7508,18 +7486,7 @@
                 <a:uFillTx/>
                 <a:latin typeface="Arial"/>
               </a:rPr>
-              <a:t>Актуальност</a:t>
-            </a:r>
-            <a:r>
-              <a:rPr lang="ru-RU" sz="3200" b="1" u="none" strike="noStrike">
-                <a:solidFill>
-                  <a:srgbClr val="1A3A5C"/>
-                </a:solidFill>
-                <a:effectLst/>
-                <a:uFillTx/>
-                <a:latin typeface="Arial"/>
-              </a:rPr>
-              <a:t>ь</a:t>
+              <a:t>Актуальность</a:t>
             </a:r>
             <a:r>
               <a:rPr lang="ru-RU" sz="2800" b="1" u="none" strike="noStrike">
@@ -7822,7 +7789,6 @@
               <a:buClr>
                 <a:srgbClr val="000000"/>
               </a:buClr>
-              <a:buSzPct val="45000"/>
               <a:buFont typeface="Wingdings" charset="2"/>
               <a:buAutoNum type="arabicPeriod"/>
               <a:tabLst>
@@ -7863,7 +7829,6 @@
               <a:buClr>
                 <a:srgbClr val="000000"/>
               </a:buClr>
-              <a:buSzPct val="45000"/>
               <a:buFont typeface="Wingdings" charset="2"/>
               <a:buAutoNum type="arabicPeriod"/>
               <a:tabLst>
@@ -7904,7 +7869,6 @@
               <a:buClr>
                 <a:srgbClr val="000000"/>
               </a:buClr>
-              <a:buSzPct val="45000"/>
               <a:buFont typeface="Wingdings" charset="2"/>
               <a:buAutoNum type="arabicPeriod"/>
               <a:tabLst>
@@ -7945,7 +7909,6 @@
               <a:buClr>
                 <a:srgbClr val="000000"/>
               </a:buClr>
-              <a:buSzPct val="45000"/>
               <a:buFont typeface="Wingdings" charset="2"/>
               <a:buAutoNum type="arabicPeriod"/>
               <a:tabLst>
@@ -7986,7 +7949,6 @@
               <a:buClr>
                 <a:srgbClr val="000000"/>
               </a:buClr>
-              <a:buSzPct val="45000"/>
               <a:buFont typeface="Wingdings" charset="2"/>
               <a:buAutoNum type="arabicPeriod"/>
               <a:tabLst>
@@ -8027,7 +7989,6 @@
               <a:buClr>
                 <a:srgbClr val="000000"/>
               </a:buClr>
-              <a:buSzPct val="45000"/>
               <a:buFont typeface="Wingdings" charset="2"/>
               <a:buAutoNum type="arabicPeriod"/>
               <a:tabLst>
@@ -9351,29 +9312,7 @@
                 <a:uFillTx/>
                 <a:latin typeface="Arial"/>
               </a:rPr>
-              <a:t>Реализация </a:t>
-            </a:r>
-            <a:r>
-              <a:rPr lang="ru-RU" sz="3200" b="1" u="none" strike="noStrike">
-                <a:solidFill>
-                  <a:srgbClr val="1A3A5C"/>
-                </a:solidFill>
-                <a:effectLst/>
-                <a:uFillTx/>
-                <a:latin typeface="Arial"/>
-              </a:rPr>
-              <a:t>метода </a:t>
-            </a:r>
-            <a:r>
-              <a:rPr lang="ru-RU" sz="3200" b="1" u="none" strike="noStrike">
-                <a:solidFill>
-                  <a:srgbClr val="1A3A5C"/>
-                </a:solidFill>
-                <a:effectLst/>
-                <a:uFillTx/>
-                <a:latin typeface="Arial"/>
-              </a:rPr>
-              <a:t>бисекции</a:t>
+              <a:t>Реализация метода бисекции</a:t>
             </a:r>
             <a:endParaRPr lang="ru-RU" sz="3200" b="0" u="none" strike="noStrike">
               <a:solidFill>

--- a/Презентация по проекту.pptx
+++ b/Презентация по проекту.pptx
@@ -116,7 +116,51 @@
                 <a:uFillTx/>
                 <a:latin typeface="Arial"/>
               </a:rPr>
-              <a:t>Для правки текста заглавия щёлкните мышью</a:t>
+              <a:t>Для правки </a:t>
+            </a:r>
+            <a:r>
+              <a:rPr lang="ru-RU" sz="3200" b="0" u="none" strike="noStrike">
+                <a:solidFill>
+                  <a:srgbClr val="1A3A5C"/>
+                </a:solidFill>
+                <a:effectLst/>
+                <a:uFillTx/>
+                <a:latin typeface="Arial"/>
+              </a:rPr>
+              <a:t>текста </a:t>
+            </a:r>
+            <a:r>
+              <a:rPr lang="ru-RU" sz="3200" b="0" u="none" strike="noStrike">
+                <a:solidFill>
+                  <a:srgbClr val="1A3A5C"/>
+                </a:solidFill>
+                <a:effectLst/>
+                <a:uFillTx/>
+                <a:latin typeface="Arial"/>
+              </a:rPr>
+              <a:t>заглавия </a:t>
+            </a:r>
+            <a:r>
+              <a:rPr lang="ru-RU" sz="3200" b="0" u="none" strike="noStrike">
+                <a:solidFill>
+                  <a:srgbClr val="1A3A5C"/>
+                </a:solidFill>
+                <a:effectLst/>
+                <a:uFillTx/>
+                <a:latin typeface="Arial"/>
+              </a:rPr>
+              <a:t>щёлкните </a:t>
+            </a:r>
+            <a:r>
+              <a:rPr lang="ru-RU" sz="3200" b="0" u="none" strike="noStrike">
+                <a:solidFill>
+                  <a:srgbClr val="1A3A5C"/>
+                </a:solidFill>
+                <a:effectLst/>
+                <a:uFillTx/>
+                <a:latin typeface="Arial"/>
+              </a:rPr>
+              <a:t>мышью</a:t>
             </a:r>
             <a:endParaRPr lang="ru-RU" sz="3200" b="0" u="none" strike="noStrike">
               <a:solidFill>
@@ -693,7 +737,7 @@
                 <a:tab pos="0" algn="l"/>
               </a:tabLst>
             </a:pPr>
-            <a:fld id="{3F6910FE-42F3-4A9F-99AA-35A23EE15791}" type="slidenum">
+            <a:fld id="{9CBC2B63-8051-4291-92C2-AA54D5E4E0C4}" type="slidenum">
               <a:rPr lang="ru-RU" sz="1400" b="0" u="none" strike="noStrike">
                 <a:solidFill>
                   <a:srgbClr val="000000"/>
@@ -1078,7 +1122,7 @@
                 <a:tab pos="0" algn="l"/>
               </a:tabLst>
             </a:pPr>
-            <a:fld id="{3C7CDDB5-60EC-47E5-B05C-055C76D43C9B}" type="slidenum">
+            <a:fld id="{77555690-103D-4F81-BB60-E48D93E6ECCC}" type="slidenum">
               <a:rPr lang="ru-RU" sz="1400" b="0" u="none" strike="noStrike">
                 <a:solidFill>
                   <a:srgbClr val="000000"/>
@@ -1703,7 +1747,7 @@
                 <a:uFillTx/>
                 <a:latin typeface="Arial"/>
               </a:rPr>
-              <a:t>Сравнение </a:t>
+              <a:t>Сравнени</a:t>
             </a:r>
             <a:r>
               <a:rPr lang="ru-RU" sz="3200" b="1" u="none" strike="noStrike">
@@ -1714,7 +1758,7 @@
                 <a:uFillTx/>
                 <a:latin typeface="Arial"/>
               </a:rPr>
-              <a:t>численных </a:t>
+              <a:t>е </a:t>
             </a:r>
             <a:r>
               <a:rPr lang="ru-RU" sz="3200" b="1" u="none" strike="noStrike">
@@ -1725,7 +1769,18 @@
                 <a:uFillTx/>
                 <a:latin typeface="Arial"/>
               </a:rPr>
-              <a:t>методов</a:t>
+              <a:t>численны</a:t>
+            </a:r>
+            <a:r>
+              <a:rPr lang="ru-RU" sz="3200" b="1" u="none" strike="noStrike">
+                <a:solidFill>
+                  <a:srgbClr val="1A3A5C"/>
+                </a:solidFill>
+                <a:effectLst/>
+                <a:uFillTx/>
+                <a:latin typeface="Arial"/>
+              </a:rPr>
+              <a:t>х методов</a:t>
             </a:r>
             <a:br>
               <a:rPr sz="3200"/>
@@ -1812,29 +1867,7 @@
                 <a:uFillTx/>
                 <a:latin typeface="Arial"/>
               </a:rPr>
-              <a:t>Выполнил: ученик 10Б </a:t>
-            </a:r>
-            <a:r>
-              <a:rPr lang="ru-RU" sz="2000" b="0" u="none" strike="noStrike">
-                <a:solidFill>
-                  <a:srgbClr val="2D2D2D"/>
-                </a:solidFill>
-                <a:effectLst/>
-                <a:uFillTx/>
-                <a:latin typeface="Arial"/>
-              </a:rPr>
-              <a:t>класса Субботин </a:t>
-            </a:r>
-            <a:r>
-              <a:rPr lang="ru-RU" sz="2000" b="0" u="none" strike="noStrike">
-                <a:solidFill>
-                  <a:srgbClr val="2D2D2D"/>
-                </a:solidFill>
-                <a:effectLst/>
-                <a:uFillTx/>
-                <a:latin typeface="Arial"/>
-              </a:rPr>
-              <a:t>Матвей Денисович</a:t>
+              <a:t>Выполнил: ученик 10Б класса Субботин Матвей Денисович</a:t>
             </a:r>
             <a:endParaRPr lang="ru-RU" sz="2000" b="0" u="none" strike="noStrike">
               <a:solidFill>
@@ -1889,40 +1922,7 @@
                 <a:uFillTx/>
                 <a:latin typeface="Arial"/>
               </a:rPr>
-              <a:t>Руководитель: учитель </a:t>
-            </a:r>
-            <a:r>
-              <a:rPr lang="ru-RU" sz="2000" b="0" u="none" strike="noStrike">
-                <a:solidFill>
-                  <a:srgbClr val="2D2D2D"/>
-                </a:solidFill>
-                <a:effectLst/>
-                <a:uFillTx/>
-                <a:latin typeface="Arial"/>
-              </a:rPr>
-              <a:t>информатики Филатов </a:t>
-            </a:r>
-            <a:r>
-              <a:rPr lang="ru-RU" sz="2000" b="0" u="none" strike="noStrike">
-                <a:solidFill>
-                  <a:srgbClr val="2D2D2D"/>
-                </a:solidFill>
-                <a:effectLst/>
-                <a:uFillTx/>
-                <a:latin typeface="Arial"/>
-              </a:rPr>
-              <a:t>Алексей </a:t>
-            </a:r>
-            <a:r>
-              <a:rPr lang="ru-RU" sz="2000" b="0" u="none" strike="noStrike">
-                <a:solidFill>
-                  <a:srgbClr val="2D2D2D"/>
-                </a:solidFill>
-                <a:effectLst/>
-                <a:uFillTx/>
-                <a:latin typeface="Arial"/>
-              </a:rPr>
-              <a:t>Александрович</a:t>
+              <a:t>Руководитель: учитель информатики Филатов Алексей Александрович</a:t>
             </a:r>
             <a:endParaRPr lang="ru-RU" sz="2000" b="0" u="none" strike="noStrike">
               <a:solidFill>
@@ -2154,7 +2154,40 @@
                 <a:uFillTx/>
                 <a:latin typeface="Arial"/>
               </a:rPr>
-              <a:t>Метод Ньютона (касательных)</a:t>
+              <a:t>Метод </a:t>
+            </a:r>
+            <a:r>
+              <a:rPr lang="ru-RU" sz="3200" b="1" u="none" strike="noStrike">
+                <a:solidFill>
+                  <a:srgbClr val="1A3A5C"/>
+                </a:solidFill>
+                <a:effectLst/>
+                <a:uFillTx/>
+                <a:latin typeface="Arial"/>
+              </a:rPr>
+              <a:t>Ньютона </a:t>
+            </a:r>
+            <a:r>
+              <a:rPr lang="ru-RU" sz="3200" b="1" u="none" strike="noStrike">
+                <a:solidFill>
+                  <a:srgbClr val="1A3A5C"/>
+                </a:solidFill>
+                <a:effectLst/>
+                <a:uFillTx/>
+                <a:latin typeface="Arial"/>
+              </a:rPr>
+              <a:t>(касательны</a:t>
+            </a:r>
+            <a:r>
+              <a:rPr lang="ru-RU" sz="3200" b="1" u="none" strike="noStrike">
+                <a:solidFill>
+                  <a:srgbClr val="1A3A5C"/>
+                </a:solidFill>
+                <a:effectLst/>
+                <a:uFillTx/>
+                <a:latin typeface="Arial"/>
+              </a:rPr>
+              <a:t>х)</a:t>
             </a:r>
             <a:endParaRPr lang="ru-RU" sz="3200" b="0" u="none" strike="noStrike">
               <a:solidFill>
@@ -2462,7 +2495,29 @@
                 <a:uFillTx/>
                 <a:latin typeface="Arial"/>
               </a:rPr>
-              <a:t>Реализация метода Ньютона</a:t>
+              <a:t>Реализаци</a:t>
+            </a:r>
+            <a:r>
+              <a:rPr lang="ru-RU" sz="3200" b="1" u="none" strike="noStrike">
+                <a:solidFill>
+                  <a:srgbClr val="1A3A5C"/>
+                </a:solidFill>
+                <a:effectLst/>
+                <a:uFillTx/>
+                <a:latin typeface="Arial"/>
+              </a:rPr>
+              <a:t>я метода </a:t>
+            </a:r>
+            <a:r>
+              <a:rPr lang="ru-RU" sz="3200" b="1" u="none" strike="noStrike">
+                <a:solidFill>
+                  <a:srgbClr val="1A3A5C"/>
+                </a:solidFill>
+                <a:effectLst/>
+                <a:uFillTx/>
+                <a:latin typeface="Arial"/>
+              </a:rPr>
+              <a:t>Ньютона</a:t>
             </a:r>
             <a:endParaRPr lang="ru-RU" sz="3200" b="0" u="none" strike="noStrike">
               <a:solidFill>
@@ -2575,51 +2630,7 @@
                 <a:uFillTx/>
                 <a:latin typeface="Arial"/>
               </a:rPr>
-              <a:t>Демонстр</a:t>
-            </a:r>
-            <a:r>
-              <a:rPr lang="ru-RU" sz="3200" b="1" u="none" strike="noStrike">
-                <a:solidFill>
-                  <a:srgbClr val="1A3A5C"/>
-                </a:solidFill>
-                <a:effectLst/>
-                <a:uFillTx/>
-                <a:latin typeface="Arial"/>
-              </a:rPr>
-              <a:t>ация </a:t>
-            </a:r>
-            <a:r>
-              <a:rPr lang="ru-RU" sz="3200" b="1" u="none" strike="noStrike">
-                <a:solidFill>
-                  <a:srgbClr val="1A3A5C"/>
-                </a:solidFill>
-                <a:effectLst/>
-                <a:uFillTx/>
-                <a:latin typeface="Arial"/>
-              </a:rPr>
-              <a:t>работы </a:t>
-            </a:r>
-            <a:r>
-              <a:rPr lang="ru-RU" sz="3200" b="1" u="none" strike="noStrike">
-                <a:solidFill>
-                  <a:srgbClr val="1A3A5C"/>
-                </a:solidFill>
-                <a:effectLst/>
-                <a:uFillTx/>
-                <a:latin typeface="Arial"/>
-              </a:rPr>
-              <a:t>программ</a:t>
-            </a:r>
-            <a:r>
-              <a:rPr lang="ru-RU" sz="3200" b="1" u="none" strike="noStrike">
-                <a:solidFill>
-                  <a:srgbClr val="1A3A5C"/>
-                </a:solidFill>
-                <a:effectLst/>
-                <a:uFillTx/>
-                <a:latin typeface="Arial"/>
-              </a:rPr>
-              <a:t>ы</a:t>
+              <a:t>Демонстрация работы программы</a:t>
             </a:r>
             <a:endParaRPr lang="ru-RU" sz="3200" b="0" u="none" strike="noStrike">
               <a:solidFill>
@@ -2803,7 +2814,43 @@
                 <a:latin typeface="Arial"/>
                 <a:ea typeface="DejaVu Sans"/>
               </a:rPr>
-              <a:t>Пример работы программы: решение уравнения x² − 2 = 0 методом Ньютона</a:t>
+              <a:t>Пример работы </a:t>
+            </a:r>
+            <a:r>
+              <a:rPr lang="ru-RU" sz="1800" b="0" u="none" strike="noStrike">
+                <a:solidFill>
+                  <a:srgbClr val="000000"/>
+                </a:solidFill>
+                <a:effectLst/>
+                <a:uFillTx/>
+                <a:latin typeface="Arial"/>
+                <a:ea typeface="DejaVu Sans"/>
+              </a:rPr>
+              <a:t>программы: решение </a:t>
+            </a:r>
+            <a:r>
+              <a:rPr lang="ru-RU" sz="1800" b="0" u="none" strike="noStrike">
+                <a:solidFill>
+                  <a:srgbClr val="000000"/>
+                </a:solidFill>
+                <a:effectLst/>
+                <a:uFillTx/>
+                <a:latin typeface="Arial"/>
+                <a:ea typeface="DejaVu Sans"/>
+              </a:rPr>
+              <a:t>уравнения x² − 2 = 0 </a:t>
+            </a:r>
+            <a:r>
+              <a:rPr lang="ru-RU" sz="1800" b="0" u="none" strike="noStrike">
+                <a:solidFill>
+                  <a:srgbClr val="000000"/>
+                </a:solidFill>
+                <a:effectLst/>
+                <a:uFillTx/>
+                <a:latin typeface="Arial"/>
+                <a:ea typeface="DejaVu Sans"/>
+              </a:rPr>
+              <a:t>методом Ньютона</a:t>
             </a:r>
             <a:endParaRPr lang="ru-RU" sz="1800" b="0" u="none" strike="noStrike">
               <a:solidFill>
@@ -7351,7 +7398,29 @@
                 <a:uFillTx/>
                 <a:latin typeface="Arial"/>
               </a:rPr>
-              <a:t>Уравнения с тригонометрическими, показательными и логарифмическими функциями (например, sin(x) = 0.5, eˣ = 10, ln(x) = 2) также не имеют аналитического решения в элементарных функциях.</a:t>
+              <a:t>Уравнения с тригонометрическими, показательными и </a:t>
+            </a:r>
+            <a:r>
+              <a:rPr lang="ru-RU" sz="2000" b="0" u="none" strike="noStrike">
+                <a:solidFill>
+                  <a:srgbClr val="2D2D2D"/>
+                </a:solidFill>
+                <a:effectLst/>
+                <a:uFillTx/>
+                <a:latin typeface="Arial"/>
+              </a:rPr>
+              <a:t>логарифмическими функциями (например, sin(x) = 0.5, eˣ = 10, ln(x) = 2) </a:t>
+            </a:r>
+            <a:r>
+              <a:rPr lang="ru-RU" sz="2000" b="0" u="none" strike="noStrike">
+                <a:solidFill>
+                  <a:srgbClr val="2D2D2D"/>
+                </a:solidFill>
+                <a:effectLst/>
+                <a:uFillTx/>
+                <a:latin typeface="Arial"/>
+              </a:rPr>
+              <a:t>также не имеют аналитического решения в элементарных функциях.</a:t>
             </a:r>
             <a:endParaRPr lang="ru-RU" sz="2000" b="0" u="none" strike="noStrike">
               <a:solidFill>
@@ -7389,7 +7458,18 @@
                 <a:uFillTx/>
                 <a:latin typeface="Arial"/>
               </a:rPr>
-              <a:t>Такие уравнения решаются только численными методами — приближённо, с заданной точностью</a:t>
+              <a:t>Такие уравнения решаются только численными методами — </a:t>
+            </a:r>
+            <a:r>
+              <a:rPr lang="ru-RU" sz="2000" b="0" u="none" strike="noStrike">
+                <a:solidFill>
+                  <a:srgbClr val="2D2D2D"/>
+                </a:solidFill>
+                <a:effectLst/>
+                <a:uFillTx/>
+                <a:latin typeface="Arial"/>
+              </a:rPr>
+              <a:t>приближённо, с заданной точностью</a:t>
             </a:r>
             <a:endParaRPr lang="ru-RU" sz="2000" b="0" u="none" strike="noStrike">
               <a:solidFill>
@@ -7427,7 +7507,18 @@
                 <a:uFillTx/>
                 <a:latin typeface="Arial"/>
               </a:rPr>
-              <a:t>Задача: выбрать наиболее эффективный метод для конкретного случая.</a:t>
+              <a:t>Задача: выбрать наиболее эффективный метод для конкретного </a:t>
+            </a:r>
+            <a:r>
+              <a:rPr lang="ru-RU" sz="2000" b="0" u="none" strike="noStrike">
+                <a:solidFill>
+                  <a:srgbClr val="2D2D2D"/>
+                </a:solidFill>
+                <a:effectLst/>
+                <a:uFillTx/>
+                <a:latin typeface="Arial"/>
+              </a:rPr>
+              <a:t>случая.</a:t>
             </a:r>
             <a:endParaRPr lang="ru-RU" sz="2000" b="0" u="none" strike="noStrike">
               <a:solidFill>
@@ -7486,7 +7577,18 @@
                 <a:uFillTx/>
                 <a:latin typeface="Arial"/>
               </a:rPr>
-              <a:t>Актуальность</a:t>
+              <a:t>Актуальност</a:t>
+            </a:r>
+            <a:r>
+              <a:rPr lang="ru-RU" sz="3200" b="1" u="none" strike="noStrike">
+                <a:solidFill>
+                  <a:srgbClr val="1A3A5C"/>
+                </a:solidFill>
+                <a:effectLst/>
+                <a:uFillTx/>
+                <a:latin typeface="Arial"/>
+              </a:rPr>
+              <a:t>ь</a:t>
             </a:r>
             <a:r>
               <a:rPr lang="ru-RU" sz="2800" b="1" u="none" strike="noStrike">
@@ -8118,51 +8220,7 @@
                 <a:uFillTx/>
                 <a:latin typeface="Arial"/>
               </a:rPr>
-              <a:t>Объект, </a:t>
-            </a:r>
-            <a:r>
-              <a:rPr lang="ru-RU" sz="3200" b="1" u="none" strike="noStrike">
-                <a:solidFill>
-                  <a:srgbClr val="1A3A5C"/>
-                </a:solidFill>
-                <a:effectLst/>
-                <a:uFillTx/>
-                <a:latin typeface="Arial"/>
-              </a:rPr>
-              <a:t>предмет и </a:t>
-            </a:r>
-            <a:r>
-              <a:rPr lang="ru-RU" sz="3200" b="1" u="none" strike="noStrike">
-                <a:solidFill>
-                  <a:srgbClr val="1A3A5C"/>
-                </a:solidFill>
-                <a:effectLst/>
-                <a:uFillTx/>
-                <a:latin typeface="Arial"/>
-              </a:rPr>
-              <a:t>гипотеза </a:t>
-            </a:r>
-            <a:r>
-              <a:rPr lang="ru-RU" sz="3200" b="1" u="none" strike="noStrike">
-                <a:solidFill>
-                  <a:srgbClr val="1A3A5C"/>
-                </a:solidFill>
-                <a:effectLst/>
-                <a:uFillTx/>
-                <a:latin typeface="Arial"/>
-              </a:rPr>
-              <a:t>исследовани</a:t>
-            </a:r>
-            <a:r>
-              <a:rPr lang="ru-RU" sz="3200" b="1" u="none" strike="noStrike">
-                <a:solidFill>
-                  <a:srgbClr val="1A3A5C"/>
-                </a:solidFill>
-                <a:effectLst/>
-                <a:uFillTx/>
-                <a:latin typeface="Arial"/>
-              </a:rPr>
-              <a:t>я</a:t>
+              <a:t>Объект, предмет и гипотеза исследования</a:t>
             </a:r>
             <a:endParaRPr lang="ru-RU" sz="3200" b="0" u="none" strike="noStrike">
               <a:solidFill>
@@ -9312,7 +9370,29 @@
                 <a:uFillTx/>
                 <a:latin typeface="Arial"/>
               </a:rPr>
-              <a:t>Реализация метода бисекции</a:t>
+              <a:t>Реализация </a:t>
+            </a:r>
+            <a:r>
+              <a:rPr lang="ru-RU" sz="3200" b="1" u="none" strike="noStrike">
+                <a:solidFill>
+                  <a:srgbClr val="1A3A5C"/>
+                </a:solidFill>
+                <a:effectLst/>
+                <a:uFillTx/>
+                <a:latin typeface="Arial"/>
+              </a:rPr>
+              <a:t>метода </a:t>
+            </a:r>
+            <a:r>
+              <a:rPr lang="ru-RU" sz="3200" b="1" u="none" strike="noStrike">
+                <a:solidFill>
+                  <a:srgbClr val="1A3A5C"/>
+                </a:solidFill>
+                <a:effectLst/>
+                <a:uFillTx/>
+                <a:latin typeface="Arial"/>
+              </a:rPr>
+              <a:t>бисекции</a:t>
             </a:r>
             <a:endParaRPr lang="ru-RU" sz="3200" b="0" u="none" strike="noStrike">
               <a:solidFill>
@@ -9425,18 +9505,7 @@
                 <a:uFillTx/>
                 <a:latin typeface="Arial"/>
               </a:rPr>
-              <a:t>Метод хорд </a:t>
-            </a:r>
-            <a:r>
-              <a:rPr lang="ru-RU" sz="3200" b="1" u="none" strike="noStrike">
-                <a:solidFill>
-                  <a:srgbClr val="1A3A5C"/>
-                </a:solidFill>
-                <a:effectLst/>
-                <a:uFillTx/>
-                <a:latin typeface="Arial"/>
-              </a:rPr>
-              <a:t>(секущих)</a:t>
+              <a:t>Метод хорд (секущих)</a:t>
             </a:r>
             <a:endParaRPr lang="ru-RU" sz="3200" b="0" u="none" strike="noStrike">
               <a:solidFill>

--- a/Презентация по проекту.pptx
+++ b/Презентация по проекту.pptx
@@ -64,7 +64,7 @@
         <p:spPr>
           <a:xfrm>
             <a:off x="504000" y="455040"/>
-            <a:ext cx="9070920" cy="488160"/>
+            <a:ext cx="9070560" cy="488160"/>
           </a:xfrm>
           <a:prstGeom prst="rect">
             <a:avLst/>
@@ -116,51 +116,7 @@
                 <a:uFillTx/>
                 <a:latin typeface="Arial"/>
               </a:rPr>
-              <a:t>Для правки </a:t>
-            </a:r>
-            <a:r>
-              <a:rPr lang="ru-RU" sz="3200" b="0" u="none" strike="noStrike">
-                <a:solidFill>
-                  <a:srgbClr val="1A3A5C"/>
-                </a:solidFill>
-                <a:effectLst/>
-                <a:uFillTx/>
-                <a:latin typeface="Arial"/>
-              </a:rPr>
-              <a:t>текста </a:t>
-            </a:r>
-            <a:r>
-              <a:rPr lang="ru-RU" sz="3200" b="0" u="none" strike="noStrike">
-                <a:solidFill>
-                  <a:srgbClr val="1A3A5C"/>
-                </a:solidFill>
-                <a:effectLst/>
-                <a:uFillTx/>
-                <a:latin typeface="Arial"/>
-              </a:rPr>
-              <a:t>заглавия </a:t>
-            </a:r>
-            <a:r>
-              <a:rPr lang="ru-RU" sz="3200" b="0" u="none" strike="noStrike">
-                <a:solidFill>
-                  <a:srgbClr val="1A3A5C"/>
-                </a:solidFill>
-                <a:effectLst/>
-                <a:uFillTx/>
-                <a:latin typeface="Arial"/>
-              </a:rPr>
-              <a:t>щёлкните </a:t>
-            </a:r>
-            <a:r>
-              <a:rPr lang="ru-RU" sz="3200" b="0" u="none" strike="noStrike">
-                <a:solidFill>
-                  <a:srgbClr val="1A3A5C"/>
-                </a:solidFill>
-                <a:effectLst/>
-                <a:uFillTx/>
-                <a:latin typeface="Arial"/>
-              </a:rPr>
-              <a:t>мышью</a:t>
+              <a:t>Для правки текста заглавия щёлкните мышью</a:t>
             </a:r>
             <a:endParaRPr lang="ru-RU" sz="3200" b="0" u="none" strike="noStrike">
               <a:solidFill>
@@ -186,7 +142,7 @@
         <p:spPr>
           <a:xfrm>
             <a:off x="504000" y="1326600"/>
-            <a:ext cx="9070920" cy="3287520"/>
+            <a:ext cx="9070560" cy="3287160"/>
           </a:xfrm>
           <a:prstGeom prst="rect">
             <a:avLst/>
@@ -616,7 +572,7 @@
         <p:spPr>
           <a:xfrm>
             <a:off x="3447360" y="5165280"/>
-            <a:ext cx="3194280" cy="389880"/>
+            <a:ext cx="3193920" cy="389520"/>
           </a:xfrm>
           <a:prstGeom prst="rect">
             <a:avLst/>
@@ -694,7 +650,7 @@
         <p:spPr>
           <a:xfrm>
             <a:off x="7227360" y="5165280"/>
-            <a:ext cx="2347560" cy="389880"/>
+            <a:ext cx="2347200" cy="389520"/>
           </a:xfrm>
           <a:prstGeom prst="rect">
             <a:avLst/>
@@ -737,7 +693,7 @@
                 <a:tab pos="0" algn="l"/>
               </a:tabLst>
             </a:pPr>
-            <a:fld id="{9CBC2B63-8051-4291-92C2-AA54D5E4E0C4}" type="slidenum">
+            <a:fld id="{F857A394-7965-421E-A807-981F6C6B0129}" type="slidenum">
               <a:rPr lang="ru-RU" sz="1400" b="0" u="none" strike="noStrike">
                 <a:solidFill>
                   <a:srgbClr val="000000"/>
@@ -772,7 +728,7 @@
         <p:spPr>
           <a:xfrm>
             <a:off x="504000" y="5165280"/>
-            <a:ext cx="2347560" cy="389880"/>
+            <a:ext cx="2347200" cy="389520"/>
           </a:xfrm>
           <a:prstGeom prst="rect">
             <a:avLst/>
@@ -879,7 +835,7 @@
         <p:spPr>
           <a:xfrm>
             <a:off x="504000" y="455040"/>
-            <a:ext cx="9070920" cy="488160"/>
+            <a:ext cx="9070560" cy="488160"/>
           </a:xfrm>
           <a:prstGeom prst="rect">
             <a:avLst/>
@@ -931,51 +887,7 @@
                 <a:uFillTx/>
                 <a:latin typeface="Arial"/>
               </a:rPr>
-              <a:t>Для правки </a:t>
-            </a:r>
-            <a:r>
-              <a:rPr lang="ru-RU" sz="3200" b="0" u="none" strike="noStrike">
-                <a:solidFill>
-                  <a:srgbClr val="1A3A5C"/>
-                </a:solidFill>
-                <a:effectLst/>
-                <a:uFillTx/>
-                <a:latin typeface="Arial"/>
-              </a:rPr>
-              <a:t>текста </a:t>
-            </a:r>
-            <a:r>
-              <a:rPr lang="ru-RU" sz="3200" b="0" u="none" strike="noStrike">
-                <a:solidFill>
-                  <a:srgbClr val="1A3A5C"/>
-                </a:solidFill>
-                <a:effectLst/>
-                <a:uFillTx/>
-                <a:latin typeface="Arial"/>
-              </a:rPr>
-              <a:t>заглавия </a:t>
-            </a:r>
-            <a:r>
-              <a:rPr lang="ru-RU" sz="3200" b="0" u="none" strike="noStrike">
-                <a:solidFill>
-                  <a:srgbClr val="1A3A5C"/>
-                </a:solidFill>
-                <a:effectLst/>
-                <a:uFillTx/>
-                <a:latin typeface="Arial"/>
-              </a:rPr>
-              <a:t>щёлкните </a:t>
-            </a:r>
-            <a:r>
-              <a:rPr lang="ru-RU" sz="3200" b="0" u="none" strike="noStrike">
-                <a:solidFill>
-                  <a:srgbClr val="1A3A5C"/>
-                </a:solidFill>
-                <a:effectLst/>
-                <a:uFillTx/>
-                <a:latin typeface="Arial"/>
-              </a:rPr>
-              <a:t>мышью</a:t>
+              <a:t>Для правки текста заглавия щёлкните мышью</a:t>
             </a:r>
             <a:endParaRPr lang="ru-RU" sz="3200" b="0" u="none" strike="noStrike">
               <a:solidFill>
@@ -1001,7 +913,7 @@
         <p:spPr>
           <a:xfrm>
             <a:off x="3447360" y="5165280"/>
-            <a:ext cx="3194280" cy="389880"/>
+            <a:ext cx="3193920" cy="389520"/>
           </a:xfrm>
           <a:prstGeom prst="rect">
             <a:avLst/>
@@ -1079,7 +991,7 @@
         <p:spPr>
           <a:xfrm>
             <a:off x="7227360" y="5165280"/>
-            <a:ext cx="2347560" cy="389880"/>
+            <a:ext cx="2347200" cy="389520"/>
           </a:xfrm>
           <a:prstGeom prst="rect">
             <a:avLst/>
@@ -1122,7 +1034,7 @@
                 <a:tab pos="0" algn="l"/>
               </a:tabLst>
             </a:pPr>
-            <a:fld id="{77555690-103D-4F81-BB60-E48D93E6ECCC}" type="slidenum">
+            <a:fld id="{186EE2E9-29AD-46A7-9894-B4666F6F92F1}" type="slidenum">
               <a:rPr lang="ru-RU" sz="1400" b="0" u="none" strike="noStrike">
                 <a:solidFill>
                   <a:srgbClr val="000000"/>
@@ -1157,7 +1069,7 @@
         <p:spPr>
           <a:xfrm>
             <a:off x="504000" y="5165280"/>
-            <a:ext cx="2347560" cy="389880"/>
+            <a:ext cx="2347200" cy="389520"/>
           </a:xfrm>
           <a:prstGeom prst="rect">
             <a:avLst/>
@@ -1235,7 +1147,7 @@
         <p:spPr>
           <a:xfrm>
             <a:off x="504000" y="1326600"/>
-            <a:ext cx="9071640" cy="3288240"/>
+            <a:ext cx="9071280" cy="3287880"/>
           </a:xfrm>
           <a:prstGeom prst="rect">
             <a:avLst/>
@@ -1713,8 +1625,8 @@
         </p:nvSpPr>
         <p:spPr>
           <a:xfrm>
-            <a:off x="540000" y="1572840"/>
-            <a:ext cx="9070920" cy="947160"/>
+            <a:off x="540000" y="1572480"/>
+            <a:ext cx="9070560" cy="947520"/>
           </a:xfrm>
           <a:prstGeom prst="rect">
             <a:avLst/>
@@ -1747,40 +1659,7 @@
                 <a:uFillTx/>
                 <a:latin typeface="Arial"/>
               </a:rPr>
-              <a:t>Сравнени</a:t>
-            </a:r>
-            <a:r>
-              <a:rPr lang="ru-RU" sz="3200" b="1" u="none" strike="noStrike">
-                <a:solidFill>
-                  <a:srgbClr val="1A3A5C"/>
-                </a:solidFill>
-                <a:effectLst/>
-                <a:uFillTx/>
-                <a:latin typeface="Arial"/>
-              </a:rPr>
-              <a:t>е </a:t>
-            </a:r>
-            <a:r>
-              <a:rPr lang="ru-RU" sz="3200" b="1" u="none" strike="noStrike">
-                <a:solidFill>
-                  <a:srgbClr val="1A3A5C"/>
-                </a:solidFill>
-                <a:effectLst/>
-                <a:uFillTx/>
-                <a:latin typeface="Arial"/>
-              </a:rPr>
-              <a:t>численны</a:t>
-            </a:r>
-            <a:r>
-              <a:rPr lang="ru-RU" sz="3200" b="1" u="none" strike="noStrike">
-                <a:solidFill>
-                  <a:srgbClr val="1A3A5C"/>
-                </a:solidFill>
-                <a:effectLst/>
-                <a:uFillTx/>
-                <a:latin typeface="Arial"/>
-              </a:rPr>
-              <a:t>х методов</a:t>
+              <a:t>Сравнение численных методов</a:t>
             </a:r>
             <a:br>
               <a:rPr sz="3200"/>
@@ -1794,18 +1673,7 @@
                 <a:uFillTx/>
                 <a:latin typeface="Arial"/>
               </a:rPr>
-              <a:t>решения </a:t>
-            </a:r>
-            <a:r>
-              <a:rPr lang="ru-RU" sz="3200" b="1" u="none" strike="noStrike">
-                <a:solidFill>
-                  <a:srgbClr val="1A3A5C"/>
-                </a:solidFill>
-                <a:effectLst/>
-                <a:uFillTx/>
-                <a:latin typeface="Arial"/>
-              </a:rPr>
-              <a:t>уравнений</a:t>
+              <a:t>решения уравнений</a:t>
             </a:r>
             <a:endParaRPr lang="ru-RU" sz="3200" b="0" u="none" strike="noStrike">
               <a:solidFill>
@@ -1831,7 +1699,7 @@
         <p:spPr>
           <a:xfrm>
             <a:off x="540000" y="3024720"/>
-            <a:ext cx="9070920" cy="2386800"/>
+            <a:ext cx="9070560" cy="2387160"/>
           </a:xfrm>
           <a:prstGeom prst="rect">
             <a:avLst/>
@@ -2120,8 +1988,8 @@
         </p:nvSpPr>
         <p:spPr>
           <a:xfrm>
-            <a:off x="504000" y="-360"/>
-            <a:ext cx="9070920" cy="947160"/>
+            <a:off x="504000" y="-720"/>
+            <a:ext cx="9070560" cy="947520"/>
           </a:xfrm>
           <a:prstGeom prst="rect">
             <a:avLst/>
@@ -2154,40 +2022,7 @@
                 <a:uFillTx/>
                 <a:latin typeface="Arial"/>
               </a:rPr>
-              <a:t>Метод </a:t>
-            </a:r>
-            <a:r>
-              <a:rPr lang="ru-RU" sz="3200" b="1" u="none" strike="noStrike">
-                <a:solidFill>
-                  <a:srgbClr val="1A3A5C"/>
-                </a:solidFill>
-                <a:effectLst/>
-                <a:uFillTx/>
-                <a:latin typeface="Arial"/>
-              </a:rPr>
-              <a:t>Ньютона </a:t>
-            </a:r>
-            <a:r>
-              <a:rPr lang="ru-RU" sz="3200" b="1" u="none" strike="noStrike">
-                <a:solidFill>
-                  <a:srgbClr val="1A3A5C"/>
-                </a:solidFill>
-                <a:effectLst/>
-                <a:uFillTx/>
-                <a:latin typeface="Arial"/>
-              </a:rPr>
-              <a:t>(касательны</a:t>
-            </a:r>
-            <a:r>
-              <a:rPr lang="ru-RU" sz="3200" b="1" u="none" strike="noStrike">
-                <a:solidFill>
-                  <a:srgbClr val="1A3A5C"/>
-                </a:solidFill>
-                <a:effectLst/>
-                <a:uFillTx/>
-                <a:latin typeface="Arial"/>
-              </a:rPr>
-              <a:t>х)</a:t>
+              <a:t>Метод Ньютона (касательных)</a:t>
             </a:r>
             <a:endParaRPr lang="ru-RU" sz="3200" b="0" u="none" strike="noStrike">
               <a:solidFill>
@@ -2213,7 +2048,7 @@
         <p:spPr>
           <a:xfrm>
             <a:off x="288360" y="946800"/>
-            <a:ext cx="9286560" cy="3287520"/>
+            <a:ext cx="9286200" cy="3287160"/>
           </a:xfrm>
           <a:prstGeom prst="rect">
             <a:avLst/>
@@ -2408,7 +2243,7 @@
         <p:spPr>
           <a:xfrm>
             <a:off x="1344600" y="2716560"/>
-            <a:ext cx="4160160" cy="2703600"/>
+            <a:ext cx="4159800" cy="2703240"/>
           </a:xfrm>
           <a:prstGeom prst="rect">
             <a:avLst/>
@@ -2461,8 +2296,8 @@
         </p:nvSpPr>
         <p:spPr>
           <a:xfrm>
-            <a:off x="504000" y="225360"/>
-            <a:ext cx="9070920" cy="947160"/>
+            <a:off x="504000" y="225000"/>
+            <a:ext cx="9070560" cy="947520"/>
           </a:xfrm>
           <a:prstGeom prst="rect">
             <a:avLst/>
@@ -2495,29 +2330,7 @@
                 <a:uFillTx/>
                 <a:latin typeface="Arial"/>
               </a:rPr>
-              <a:t>Реализаци</a:t>
-            </a:r>
-            <a:r>
-              <a:rPr lang="ru-RU" sz="3200" b="1" u="none" strike="noStrike">
-                <a:solidFill>
-                  <a:srgbClr val="1A3A5C"/>
-                </a:solidFill>
-                <a:effectLst/>
-                <a:uFillTx/>
-                <a:latin typeface="Arial"/>
-              </a:rPr>
-              <a:t>я метода </a:t>
-            </a:r>
-            <a:r>
-              <a:rPr lang="ru-RU" sz="3200" b="1" u="none" strike="noStrike">
-                <a:solidFill>
-                  <a:srgbClr val="1A3A5C"/>
-                </a:solidFill>
-                <a:effectLst/>
-                <a:uFillTx/>
-                <a:latin typeface="Arial"/>
-              </a:rPr>
-              <a:t>Ньютона</a:t>
+              <a:t>Реализация метода Ньютона</a:t>
             </a:r>
             <a:endParaRPr lang="ru-RU" sz="3200" b="0" u="none" strike="noStrike">
               <a:solidFill>
@@ -2543,7 +2356,7 @@
         <p:spPr>
           <a:xfrm>
             <a:off x="286920" y="1210320"/>
-            <a:ext cx="9499320" cy="4288320"/>
+            <a:ext cx="9498960" cy="4287960"/>
           </a:xfrm>
           <a:prstGeom prst="rect">
             <a:avLst/>
@@ -2596,8 +2409,8 @@
         </p:nvSpPr>
         <p:spPr>
           <a:xfrm>
-            <a:off x="504000" y="-145440"/>
-            <a:ext cx="9070920" cy="947160"/>
+            <a:off x="504000" y="-145800"/>
+            <a:ext cx="9070560" cy="947520"/>
           </a:xfrm>
           <a:prstGeom prst="rect">
             <a:avLst/>
@@ -2656,7 +2469,7 @@
         <p:spPr>
           <a:xfrm>
             <a:off x="504000" y="702360"/>
-            <a:ext cx="2721960" cy="1933560"/>
+            <a:ext cx="2721600" cy="1933200"/>
           </a:xfrm>
           <a:prstGeom prst="rect">
             <a:avLst/>
@@ -2680,7 +2493,7 @@
         <p:spPr>
           <a:xfrm>
             <a:off x="3688920" y="702360"/>
-            <a:ext cx="2552040" cy="1925280"/>
+            <a:ext cx="2551680" cy="1924920"/>
           </a:xfrm>
           <a:prstGeom prst="rect">
             <a:avLst/>
@@ -2704,7 +2517,7 @@
         <p:spPr>
           <a:xfrm>
             <a:off x="784440" y="2793240"/>
-            <a:ext cx="4138560" cy="2327760"/>
+            <a:ext cx="4138200" cy="2327400"/>
           </a:xfrm>
           <a:prstGeom prst="rect">
             <a:avLst/>
@@ -2728,7 +2541,7 @@
         <p:spPr>
           <a:xfrm>
             <a:off x="5287680" y="2792880"/>
-            <a:ext cx="3994560" cy="2328120"/>
+            <a:ext cx="3994200" cy="2327760"/>
           </a:xfrm>
           <a:prstGeom prst="rect">
             <a:avLst/>
@@ -2752,7 +2565,7 @@
         <p:spPr>
           <a:xfrm>
             <a:off x="6693120" y="702360"/>
-            <a:ext cx="2881800" cy="1920960"/>
+            <a:ext cx="2881440" cy="1920600"/>
           </a:xfrm>
           <a:prstGeom prst="rect">
             <a:avLst/>
@@ -2772,7 +2585,7 @@
         <p:spPr>
           <a:xfrm>
             <a:off x="718560" y="5269680"/>
-            <a:ext cx="8771040" cy="601560"/>
+            <a:ext cx="8770680" cy="601200"/>
           </a:xfrm>
           <a:prstGeom prst="rect">
             <a:avLst/>
@@ -2814,43 +2627,7 @@
                 <a:latin typeface="Arial"/>
                 <a:ea typeface="DejaVu Sans"/>
               </a:rPr>
-              <a:t>Пример работы </a:t>
-            </a:r>
-            <a:r>
-              <a:rPr lang="ru-RU" sz="1800" b="0" u="none" strike="noStrike">
-                <a:solidFill>
-                  <a:srgbClr val="000000"/>
-                </a:solidFill>
-                <a:effectLst/>
-                <a:uFillTx/>
-                <a:latin typeface="Arial"/>
-                <a:ea typeface="DejaVu Sans"/>
-              </a:rPr>
-              <a:t>программы: решение </a:t>
-            </a:r>
-            <a:r>
-              <a:rPr lang="ru-RU" sz="1800" b="0" u="none" strike="noStrike">
-                <a:solidFill>
-                  <a:srgbClr val="000000"/>
-                </a:solidFill>
-                <a:effectLst/>
-                <a:uFillTx/>
-                <a:latin typeface="Arial"/>
-                <a:ea typeface="DejaVu Sans"/>
-              </a:rPr>
-              <a:t>уравнения x² − 2 = 0 </a:t>
-            </a:r>
-            <a:r>
-              <a:rPr lang="ru-RU" sz="1800" b="0" u="none" strike="noStrike">
-                <a:solidFill>
-                  <a:srgbClr val="000000"/>
-                </a:solidFill>
-                <a:effectLst/>
-                <a:uFillTx/>
-                <a:latin typeface="Arial"/>
-                <a:ea typeface="DejaVu Sans"/>
-              </a:rPr>
-              <a:t>методом Ньютона</a:t>
+              <a:t>Пример работы программы: решение уравнения x² − 2 = 0 методом Ньютона</a:t>
             </a:r>
             <a:endParaRPr lang="ru-RU" sz="1800" b="0" u="none" strike="noStrike">
               <a:solidFill>
@@ -2905,8 +2682,8 @@
         </p:nvSpPr>
         <p:spPr>
           <a:xfrm>
-            <a:off x="504000" y="225360"/>
-            <a:ext cx="9070920" cy="947160"/>
+            <a:off x="504000" y="225000"/>
+            <a:ext cx="9070560" cy="947520"/>
           </a:xfrm>
           <a:prstGeom prst="rect">
             <a:avLst/>
@@ -4586,8 +4363,8 @@
         </p:nvSpPr>
         <p:spPr>
           <a:xfrm>
-            <a:off x="504000" y="225360"/>
-            <a:ext cx="9070920" cy="947160"/>
+            <a:off x="504000" y="225000"/>
+            <a:ext cx="9070560" cy="947520"/>
           </a:xfrm>
           <a:prstGeom prst="rect">
             <a:avLst/>
@@ -6522,8 +6299,8 @@
         </p:nvSpPr>
         <p:spPr>
           <a:xfrm>
-            <a:off x="504000" y="225360"/>
-            <a:ext cx="9070920" cy="947160"/>
+            <a:off x="504000" y="225000"/>
+            <a:ext cx="9070560" cy="947520"/>
           </a:xfrm>
           <a:prstGeom prst="rect">
             <a:avLst/>
@@ -6582,7 +6359,7 @@
         <p:spPr>
           <a:xfrm>
             <a:off x="504000" y="1326600"/>
-            <a:ext cx="9070920" cy="3287520"/>
+            <a:ext cx="9070560" cy="3287160"/>
           </a:xfrm>
           <a:prstGeom prst="rect">
             <a:avLst/>
@@ -6938,8 +6715,8 @@
         </p:nvSpPr>
         <p:spPr>
           <a:xfrm>
-            <a:off x="504000" y="225360"/>
-            <a:ext cx="9070920" cy="947160"/>
+            <a:off x="504000" y="225000"/>
+            <a:ext cx="9070560" cy="947520"/>
           </a:xfrm>
           <a:prstGeom prst="rect">
             <a:avLst/>
@@ -6998,7 +6775,7 @@
         <p:spPr>
           <a:xfrm>
             <a:off x="504000" y="1541160"/>
-            <a:ext cx="9070920" cy="3287520"/>
+            <a:ext cx="9070560" cy="3287160"/>
           </a:xfrm>
           <a:prstGeom prst="rect">
             <a:avLst/>
@@ -7284,7 +7061,7 @@
         <p:spPr>
           <a:xfrm>
             <a:off x="360000" y="1326600"/>
-            <a:ext cx="9539280" cy="3712680"/>
+            <a:ext cx="9538920" cy="3712320"/>
           </a:xfrm>
           <a:prstGeom prst="rect">
             <a:avLst/>
@@ -7398,29 +7175,7 @@
                 <a:uFillTx/>
                 <a:latin typeface="Arial"/>
               </a:rPr>
-              <a:t>Уравнения с тригонометрическими, показательными и </a:t>
-            </a:r>
-            <a:r>
-              <a:rPr lang="ru-RU" sz="2000" b="0" u="none" strike="noStrike">
-                <a:solidFill>
-                  <a:srgbClr val="2D2D2D"/>
-                </a:solidFill>
-                <a:effectLst/>
-                <a:uFillTx/>
-                <a:latin typeface="Arial"/>
-              </a:rPr>
-              <a:t>логарифмическими функциями (например, sin(x) = 0.5, eˣ = 10, ln(x) = 2) </a:t>
-            </a:r>
-            <a:r>
-              <a:rPr lang="ru-RU" sz="2000" b="0" u="none" strike="noStrike">
-                <a:solidFill>
-                  <a:srgbClr val="2D2D2D"/>
-                </a:solidFill>
-                <a:effectLst/>
-                <a:uFillTx/>
-                <a:latin typeface="Arial"/>
-              </a:rPr>
-              <a:t>также не имеют аналитического решения в элементарных функциях.</a:t>
+              <a:t>Уравнения с тригонометрическими, показательными и логарифмическими функциями (например, sin(x) = 0.5, eˣ = 10, ln(x) = 2) также не имеют аналитического решения в элементарных функциях.</a:t>
             </a:r>
             <a:endParaRPr lang="ru-RU" sz="2000" b="0" u="none" strike="noStrike">
               <a:solidFill>
@@ -7458,18 +7213,7 @@
                 <a:uFillTx/>
                 <a:latin typeface="Arial"/>
               </a:rPr>
-              <a:t>Такие уравнения решаются только численными методами — </a:t>
-            </a:r>
-            <a:r>
-              <a:rPr lang="ru-RU" sz="2000" b="0" u="none" strike="noStrike">
-                <a:solidFill>
-                  <a:srgbClr val="2D2D2D"/>
-                </a:solidFill>
-                <a:effectLst/>
-                <a:uFillTx/>
-                <a:latin typeface="Arial"/>
-              </a:rPr>
-              <a:t>приближённо, с заданной точностью</a:t>
+              <a:t>Такие уравнения решаются только численными методами — приближённо, с заданной точностью</a:t>
             </a:r>
             <a:endParaRPr lang="ru-RU" sz="2000" b="0" u="none" strike="noStrike">
               <a:solidFill>
@@ -7507,18 +7251,7 @@
                 <a:uFillTx/>
                 <a:latin typeface="Arial"/>
               </a:rPr>
-              <a:t>Задача: выбрать наиболее эффективный метод для конкретного </a:t>
-            </a:r>
-            <a:r>
-              <a:rPr lang="ru-RU" sz="2000" b="0" u="none" strike="noStrike">
-                <a:solidFill>
-                  <a:srgbClr val="2D2D2D"/>
-                </a:solidFill>
-                <a:effectLst/>
-                <a:uFillTx/>
-                <a:latin typeface="Arial"/>
-              </a:rPr>
-              <a:t>случая.</a:t>
+              <a:t>Задача: выбрать наиболее эффективный метод для конкретного случая.</a:t>
             </a:r>
             <a:endParaRPr lang="ru-RU" sz="2000" b="0" u="none" strike="noStrike">
               <a:solidFill>
@@ -7543,8 +7276,8 @@
         </p:nvSpPr>
         <p:spPr>
           <a:xfrm>
-            <a:off x="504000" y="225360"/>
-            <a:ext cx="9070920" cy="947160"/>
+            <a:off x="504000" y="225000"/>
+            <a:ext cx="9070560" cy="947520"/>
           </a:xfrm>
           <a:prstGeom prst="rect">
             <a:avLst/>
@@ -7577,18 +7310,7 @@
                 <a:uFillTx/>
                 <a:latin typeface="Arial"/>
               </a:rPr>
-              <a:t>Актуальност</a:t>
-            </a:r>
-            <a:r>
-              <a:rPr lang="ru-RU" sz="3200" b="1" u="none" strike="noStrike">
-                <a:solidFill>
-                  <a:srgbClr val="1A3A5C"/>
-                </a:solidFill>
-                <a:effectLst/>
-                <a:uFillTx/>
-                <a:latin typeface="Arial"/>
-              </a:rPr>
-              <a:t>ь</a:t>
+              <a:t>Актуальность</a:t>
             </a:r>
             <a:r>
               <a:rPr lang="ru-RU" sz="2800" b="1" u="none" strike="noStrike">
@@ -7654,8 +7376,8 @@
         </p:nvSpPr>
         <p:spPr>
           <a:xfrm>
-            <a:off x="504000" y="225360"/>
-            <a:ext cx="9070920" cy="947160"/>
+            <a:off x="504000" y="225000"/>
+            <a:ext cx="9070560" cy="947520"/>
           </a:xfrm>
           <a:prstGeom prst="rect">
             <a:avLst/>
@@ -7688,18 +7410,7 @@
                 <a:uFillTx/>
                 <a:latin typeface="Arial"/>
               </a:rPr>
-              <a:t>Цель и </a:t>
-            </a:r>
-            <a:r>
-              <a:rPr lang="ru-RU" sz="3200" b="1" u="none" strike="noStrike">
-                <a:solidFill>
-                  <a:srgbClr val="1A3A5C"/>
-                </a:solidFill>
-                <a:effectLst/>
-                <a:uFillTx/>
-                <a:latin typeface="Arial"/>
-              </a:rPr>
-              <a:t>задачи</a:t>
+              <a:t>Цель и задачи</a:t>
             </a:r>
             <a:endParaRPr lang="ru-RU" sz="3200" b="0" u="none" strike="noStrike">
               <a:solidFill>
@@ -7725,7 +7436,7 @@
         <p:spPr>
           <a:xfrm>
             <a:off x="360000" y="1080000"/>
-            <a:ext cx="9359280" cy="4072680"/>
+            <a:ext cx="9358920" cy="4072320"/>
           </a:xfrm>
           <a:prstGeom prst="rect">
             <a:avLst/>
@@ -7892,7 +7603,7 @@
                 <a:srgbClr val="000000"/>
               </a:buClr>
               <a:buFont typeface="Wingdings" charset="2"/>
-              <a:buAutoNum type="arabicPeriod"/>
+              <a:buAutoNum type="arabicPlain"/>
               <a:tabLst>
                 <a:tab pos="0" algn="l"/>
               </a:tabLst>
@@ -7932,7 +7643,7 @@
                 <a:srgbClr val="000000"/>
               </a:buClr>
               <a:buFont typeface="Wingdings" charset="2"/>
-              <a:buAutoNum type="arabicPeriod"/>
+              <a:buAutoNum type="arabicPlain"/>
               <a:tabLst>
                 <a:tab pos="0" algn="l"/>
               </a:tabLst>
@@ -7972,7 +7683,7 @@
                 <a:srgbClr val="000000"/>
               </a:buClr>
               <a:buFont typeface="Wingdings" charset="2"/>
-              <a:buAutoNum type="arabicPeriod"/>
+              <a:buAutoNum type="arabicPlain"/>
               <a:tabLst>
                 <a:tab pos="0" algn="l"/>
               </a:tabLst>
@@ -8012,7 +7723,7 @@
                 <a:srgbClr val="000000"/>
               </a:buClr>
               <a:buFont typeface="Wingdings" charset="2"/>
-              <a:buAutoNum type="arabicPeriod"/>
+              <a:buAutoNum type="arabicPlain"/>
               <a:tabLst>
                 <a:tab pos="0" algn="l"/>
               </a:tabLst>
@@ -8052,7 +7763,7 @@
                 <a:srgbClr val="000000"/>
               </a:buClr>
               <a:buFont typeface="Wingdings" charset="2"/>
-              <a:buAutoNum type="arabicPeriod"/>
+              <a:buAutoNum type="arabicPlain"/>
               <a:tabLst>
                 <a:tab pos="0" algn="l"/>
               </a:tabLst>
@@ -8092,7 +7803,7 @@
                 <a:srgbClr val="000000"/>
               </a:buClr>
               <a:buFont typeface="Wingdings" charset="2"/>
-              <a:buAutoNum type="arabicPeriod"/>
+              <a:buAutoNum type="arabicPlain"/>
               <a:tabLst>
                 <a:tab pos="0" algn="l"/>
               </a:tabLst>
@@ -8186,8 +7897,8 @@
         </p:nvSpPr>
         <p:spPr>
           <a:xfrm>
-            <a:off x="504000" y="225360"/>
-            <a:ext cx="9070920" cy="947160"/>
+            <a:off x="504000" y="225000"/>
+            <a:ext cx="9070560" cy="947520"/>
           </a:xfrm>
           <a:prstGeom prst="rect">
             <a:avLst/>
@@ -8246,7 +7957,7 @@
         <p:spPr>
           <a:xfrm>
             <a:off x="429480" y="1440000"/>
-            <a:ext cx="9290160" cy="3287520"/>
+            <a:ext cx="9289800" cy="3287160"/>
           </a:xfrm>
           <a:prstGeom prst="rect">
             <a:avLst/>
@@ -8483,8 +8194,8 @@
         </p:nvSpPr>
         <p:spPr>
           <a:xfrm>
-            <a:off x="504000" y="225360"/>
-            <a:ext cx="9070920" cy="947160"/>
+            <a:off x="504000" y="225000"/>
+            <a:ext cx="9070560" cy="947520"/>
           </a:xfrm>
           <a:prstGeom prst="rect">
             <a:avLst/>
@@ -8517,18 +8228,7 @@
                 <a:uFillTx/>
                 <a:latin typeface="Arial"/>
               </a:rPr>
-              <a:t>Основные </a:t>
-            </a:r>
-            <a:r>
-              <a:rPr lang="ru-RU" sz="3200" b="1" u="none" strike="noStrike">
-                <a:solidFill>
-                  <a:srgbClr val="1A3A5C"/>
-                </a:solidFill>
-                <a:effectLst/>
-                <a:uFillTx/>
-                <a:latin typeface="Arial"/>
-              </a:rPr>
-              <a:t>понятия</a:t>
+              <a:t>Основные понятия</a:t>
             </a:r>
             <a:endParaRPr lang="ru-RU" sz="3200" b="0" u="none" strike="noStrike">
               <a:solidFill>
@@ -8554,7 +8254,7 @@
         <p:spPr>
           <a:xfrm>
             <a:off x="504000" y="1326600"/>
-            <a:ext cx="9070920" cy="3385080"/>
+            <a:ext cx="9070560" cy="3384720"/>
           </a:xfrm>
           <a:prstGeom prst="rect">
             <a:avLst/>
@@ -8948,8 +8648,8 @@
         </p:nvSpPr>
         <p:spPr>
           <a:xfrm>
-            <a:off x="504000" y="-360"/>
-            <a:ext cx="9070920" cy="947160"/>
+            <a:off x="504000" y="-720"/>
+            <a:ext cx="9070560" cy="947520"/>
           </a:xfrm>
           <a:prstGeom prst="rect">
             <a:avLst/>
@@ -8982,40 +8682,7 @@
                 <a:uFillTx/>
                 <a:latin typeface="Arial"/>
               </a:rPr>
-              <a:t>Метод </a:t>
-            </a:r>
-            <a:r>
-              <a:rPr lang="ru-RU" sz="3200" b="1" u="none" strike="noStrike">
-                <a:solidFill>
-                  <a:srgbClr val="1A3A5C"/>
-                </a:solidFill>
-                <a:effectLst/>
-                <a:uFillTx/>
-                <a:latin typeface="Arial"/>
-              </a:rPr>
-              <a:t>бисекции </a:t>
-            </a:r>
-            <a:r>
-              <a:rPr lang="ru-RU" sz="3200" b="1" u="none" strike="noStrike">
-                <a:solidFill>
-                  <a:srgbClr val="1A3A5C"/>
-                </a:solidFill>
-                <a:effectLst/>
-                <a:uFillTx/>
-                <a:latin typeface="Arial"/>
-              </a:rPr>
-              <a:t>(половинног</a:t>
-            </a:r>
-            <a:r>
-              <a:rPr lang="ru-RU" sz="3200" b="1" u="none" strike="noStrike">
-                <a:solidFill>
-                  <a:srgbClr val="1A3A5C"/>
-                </a:solidFill>
-                <a:effectLst/>
-                <a:uFillTx/>
-                <a:latin typeface="Arial"/>
-              </a:rPr>
-              <a:t>о деления)</a:t>
+              <a:t>Метод бисекции (половинного деления)</a:t>
             </a:r>
             <a:endParaRPr lang="ru-RU" sz="3200" b="0" u="none" strike="noStrike">
               <a:solidFill>
@@ -9041,7 +8708,7 @@
         <p:spPr>
           <a:xfrm>
             <a:off x="306360" y="946800"/>
-            <a:ext cx="9300600" cy="3287520"/>
+            <a:ext cx="9300240" cy="3287160"/>
           </a:xfrm>
           <a:prstGeom prst="rect">
             <a:avLst/>
@@ -9283,7 +8950,7 @@
         <p:spPr>
           <a:xfrm>
             <a:off x="1702440" y="3006720"/>
-            <a:ext cx="3780720" cy="2437560"/>
+            <a:ext cx="3780360" cy="2437200"/>
           </a:xfrm>
           <a:prstGeom prst="rect">
             <a:avLst/>
@@ -9336,8 +9003,8 @@
         </p:nvSpPr>
         <p:spPr>
           <a:xfrm>
-            <a:off x="504000" y="225360"/>
-            <a:ext cx="9070920" cy="947160"/>
+            <a:off x="504000" y="225000"/>
+            <a:ext cx="9070560" cy="947520"/>
           </a:xfrm>
           <a:prstGeom prst="rect">
             <a:avLst/>
@@ -9370,29 +9037,7 @@
                 <a:uFillTx/>
                 <a:latin typeface="Arial"/>
               </a:rPr>
-              <a:t>Реализация </a:t>
-            </a:r>
-            <a:r>
-              <a:rPr lang="ru-RU" sz="3200" b="1" u="none" strike="noStrike">
-                <a:solidFill>
-                  <a:srgbClr val="1A3A5C"/>
-                </a:solidFill>
-                <a:effectLst/>
-                <a:uFillTx/>
-                <a:latin typeface="Arial"/>
-              </a:rPr>
-              <a:t>метода </a:t>
-            </a:r>
-            <a:r>
-              <a:rPr lang="ru-RU" sz="3200" b="1" u="none" strike="noStrike">
-                <a:solidFill>
-                  <a:srgbClr val="1A3A5C"/>
-                </a:solidFill>
-                <a:effectLst/>
-                <a:uFillTx/>
-                <a:latin typeface="Arial"/>
-              </a:rPr>
-              <a:t>бисекции</a:t>
+              <a:t>Реализация метода бисекции</a:t>
             </a:r>
             <a:endParaRPr lang="ru-RU" sz="3200" b="0" u="none" strike="noStrike">
               <a:solidFill>
@@ -9418,7 +9063,7 @@
         <p:spPr>
           <a:xfrm>
             <a:off x="720000" y="1452240"/>
-            <a:ext cx="8672040" cy="3227040"/>
+            <a:ext cx="8671680" cy="3226680"/>
           </a:xfrm>
           <a:prstGeom prst="rect">
             <a:avLst/>
@@ -9471,8 +9116,8 @@
         </p:nvSpPr>
         <p:spPr>
           <a:xfrm>
-            <a:off x="504000" y="-360"/>
-            <a:ext cx="9070920" cy="947160"/>
+            <a:off x="504000" y="-720"/>
+            <a:ext cx="9070560" cy="947520"/>
           </a:xfrm>
           <a:prstGeom prst="rect">
             <a:avLst/>
@@ -9531,7 +9176,7 @@
         <p:spPr>
           <a:xfrm>
             <a:off x="294840" y="946800"/>
-            <a:ext cx="9311760" cy="3287520"/>
+            <a:ext cx="9311400" cy="3287160"/>
           </a:xfrm>
           <a:prstGeom prst="rect">
             <a:avLst/>
@@ -9726,7 +9371,7 @@
         <p:spPr>
           <a:xfrm>
             <a:off x="1266480" y="2393640"/>
-            <a:ext cx="3847680" cy="3195360"/>
+            <a:ext cx="3847320" cy="3195000"/>
           </a:xfrm>
           <a:prstGeom prst="rect">
             <a:avLst/>
@@ -9750,7 +9395,7 @@
         <p:spPr>
           <a:xfrm>
             <a:off x="5613120" y="2406600"/>
-            <a:ext cx="3846240" cy="3034800"/>
+            <a:ext cx="3845880" cy="3034440"/>
           </a:xfrm>
           <a:prstGeom prst="rect">
             <a:avLst/>
@@ -9803,8 +9448,8 @@
         </p:nvSpPr>
         <p:spPr>
           <a:xfrm>
-            <a:off x="504000" y="225360"/>
-            <a:ext cx="9070920" cy="947160"/>
+            <a:off x="504000" y="225000"/>
+            <a:ext cx="9070560" cy="947520"/>
           </a:xfrm>
           <a:prstGeom prst="rect">
             <a:avLst/>
@@ -9837,18 +9482,7 @@
                 <a:uFillTx/>
                 <a:latin typeface="Arial"/>
               </a:rPr>
-              <a:t>Реализация </a:t>
-            </a:r>
-            <a:r>
-              <a:rPr lang="ru-RU" sz="3200" b="1" u="none" strike="noStrike">
-                <a:solidFill>
-                  <a:srgbClr val="1A3A5C"/>
-                </a:solidFill>
-                <a:effectLst/>
-                <a:uFillTx/>
-                <a:latin typeface="Arial"/>
-              </a:rPr>
-              <a:t>метода хорд</a:t>
+              <a:t>Реализация метода хорд</a:t>
             </a:r>
             <a:endParaRPr lang="ru-RU" sz="3200" b="0" u="none" strike="noStrike">
               <a:solidFill>
@@ -9874,7 +9508,7 @@
         <p:spPr>
           <a:xfrm>
             <a:off x="720000" y="1260000"/>
-            <a:ext cx="8712360" cy="4141440"/>
+            <a:ext cx="8712000" cy="4141080"/>
           </a:xfrm>
           <a:prstGeom prst="rect">
             <a:avLst/>

--- a/Презентация по проекту.pptx
+++ b/Презентация по проекту.pptx
@@ -64,7 +64,7 @@
         <p:spPr>
           <a:xfrm>
             <a:off x="504000" y="455040"/>
-            <a:ext cx="9070560" cy="488160"/>
+            <a:ext cx="9069840" cy="488160"/>
           </a:xfrm>
           <a:prstGeom prst="rect">
             <a:avLst/>
@@ -116,7 +116,51 @@
                 <a:uFillTx/>
                 <a:latin typeface="Arial"/>
               </a:rPr>
-              <a:t>Для правки текста заглавия щёлкните мышью</a:t>
+              <a:t>Для правки </a:t>
+            </a:r>
+            <a:r>
+              <a:rPr lang="ru-RU" sz="3200" b="0" u="none" strike="noStrike">
+                <a:solidFill>
+                  <a:srgbClr val="1A3A5C"/>
+                </a:solidFill>
+                <a:effectLst/>
+                <a:uFillTx/>
+                <a:latin typeface="Arial"/>
+              </a:rPr>
+              <a:t>текста </a:t>
+            </a:r>
+            <a:r>
+              <a:rPr lang="ru-RU" sz="3200" b="0" u="none" strike="noStrike">
+                <a:solidFill>
+                  <a:srgbClr val="1A3A5C"/>
+                </a:solidFill>
+                <a:effectLst/>
+                <a:uFillTx/>
+                <a:latin typeface="Arial"/>
+              </a:rPr>
+              <a:t>заглавия </a:t>
+            </a:r>
+            <a:r>
+              <a:rPr lang="ru-RU" sz="3200" b="0" u="none" strike="noStrike">
+                <a:solidFill>
+                  <a:srgbClr val="1A3A5C"/>
+                </a:solidFill>
+                <a:effectLst/>
+                <a:uFillTx/>
+                <a:latin typeface="Arial"/>
+              </a:rPr>
+              <a:t>щёлкните </a:t>
+            </a:r>
+            <a:r>
+              <a:rPr lang="ru-RU" sz="3200" b="0" u="none" strike="noStrike">
+                <a:solidFill>
+                  <a:srgbClr val="1A3A5C"/>
+                </a:solidFill>
+                <a:effectLst/>
+                <a:uFillTx/>
+                <a:latin typeface="Arial"/>
+              </a:rPr>
+              <a:t>мышью</a:t>
             </a:r>
             <a:endParaRPr lang="ru-RU" sz="3200" b="0" u="none" strike="noStrike">
               <a:solidFill>
@@ -142,7 +186,7 @@
         <p:spPr>
           <a:xfrm>
             <a:off x="504000" y="1326600"/>
-            <a:ext cx="9070560" cy="3287160"/>
+            <a:ext cx="9069840" cy="3286440"/>
           </a:xfrm>
           <a:prstGeom prst="rect">
             <a:avLst/>
@@ -572,7 +616,7 @@
         <p:spPr>
           <a:xfrm>
             <a:off x="3447360" y="5165280"/>
-            <a:ext cx="3193920" cy="389520"/>
+            <a:ext cx="3193200" cy="388800"/>
           </a:xfrm>
           <a:prstGeom prst="rect">
             <a:avLst/>
@@ -650,7 +694,7 @@
         <p:spPr>
           <a:xfrm>
             <a:off x="7227360" y="5165280"/>
-            <a:ext cx="2347200" cy="389520"/>
+            <a:ext cx="2346480" cy="388800"/>
           </a:xfrm>
           <a:prstGeom prst="rect">
             <a:avLst/>
@@ -693,7 +737,7 @@
                 <a:tab pos="0" algn="l"/>
               </a:tabLst>
             </a:pPr>
-            <a:fld id="{F857A394-7965-421E-A807-981F6C6B0129}" type="slidenum">
+            <a:fld id="{6201FB46-36B1-4405-8E10-2FBDE12CBC75}" type="slidenum">
               <a:rPr lang="ru-RU" sz="1400" b="0" u="none" strike="noStrike">
                 <a:solidFill>
                   <a:srgbClr val="000000"/>
@@ -728,7 +772,7 @@
         <p:spPr>
           <a:xfrm>
             <a:off x="504000" y="5165280"/>
-            <a:ext cx="2347200" cy="389520"/>
+            <a:ext cx="2346480" cy="388800"/>
           </a:xfrm>
           <a:prstGeom prst="rect">
             <a:avLst/>
@@ -835,7 +879,7 @@
         <p:spPr>
           <a:xfrm>
             <a:off x="504000" y="455040"/>
-            <a:ext cx="9070560" cy="488160"/>
+            <a:ext cx="9069840" cy="488160"/>
           </a:xfrm>
           <a:prstGeom prst="rect">
             <a:avLst/>
@@ -887,7 +931,51 @@
                 <a:uFillTx/>
                 <a:latin typeface="Arial"/>
               </a:rPr>
-              <a:t>Для правки текста заглавия щёлкните мышью</a:t>
+              <a:t>Для правки </a:t>
+            </a:r>
+            <a:r>
+              <a:rPr lang="ru-RU" sz="3200" b="0" u="none" strike="noStrike">
+                <a:solidFill>
+                  <a:srgbClr val="1A3A5C"/>
+                </a:solidFill>
+                <a:effectLst/>
+                <a:uFillTx/>
+                <a:latin typeface="Arial"/>
+              </a:rPr>
+              <a:t>текста </a:t>
+            </a:r>
+            <a:r>
+              <a:rPr lang="ru-RU" sz="3200" b="0" u="none" strike="noStrike">
+                <a:solidFill>
+                  <a:srgbClr val="1A3A5C"/>
+                </a:solidFill>
+                <a:effectLst/>
+                <a:uFillTx/>
+                <a:latin typeface="Arial"/>
+              </a:rPr>
+              <a:t>заглавия </a:t>
+            </a:r>
+            <a:r>
+              <a:rPr lang="ru-RU" sz="3200" b="0" u="none" strike="noStrike">
+                <a:solidFill>
+                  <a:srgbClr val="1A3A5C"/>
+                </a:solidFill>
+                <a:effectLst/>
+                <a:uFillTx/>
+                <a:latin typeface="Arial"/>
+              </a:rPr>
+              <a:t>щёлкните </a:t>
+            </a:r>
+            <a:r>
+              <a:rPr lang="ru-RU" sz="3200" b="0" u="none" strike="noStrike">
+                <a:solidFill>
+                  <a:srgbClr val="1A3A5C"/>
+                </a:solidFill>
+                <a:effectLst/>
+                <a:uFillTx/>
+                <a:latin typeface="Arial"/>
+              </a:rPr>
+              <a:t>мышью</a:t>
             </a:r>
             <a:endParaRPr lang="ru-RU" sz="3200" b="0" u="none" strike="noStrike">
               <a:solidFill>
@@ -913,7 +1001,7 @@
         <p:spPr>
           <a:xfrm>
             <a:off x="3447360" y="5165280"/>
-            <a:ext cx="3193920" cy="389520"/>
+            <a:ext cx="3193200" cy="388800"/>
           </a:xfrm>
           <a:prstGeom prst="rect">
             <a:avLst/>
@@ -991,7 +1079,7 @@
         <p:spPr>
           <a:xfrm>
             <a:off x="7227360" y="5165280"/>
-            <a:ext cx="2347200" cy="389520"/>
+            <a:ext cx="2346480" cy="388800"/>
           </a:xfrm>
           <a:prstGeom prst="rect">
             <a:avLst/>
@@ -1034,7 +1122,7 @@
                 <a:tab pos="0" algn="l"/>
               </a:tabLst>
             </a:pPr>
-            <a:fld id="{186EE2E9-29AD-46A7-9894-B4666F6F92F1}" type="slidenum">
+            <a:fld id="{9B52B50E-7156-47E8-8D0A-31C7DED42500}" type="slidenum">
               <a:rPr lang="ru-RU" sz="1400" b="0" u="none" strike="noStrike">
                 <a:solidFill>
                   <a:srgbClr val="000000"/>
@@ -1069,7 +1157,7 @@
         <p:spPr>
           <a:xfrm>
             <a:off x="504000" y="5165280"/>
-            <a:ext cx="2347200" cy="389520"/>
+            <a:ext cx="2346480" cy="388800"/>
           </a:xfrm>
           <a:prstGeom prst="rect">
             <a:avLst/>
@@ -1147,7 +1235,7 @@
         <p:spPr>
           <a:xfrm>
             <a:off x="504000" y="1326600"/>
-            <a:ext cx="9071280" cy="3287880"/>
+            <a:ext cx="9070560" cy="3287160"/>
           </a:xfrm>
           <a:prstGeom prst="rect">
             <a:avLst/>
@@ -1625,8 +1713,8 @@
         </p:nvSpPr>
         <p:spPr>
           <a:xfrm>
-            <a:off x="540000" y="1572480"/>
-            <a:ext cx="9070560" cy="947520"/>
+            <a:off x="540000" y="1571760"/>
+            <a:ext cx="9069840" cy="948240"/>
           </a:xfrm>
           <a:prstGeom prst="rect">
             <a:avLst/>
@@ -1659,7 +1747,40 @@
                 <a:uFillTx/>
                 <a:latin typeface="Arial"/>
               </a:rPr>
-              <a:t>Сравнение численных методов</a:t>
+              <a:t>Сравнени</a:t>
+            </a:r>
+            <a:r>
+              <a:rPr lang="ru-RU" sz="3200" b="1" u="none" strike="noStrike">
+                <a:solidFill>
+                  <a:srgbClr val="1A3A5C"/>
+                </a:solidFill>
+                <a:effectLst/>
+                <a:uFillTx/>
+                <a:latin typeface="Arial"/>
+              </a:rPr>
+              <a:t>е </a:t>
+            </a:r>
+            <a:r>
+              <a:rPr lang="ru-RU" sz="3200" b="1" u="none" strike="noStrike">
+                <a:solidFill>
+                  <a:srgbClr val="1A3A5C"/>
+                </a:solidFill>
+                <a:effectLst/>
+                <a:uFillTx/>
+                <a:latin typeface="Arial"/>
+              </a:rPr>
+              <a:t>численны</a:t>
+            </a:r>
+            <a:r>
+              <a:rPr lang="ru-RU" sz="3200" b="1" u="none" strike="noStrike">
+                <a:solidFill>
+                  <a:srgbClr val="1A3A5C"/>
+                </a:solidFill>
+                <a:effectLst/>
+                <a:uFillTx/>
+                <a:latin typeface="Arial"/>
+              </a:rPr>
+              <a:t>х методов</a:t>
             </a:r>
             <a:br>
               <a:rPr sz="3200"/>
@@ -1673,7 +1794,18 @@
                 <a:uFillTx/>
                 <a:latin typeface="Arial"/>
               </a:rPr>
-              <a:t>решения уравнений</a:t>
+              <a:t>решения </a:t>
+            </a:r>
+            <a:r>
+              <a:rPr lang="ru-RU" sz="3200" b="1" u="none" strike="noStrike">
+                <a:solidFill>
+                  <a:srgbClr val="1A3A5C"/>
+                </a:solidFill>
+                <a:effectLst/>
+                <a:uFillTx/>
+                <a:latin typeface="Arial"/>
+              </a:rPr>
+              <a:t>уравнений</a:t>
             </a:r>
             <a:endParaRPr lang="ru-RU" sz="3200" b="0" u="none" strike="noStrike">
               <a:solidFill>
@@ -1699,7 +1831,7 @@
         <p:spPr>
           <a:xfrm>
             <a:off x="540000" y="3024720"/>
-            <a:ext cx="9070560" cy="2387160"/>
+            <a:ext cx="9069840" cy="2387880"/>
           </a:xfrm>
           <a:prstGeom prst="rect">
             <a:avLst/>
@@ -1735,7 +1867,40 @@
                 <a:uFillTx/>
                 <a:latin typeface="Arial"/>
               </a:rPr>
-              <a:t>Выполнил: ученик 10Б класса Субботин Матвей Денисович</a:t>
+              <a:t>Выполнил: ученик </a:t>
+            </a:r>
+            <a:r>
+              <a:rPr lang="ru-RU" sz="2000" b="0" u="none" strike="noStrike">
+                <a:solidFill>
+                  <a:srgbClr val="2D2D2D"/>
+                </a:solidFill>
+                <a:effectLst/>
+                <a:uFillTx/>
+                <a:latin typeface="Arial"/>
+              </a:rPr>
+              <a:t>10Б класса </a:t>
+            </a:r>
+            <a:r>
+              <a:rPr lang="ru-RU" sz="2000" b="0" u="none" strike="noStrike">
+                <a:solidFill>
+                  <a:srgbClr val="2D2D2D"/>
+                </a:solidFill>
+                <a:effectLst/>
+                <a:uFillTx/>
+                <a:latin typeface="Arial"/>
+              </a:rPr>
+              <a:t>Субботин Матвей </a:t>
+            </a:r>
+            <a:r>
+              <a:rPr lang="ru-RU" sz="2000" b="0" u="none" strike="noStrike">
+                <a:solidFill>
+                  <a:srgbClr val="2D2D2D"/>
+                </a:solidFill>
+                <a:effectLst/>
+                <a:uFillTx/>
+                <a:latin typeface="Arial"/>
+              </a:rPr>
+              <a:t>Денисович</a:t>
             </a:r>
             <a:endParaRPr lang="ru-RU" sz="2000" b="0" u="none" strike="noStrike">
               <a:solidFill>
@@ -1790,7 +1955,51 @@
                 <a:uFillTx/>
                 <a:latin typeface="Arial"/>
               </a:rPr>
-              <a:t>Руководитель: учитель информатики Филатов Алексей Александрович</a:t>
+              <a:t>Руководитель: </a:t>
+            </a:r>
+            <a:r>
+              <a:rPr lang="ru-RU" sz="2000" b="0" u="none" strike="noStrike">
+                <a:solidFill>
+                  <a:srgbClr val="2D2D2D"/>
+                </a:solidFill>
+                <a:effectLst/>
+                <a:uFillTx/>
+                <a:latin typeface="Arial"/>
+              </a:rPr>
+              <a:t>учитель </a:t>
+            </a:r>
+            <a:r>
+              <a:rPr lang="ru-RU" sz="2000" b="0" u="none" strike="noStrike">
+                <a:solidFill>
+                  <a:srgbClr val="2D2D2D"/>
+                </a:solidFill>
+                <a:effectLst/>
+                <a:uFillTx/>
+                <a:latin typeface="Arial"/>
+              </a:rPr>
+              <a:t>информатики </a:t>
+            </a:r>
+            <a:r>
+              <a:rPr lang="ru-RU" sz="2000" b="0" u="none" strike="noStrike">
+                <a:solidFill>
+                  <a:srgbClr val="2D2D2D"/>
+                </a:solidFill>
+                <a:effectLst/>
+                <a:uFillTx/>
+                <a:latin typeface="Arial"/>
+              </a:rPr>
+              <a:t>Филатов Алексей </a:t>
+            </a:r>
+            <a:r>
+              <a:rPr lang="ru-RU" sz="2000" b="0" u="none" strike="noStrike">
+                <a:solidFill>
+                  <a:srgbClr val="2D2D2D"/>
+                </a:solidFill>
+                <a:effectLst/>
+                <a:uFillTx/>
+                <a:latin typeface="Arial"/>
+              </a:rPr>
+              <a:t>Александрович</a:t>
             </a:r>
             <a:endParaRPr lang="ru-RU" sz="2000" b="0" u="none" strike="noStrike">
               <a:solidFill>
@@ -1988,8 +2197,8 @@
         </p:nvSpPr>
         <p:spPr>
           <a:xfrm>
-            <a:off x="504000" y="-720"/>
-            <a:ext cx="9070560" cy="947520"/>
+            <a:off x="504000" y="-1440"/>
+            <a:ext cx="9069840" cy="948240"/>
           </a:xfrm>
           <a:prstGeom prst="rect">
             <a:avLst/>
@@ -2022,7 +2231,40 @@
                 <a:uFillTx/>
                 <a:latin typeface="Arial"/>
               </a:rPr>
-              <a:t>Метод Ньютона (касательных)</a:t>
+              <a:t>Метод </a:t>
+            </a:r>
+            <a:r>
+              <a:rPr lang="ru-RU" sz="3200" b="1" u="none" strike="noStrike">
+                <a:solidFill>
+                  <a:srgbClr val="1A3A5C"/>
+                </a:solidFill>
+                <a:effectLst/>
+                <a:uFillTx/>
+                <a:latin typeface="Arial"/>
+              </a:rPr>
+              <a:t>Ньютона </a:t>
+            </a:r>
+            <a:r>
+              <a:rPr lang="ru-RU" sz="3200" b="1" u="none" strike="noStrike">
+                <a:solidFill>
+                  <a:srgbClr val="1A3A5C"/>
+                </a:solidFill>
+                <a:effectLst/>
+                <a:uFillTx/>
+                <a:latin typeface="Arial"/>
+              </a:rPr>
+              <a:t>(касатель</a:t>
+            </a:r>
+            <a:r>
+              <a:rPr lang="ru-RU" sz="3200" b="1" u="none" strike="noStrike">
+                <a:solidFill>
+                  <a:srgbClr val="1A3A5C"/>
+                </a:solidFill>
+                <a:effectLst/>
+                <a:uFillTx/>
+                <a:latin typeface="Arial"/>
+              </a:rPr>
+              <a:t>ных)</a:t>
             </a:r>
             <a:endParaRPr lang="ru-RU" sz="3200" b="0" u="none" strike="noStrike">
               <a:solidFill>
@@ -2048,7 +2290,7 @@
         <p:spPr>
           <a:xfrm>
             <a:off x="288360" y="946800"/>
-            <a:ext cx="9286200" cy="3287160"/>
+            <a:ext cx="9285480" cy="3286440"/>
           </a:xfrm>
           <a:prstGeom prst="rect">
             <a:avLst/>
@@ -2098,7 +2340,95 @@
                 <a:uFillTx/>
                 <a:latin typeface="Arial"/>
               </a:rPr>
-              <a:t>xₙ₊₁ = xₙ − f(xₙ) / f'(xₙ)</a:t>
+              <a:t>x</a:t>
+            </a:r>
+            <a:r>
+              <a:rPr lang="ru-RU" sz="2000" b="0" u="none" strike="noStrike" baseline="-8000">
+                <a:solidFill>
+                  <a:srgbClr val="2D2D2D"/>
+                </a:solidFill>
+                <a:effectLst/>
+                <a:uFillTx/>
+                <a:latin typeface="Arial"/>
+              </a:rPr>
+              <a:t>n+1</a:t>
+            </a:r>
+            <a:r>
+              <a:rPr lang="ru-RU" sz="2000" b="0" u="none" strike="noStrike">
+                <a:solidFill>
+                  <a:srgbClr val="2D2D2D"/>
+                </a:solidFill>
+                <a:effectLst/>
+                <a:uFillTx/>
+                <a:latin typeface="Arial"/>
+              </a:rPr>
+              <a:t> = x</a:t>
+            </a:r>
+            <a:r>
+              <a:rPr lang="ru-RU" sz="2000" b="0" u="none" strike="noStrike" baseline="-8000">
+                <a:solidFill>
+                  <a:srgbClr val="2D2D2D"/>
+                </a:solidFill>
+                <a:effectLst/>
+                <a:uFillTx/>
+                <a:latin typeface="Arial"/>
+              </a:rPr>
+              <a:t>n</a:t>
+            </a:r>
+            <a:r>
+              <a:rPr lang="ru-RU" sz="2000" b="0" u="none" strike="noStrike">
+                <a:solidFill>
+                  <a:srgbClr val="2D2D2D"/>
+                </a:solidFill>
+                <a:effectLst/>
+                <a:uFillTx/>
+                <a:latin typeface="Arial"/>
+              </a:rPr>
+              <a:t> − f(x</a:t>
+            </a:r>
+            <a:r>
+              <a:rPr lang="ru-RU" sz="2000" b="0" u="none" strike="noStrike" baseline="-8000">
+                <a:solidFill>
+                  <a:srgbClr val="2D2D2D"/>
+                </a:solidFill>
+                <a:effectLst/>
+                <a:uFillTx/>
+                <a:latin typeface="Arial"/>
+              </a:rPr>
+              <a:t>n</a:t>
+            </a:r>
+            <a:r>
+              <a:rPr lang="ru-RU" sz="2000" b="0" u="none" strike="noStrike">
+                <a:solidFill>
+                  <a:srgbClr val="2D2D2D"/>
+                </a:solidFill>
+                <a:effectLst/>
+                <a:uFillTx/>
+                <a:latin typeface="Arial"/>
+              </a:rPr>
+              <a:t>) / f'(x</a:t>
+            </a:r>
+            <a:r>
+              <a:rPr lang="ru-RU" sz="2000" b="0" u="none" strike="noStrike" baseline="-8000">
+                <a:solidFill>
+                  <a:srgbClr val="2D2D2D"/>
+                </a:solidFill>
+                <a:effectLst/>
+                <a:uFillTx/>
+                <a:latin typeface="Arial"/>
+              </a:rPr>
+              <a:t>n</a:t>
+            </a:r>
+            <a:r>
+              <a:rPr lang="ru-RU" sz="2000" b="0" u="none" strike="noStrike">
+                <a:solidFill>
+                  <a:srgbClr val="2D2D2D"/>
+                </a:solidFill>
+                <a:effectLst/>
+                <a:uFillTx/>
+                <a:latin typeface="Arial"/>
+              </a:rPr>
+              <a:t>)</a:t>
             </a:r>
             <a:endParaRPr lang="ru-RU" sz="2000" b="0" u="none" strike="noStrike">
               <a:solidFill>
@@ -2243,7 +2573,7 @@
         <p:spPr>
           <a:xfrm>
             <a:off x="1344600" y="2716560"/>
-            <a:ext cx="4159800" cy="2703240"/>
+            <a:ext cx="4159080" cy="2702520"/>
           </a:xfrm>
           <a:prstGeom prst="rect">
             <a:avLst/>
@@ -2296,8 +2626,8 @@
         </p:nvSpPr>
         <p:spPr>
           <a:xfrm>
-            <a:off x="504000" y="225000"/>
-            <a:ext cx="9070560" cy="947520"/>
+            <a:off x="504000" y="224280"/>
+            <a:ext cx="9069840" cy="948240"/>
           </a:xfrm>
           <a:prstGeom prst="rect">
             <a:avLst/>
@@ -2330,7 +2660,29 @@
                 <a:uFillTx/>
                 <a:latin typeface="Arial"/>
               </a:rPr>
-              <a:t>Реализация метода Ньютона</a:t>
+              <a:t>Реализаци</a:t>
+            </a:r>
+            <a:r>
+              <a:rPr lang="ru-RU" sz="3200" b="1" u="none" strike="noStrike">
+                <a:solidFill>
+                  <a:srgbClr val="1A3A5C"/>
+                </a:solidFill>
+                <a:effectLst/>
+                <a:uFillTx/>
+                <a:latin typeface="Arial"/>
+              </a:rPr>
+              <a:t>я метода </a:t>
+            </a:r>
+            <a:r>
+              <a:rPr lang="ru-RU" sz="3200" b="1" u="none" strike="noStrike">
+                <a:solidFill>
+                  <a:srgbClr val="1A3A5C"/>
+                </a:solidFill>
+                <a:effectLst/>
+                <a:uFillTx/>
+                <a:latin typeface="Arial"/>
+              </a:rPr>
+              <a:t>Ньютона</a:t>
             </a:r>
             <a:endParaRPr lang="ru-RU" sz="3200" b="0" u="none" strike="noStrike">
               <a:solidFill>
@@ -2356,7 +2708,7 @@
         <p:spPr>
           <a:xfrm>
             <a:off x="286920" y="1210320"/>
-            <a:ext cx="9498960" cy="4287960"/>
+            <a:ext cx="9498240" cy="4287240"/>
           </a:xfrm>
           <a:prstGeom prst="rect">
             <a:avLst/>
@@ -2409,8 +2761,8 @@
         </p:nvSpPr>
         <p:spPr>
           <a:xfrm>
-            <a:off x="504000" y="-145800"/>
-            <a:ext cx="9070560" cy="947520"/>
+            <a:off x="504000" y="-146520"/>
+            <a:ext cx="9069840" cy="948240"/>
           </a:xfrm>
           <a:prstGeom prst="rect">
             <a:avLst/>
@@ -2469,7 +2821,7 @@
         <p:spPr>
           <a:xfrm>
             <a:off x="504000" y="702360"/>
-            <a:ext cx="2721600" cy="1933200"/>
+            <a:ext cx="2720880" cy="1932480"/>
           </a:xfrm>
           <a:prstGeom prst="rect">
             <a:avLst/>
@@ -2493,7 +2845,7 @@
         <p:spPr>
           <a:xfrm>
             <a:off x="3688920" y="702360"/>
-            <a:ext cx="2551680" cy="1924920"/>
+            <a:ext cx="2550960" cy="1924200"/>
           </a:xfrm>
           <a:prstGeom prst="rect">
             <a:avLst/>
@@ -2517,7 +2869,7 @@
         <p:spPr>
           <a:xfrm>
             <a:off x="784440" y="2793240"/>
-            <a:ext cx="4138200" cy="2327400"/>
+            <a:ext cx="4137480" cy="2326680"/>
           </a:xfrm>
           <a:prstGeom prst="rect">
             <a:avLst/>
@@ -2541,7 +2893,7 @@
         <p:spPr>
           <a:xfrm>
             <a:off x="5287680" y="2792880"/>
-            <a:ext cx="3994200" cy="2327760"/>
+            <a:ext cx="3993480" cy="2327040"/>
           </a:xfrm>
           <a:prstGeom prst="rect">
             <a:avLst/>
@@ -2565,7 +2917,7 @@
         <p:spPr>
           <a:xfrm>
             <a:off x="6693120" y="702360"/>
-            <a:ext cx="2881440" cy="1920600"/>
+            <a:ext cx="2880720" cy="1919880"/>
           </a:xfrm>
           <a:prstGeom prst="rect">
             <a:avLst/>
@@ -2585,7 +2937,7 @@
         <p:spPr>
           <a:xfrm>
             <a:off x="718560" y="5269680"/>
-            <a:ext cx="8770680" cy="601200"/>
+            <a:ext cx="8769960" cy="364680"/>
           </a:xfrm>
           <a:prstGeom prst="rect">
             <a:avLst/>
@@ -2627,7 +2979,79 @@
                 <a:latin typeface="Arial"/>
                 <a:ea typeface="DejaVu Sans"/>
               </a:rPr>
-              <a:t>Пример работы программы: решение уравнения x² − 2 = 0 методом Ньютона</a:t>
+              <a:t>Пример работы </a:t>
+            </a:r>
+            <a:r>
+              <a:rPr lang="ru-RU" sz="1800" b="0" u="none" strike="noStrike">
+                <a:solidFill>
+                  <a:srgbClr val="000000"/>
+                </a:solidFill>
+                <a:effectLst/>
+                <a:uFillTx/>
+                <a:latin typeface="Arial"/>
+                <a:ea typeface="DejaVu Sans"/>
+              </a:rPr>
+              <a:t>программы: </a:t>
+            </a:r>
+            <a:r>
+              <a:rPr lang="ru-RU" sz="1800" b="0" u="none" strike="noStrike">
+                <a:solidFill>
+                  <a:srgbClr val="000000"/>
+                </a:solidFill>
+                <a:effectLst/>
+                <a:uFillTx/>
+                <a:latin typeface="Arial"/>
+                <a:ea typeface="DejaVu Sans"/>
+              </a:rPr>
+              <a:t>решение уравнения </a:t>
+            </a:r>
+            <a:r>
+              <a:rPr lang="ru-RU" sz="1800" b="0" u="none" strike="noStrike">
+                <a:solidFill>
+                  <a:srgbClr val="000000"/>
+                </a:solidFill>
+                <a:effectLst/>
+                <a:uFillTx/>
+                <a:latin typeface="Arial"/>
+                <a:ea typeface="DejaVu Sans"/>
+              </a:rPr>
+              <a:t>x</a:t>
+            </a:r>
+            <a:r>
+              <a:rPr lang="ru-RU" sz="1800" b="0" u="none" strike="noStrike" baseline="33000">
+                <a:solidFill>
+                  <a:srgbClr val="000000"/>
+                </a:solidFill>
+                <a:effectLst/>
+                <a:uFillTx/>
+                <a:latin typeface="Arial"/>
+                <a:ea typeface="DejaVu Sans"/>
+              </a:rPr>
+              <a:t>2</a:t>
+            </a:r>
+            <a:r>
+              <a:rPr lang="ru-RU" sz="1800" b="0" u="none" strike="noStrike">
+                <a:solidFill>
+                  <a:srgbClr val="000000"/>
+                </a:solidFill>
+                <a:effectLst/>
+                <a:uFillTx/>
+                <a:latin typeface="Arial"/>
+                <a:ea typeface="DejaVu Sans"/>
+              </a:rPr>
+              <a:t> − 2 = 0 методом </a:t>
+            </a:r>
+            <a:r>
+              <a:rPr lang="ru-RU" sz="1800" b="0" u="none" strike="noStrike">
+                <a:solidFill>
+                  <a:srgbClr val="000000"/>
+                </a:solidFill>
+                <a:effectLst/>
+                <a:uFillTx/>
+                <a:latin typeface="Arial"/>
+                <a:ea typeface="DejaVu Sans"/>
+              </a:rPr>
+              <a:t>Ньютона</a:t>
             </a:r>
             <a:endParaRPr lang="ru-RU" sz="1800" b="0" u="none" strike="noStrike">
               <a:solidFill>
@@ -2682,8 +3106,8 @@
         </p:nvSpPr>
         <p:spPr>
           <a:xfrm>
-            <a:off x="504000" y="225000"/>
-            <a:ext cx="9070560" cy="947520"/>
+            <a:off x="504000" y="224280"/>
+            <a:ext cx="9069840" cy="948240"/>
           </a:xfrm>
           <a:prstGeom prst="rect">
             <a:avLst/>
@@ -4363,8 +4787,8 @@
         </p:nvSpPr>
         <p:spPr>
           <a:xfrm>
-            <a:off x="504000" y="225000"/>
-            <a:ext cx="9070560" cy="947520"/>
+            <a:off x="504000" y="210240"/>
+            <a:ext cx="9069840" cy="975960"/>
           </a:xfrm>
           <a:prstGeom prst="rect">
             <a:avLst/>
@@ -4403,11 +4827,77 @@
                 <a:uFillTx/>
                 <a:latin typeface="Arial"/>
               </a:rPr>
-              <a:t>Результаты экспериментов (ε = 0.0001)</a:t>
+              <a:t>Результаты </a:t>
+            </a:r>
+            <a:r>
+              <a:rPr lang="ru-RU" sz="3200" b="1" u="none" strike="noStrike">
+                <a:solidFill>
+                  <a:srgbClr val="1A3A5C"/>
+                </a:solidFill>
+                <a:effectLst/>
+                <a:uFillTx/>
+                <a:latin typeface="Arial"/>
+              </a:rPr>
+              <a:t>эксперимент</a:t>
+            </a:r>
+            <a:r>
+              <a:rPr lang="ru-RU" sz="3200" b="1" u="none" strike="noStrike">
+                <a:solidFill>
+                  <a:srgbClr val="1A3A5C"/>
+                </a:solidFill>
+                <a:effectLst/>
+                <a:uFillTx/>
+                <a:latin typeface="Arial"/>
+              </a:rPr>
+              <a:t>ов (ε = </a:t>
+            </a:r>
+            <a:r>
+              <a:rPr lang="ru-RU" sz="3200" b="1" u="none" strike="noStrike">
+                <a:solidFill>
+                  <a:srgbClr val="1A3A5C"/>
+                </a:solidFill>
+                <a:effectLst/>
+                <a:uFillTx/>
+                <a:latin typeface="Arial"/>
+              </a:rPr>
+              <a:t>0.0001)</a:t>
             </a:r>
             <a:br>
               <a:rPr sz="3200"/>
             </a:br>
+            <a:r>
+              <a:rPr lang="ru-RU" sz="3200" b="1" u="none" strike="noStrike">
+                <a:solidFill>
+                  <a:srgbClr val="1A3A5C"/>
+                </a:solidFill>
+                <a:effectLst/>
+                <a:uFillTx/>
+                <a:latin typeface="Arial"/>
+              </a:rPr>
+              <a:t>(сравнение </a:t>
+            </a:r>
+            <a:r>
+              <a:rPr lang="ru-RU" sz="3200" b="1" u="none" strike="noStrike">
+                <a:solidFill>
+                  <a:srgbClr val="1A3A5C"/>
+                </a:solidFill>
+                <a:effectLst/>
+                <a:uFillTx/>
+                <a:latin typeface="Arial"/>
+              </a:rPr>
+              <a:t>количества </a:t>
+            </a:r>
+            <a:r>
+              <a:rPr lang="ru-RU" sz="3200" b="1" u="none" strike="noStrike">
+                <a:solidFill>
+                  <a:srgbClr val="1A3A5C"/>
+                </a:solidFill>
+                <a:effectLst/>
+                <a:uFillTx/>
+                <a:latin typeface="Arial"/>
+              </a:rPr>
+              <a:t>итераций)</a:t>
+            </a:r>
             <a:endParaRPr lang="ru-RU" sz="3200" b="0" u="none" strike="noStrike">
               <a:solidFill>
                 <a:srgbClr val="1A3A5C"/>
@@ -6299,8 +6789,8 @@
         </p:nvSpPr>
         <p:spPr>
           <a:xfrm>
-            <a:off x="504000" y="225000"/>
-            <a:ext cx="9070560" cy="947520"/>
+            <a:off x="504000" y="224280"/>
+            <a:ext cx="9069840" cy="948240"/>
           </a:xfrm>
           <a:prstGeom prst="rect">
             <a:avLst/>
@@ -6358,8 +6848,8 @@
         </p:nvSpPr>
         <p:spPr>
           <a:xfrm>
-            <a:off x="504000" y="1326600"/>
-            <a:ext cx="9070560" cy="3287160"/>
+            <a:off x="504000" y="1172520"/>
+            <a:ext cx="9069840" cy="3918960"/>
           </a:xfrm>
           <a:prstGeom prst="rect">
             <a:avLst/>
@@ -6371,7 +6861,7 @@
         </p:spPr>
         <p:txBody>
           <a:bodyPr lIns="0" tIns="0" rIns="0" bIns="0" anchor="t">
-            <a:normAutofit fontScale="85000" lnSpcReduction="9999"/>
+            <a:normAutofit lnSpcReduction="9999"/>
           </a:bodyPr>
           <a:p>
             <a:pPr marL="432000" indent="-324000" algn="l">
@@ -6715,8 +7205,8 @@
         </p:nvSpPr>
         <p:spPr>
           <a:xfrm>
-            <a:off x="504000" y="225000"/>
-            <a:ext cx="9070560" cy="947520"/>
+            <a:off x="504000" y="224280"/>
+            <a:ext cx="9069840" cy="948240"/>
           </a:xfrm>
           <a:prstGeom prst="rect">
             <a:avLst/>
@@ -6775,7 +7265,7 @@
         <p:spPr>
           <a:xfrm>
             <a:off x="504000" y="1541160"/>
-            <a:ext cx="9070560" cy="3287160"/>
+            <a:ext cx="9069840" cy="3286440"/>
           </a:xfrm>
           <a:prstGeom prst="rect">
             <a:avLst/>
@@ -7061,7 +7551,7 @@
         <p:spPr>
           <a:xfrm>
             <a:off x="360000" y="1326600"/>
-            <a:ext cx="9538920" cy="3712320"/>
+            <a:ext cx="9538200" cy="3711600"/>
           </a:xfrm>
           <a:prstGeom prst="rect">
             <a:avLst/>
@@ -7175,7 +7665,29 @@
                 <a:uFillTx/>
                 <a:latin typeface="Arial"/>
               </a:rPr>
-              <a:t>Уравнения с тригонометрическими, показательными и логарифмическими функциями (например, sin(x) = 0.5, eˣ = 10, ln(x) = 2) также не имеют аналитического решения в элементарных функциях.</a:t>
+              <a:t>Уравнения с тригонометрическими, показательными и логарифмическими </a:t>
+            </a:r>
+            <a:r>
+              <a:rPr lang="ru-RU" sz="2000" b="0" u="none" strike="noStrike">
+                <a:solidFill>
+                  <a:srgbClr val="2D2D2D"/>
+                </a:solidFill>
+                <a:effectLst/>
+                <a:uFillTx/>
+                <a:latin typeface="Arial"/>
+              </a:rPr>
+              <a:t>функциями (например, sin(x) = 0.5, eˣ = 10, ln(x) = 2) также не имеют </a:t>
+            </a:r>
+            <a:r>
+              <a:rPr lang="ru-RU" sz="2000" b="0" u="none" strike="noStrike">
+                <a:solidFill>
+                  <a:srgbClr val="2D2D2D"/>
+                </a:solidFill>
+                <a:effectLst/>
+                <a:uFillTx/>
+                <a:latin typeface="Arial"/>
+              </a:rPr>
+              <a:t>аналитического решения в элементарных функциях.</a:t>
             </a:r>
             <a:endParaRPr lang="ru-RU" sz="2000" b="0" u="none" strike="noStrike">
               <a:solidFill>
@@ -7213,7 +7725,18 @@
                 <a:uFillTx/>
                 <a:latin typeface="Arial"/>
               </a:rPr>
-              <a:t>Такие уравнения решаются только численными методами — приближённо, с заданной точностью</a:t>
+              <a:t>Такие уравнения решаются только численными методами — приближённо, с </a:t>
+            </a:r>
+            <a:r>
+              <a:rPr lang="ru-RU" sz="2000" b="0" u="none" strike="noStrike">
+                <a:solidFill>
+                  <a:srgbClr val="2D2D2D"/>
+                </a:solidFill>
+                <a:effectLst/>
+                <a:uFillTx/>
+                <a:latin typeface="Arial"/>
+              </a:rPr>
+              <a:t>заданной точностью</a:t>
             </a:r>
             <a:endParaRPr lang="ru-RU" sz="2000" b="0" u="none" strike="noStrike">
               <a:solidFill>
@@ -7276,8 +7799,8 @@
         </p:nvSpPr>
         <p:spPr>
           <a:xfrm>
-            <a:off x="504000" y="225000"/>
-            <a:ext cx="9070560" cy="947520"/>
+            <a:off x="504000" y="224280"/>
+            <a:ext cx="9069840" cy="948240"/>
           </a:xfrm>
           <a:prstGeom prst="rect">
             <a:avLst/>
@@ -7310,7 +7833,18 @@
                 <a:uFillTx/>
                 <a:latin typeface="Arial"/>
               </a:rPr>
-              <a:t>Актуальность</a:t>
+              <a:t>Актуально</a:t>
+            </a:r>
+            <a:r>
+              <a:rPr lang="ru-RU" sz="3200" b="1" u="none" strike="noStrike">
+                <a:solidFill>
+                  <a:srgbClr val="1A3A5C"/>
+                </a:solidFill>
+                <a:effectLst/>
+                <a:uFillTx/>
+                <a:latin typeface="Arial"/>
+              </a:rPr>
+              <a:t>сть</a:t>
             </a:r>
             <a:r>
               <a:rPr lang="ru-RU" sz="2800" b="1" u="none" strike="noStrike">
@@ -7321,7 +7855,18 @@
                 <a:uFillTx/>
                 <a:latin typeface="Arial"/>
               </a:rPr>
-              <a:t> и проблема</a:t>
+              <a:t> и </a:t>
+            </a:r>
+            <a:r>
+              <a:rPr lang="ru-RU" sz="2800" b="1" u="none" strike="noStrike">
+                <a:solidFill>
+                  <a:srgbClr val="1A3A5C"/>
+                </a:solidFill>
+                <a:effectLst/>
+                <a:uFillTx/>
+                <a:latin typeface="Arial"/>
+              </a:rPr>
+              <a:t>проблема</a:t>
             </a:r>
             <a:endParaRPr lang="ru-RU" sz="2800" b="0" u="none" strike="noStrike">
               <a:solidFill>
@@ -7376,8 +7921,8 @@
         </p:nvSpPr>
         <p:spPr>
           <a:xfrm>
-            <a:off x="504000" y="225000"/>
-            <a:ext cx="9070560" cy="947520"/>
+            <a:off x="504000" y="224280"/>
+            <a:ext cx="9069840" cy="948240"/>
           </a:xfrm>
           <a:prstGeom prst="rect">
             <a:avLst/>
@@ -7410,7 +7955,18 @@
                 <a:uFillTx/>
                 <a:latin typeface="Arial"/>
               </a:rPr>
-              <a:t>Цель и задачи</a:t>
+              <a:t>Цель и </a:t>
+            </a:r>
+            <a:r>
+              <a:rPr lang="ru-RU" sz="3200" b="1" u="none" strike="noStrike">
+                <a:solidFill>
+                  <a:srgbClr val="1A3A5C"/>
+                </a:solidFill>
+                <a:effectLst/>
+                <a:uFillTx/>
+                <a:latin typeface="Arial"/>
+              </a:rPr>
+              <a:t>задачи</a:t>
             </a:r>
             <a:endParaRPr lang="ru-RU" sz="3200" b="0" u="none" strike="noStrike">
               <a:solidFill>
@@ -7436,7 +7992,7 @@
         <p:spPr>
           <a:xfrm>
             <a:off x="360000" y="1080000"/>
-            <a:ext cx="9358920" cy="4072320"/>
+            <a:ext cx="9358200" cy="4071600"/>
           </a:xfrm>
           <a:prstGeom prst="rect">
             <a:avLst/>
@@ -7448,7 +8004,7 @@
         </p:spPr>
         <p:txBody>
           <a:bodyPr lIns="0" tIns="0" rIns="0" bIns="0" anchor="t">
-            <a:normAutofit fontScale="85000" lnSpcReduction="9999"/>
+            <a:normAutofit lnSpcReduction="9999"/>
           </a:bodyPr>
           <a:p>
             <a:pPr indent="0" algn="just">
@@ -7456,10 +8012,10 @@
                 <a:spcPct val="100000"/>
               </a:lnSpc>
               <a:spcBef>
-                <a:spcPts val="1191"/>
+                <a:spcPts val="907"/>
               </a:spcBef>
               <a:spcAft>
-                <a:spcPts val="992"/>
+                <a:spcPts val="709"/>
               </a:spcAft>
               <a:buNone/>
               <a:tabLst>
@@ -7486,62 +8042,7 @@
                 <a:uFillTx/>
                 <a:latin typeface="Arial"/>
               </a:rPr>
-              <a:t> разработать программу для сравнения трёх численных методов и </a:t>
-            </a:r>
-            <a:r>
-              <a:rPr lang="ru-RU" sz="2000" b="0" u="none" strike="noStrike">
-                <a:solidFill>
-                  <a:srgbClr val="2D2D2D"/>
-                </a:solidFill>
-                <a:effectLst/>
-                <a:uFillTx/>
-                <a:latin typeface="Arial"/>
-              </a:rPr>
-              <a:t>	</a:t>
-            </a:r>
-            <a:r>
-              <a:rPr lang="ru-RU" sz="2000" b="0" u="none" strike="noStrike">
-                <a:solidFill>
-                  <a:srgbClr val="2D2D2D"/>
-                </a:solidFill>
-                <a:effectLst/>
-                <a:uFillTx/>
-                <a:latin typeface="Arial"/>
-              </a:rPr>
-              <a:t>	</a:t>
-            </a:r>
-            <a:r>
-              <a:rPr lang="ru-RU" sz="2000" b="0" u="none" strike="noStrike">
-                <a:solidFill>
-                  <a:srgbClr val="2D2D2D"/>
-                </a:solidFill>
-                <a:effectLst/>
-                <a:uFillTx/>
-                <a:latin typeface="Arial"/>
-              </a:rPr>
-              <a:t>	</a:t>
-            </a:r>
-            <a:r>
-              <a:rPr lang="ru-RU" sz="2000" b="0" u="none" strike="noStrike">
-                <a:solidFill>
-                  <a:srgbClr val="2D2D2D"/>
-                </a:solidFill>
-                <a:effectLst/>
-                <a:uFillTx/>
-                <a:latin typeface="Arial"/>
-              </a:rPr>
-              <a:t>	</a:t>
-            </a:r>
-            <a:r>
-              <a:rPr lang="ru-RU" sz="2000" b="0" u="none" strike="noStrike">
-                <a:solidFill>
-                  <a:srgbClr val="2D2D2D"/>
-                </a:solidFill>
-                <a:effectLst/>
-                <a:uFillTx/>
-                <a:latin typeface="Arial"/>
-              </a:rPr>
-              <a:t>    определить их эффективность.</a:t>
+              <a:t> разработать программу для сравнения трёх численных методов и определить их эффективность.</a:t>
             </a:r>
             <a:endParaRPr lang="ru-RU" sz="2000" b="0" u="none" strike="noStrike">
               <a:solidFill>
@@ -7558,10 +8059,10 @@
                 <a:spcPct val="100000"/>
               </a:lnSpc>
               <a:spcBef>
-                <a:spcPts val="1191"/>
+                <a:spcPts val="907"/>
               </a:spcBef>
               <a:spcAft>
-                <a:spcPts val="992"/>
+                <a:spcPts val="709"/>
               </a:spcAft>
               <a:buNone/>
               <a:tabLst>
@@ -7594,16 +8095,16 @@
                 <a:spcPct val="100000"/>
               </a:lnSpc>
               <a:spcBef>
-                <a:spcPts val="1191"/>
+                <a:spcPts val="907"/>
               </a:spcBef>
               <a:spcAft>
-                <a:spcPts val="992"/>
+                <a:spcPts val="709"/>
               </a:spcAft>
               <a:buClr>
                 <a:srgbClr val="000000"/>
               </a:buClr>
               <a:buFont typeface="Wingdings" charset="2"/>
-              <a:buAutoNum type="arabicPlain"/>
+              <a:buAutoNum type="arabicPeriod"/>
               <a:tabLst>
                 <a:tab pos="0" algn="l"/>
               </a:tabLst>
@@ -7634,16 +8135,16 @@
                 <a:spcPct val="100000"/>
               </a:lnSpc>
               <a:spcBef>
-                <a:spcPts val="1191"/>
+                <a:spcPts val="907"/>
               </a:spcBef>
               <a:spcAft>
-                <a:spcPts val="992"/>
+                <a:spcPts val="709"/>
               </a:spcAft>
               <a:buClr>
                 <a:srgbClr val="000000"/>
               </a:buClr>
               <a:buFont typeface="Wingdings" charset="2"/>
-              <a:buAutoNum type="arabicPlain"/>
+              <a:buAutoNum type="arabicPeriod"/>
               <a:tabLst>
                 <a:tab pos="0" algn="l"/>
               </a:tabLst>
@@ -7674,16 +8175,16 @@
                 <a:spcPct val="100000"/>
               </a:lnSpc>
               <a:spcBef>
-                <a:spcPts val="1191"/>
+                <a:spcPts val="907"/>
               </a:spcBef>
               <a:spcAft>
-                <a:spcPts val="992"/>
+                <a:spcPts val="709"/>
               </a:spcAft>
               <a:buClr>
                 <a:srgbClr val="000000"/>
               </a:buClr>
               <a:buFont typeface="Wingdings" charset="2"/>
-              <a:buAutoNum type="arabicPlain"/>
+              <a:buAutoNum type="arabicPeriod"/>
               <a:tabLst>
                 <a:tab pos="0" algn="l"/>
               </a:tabLst>
@@ -7714,16 +8215,16 @@
                 <a:spcPct val="100000"/>
               </a:lnSpc>
               <a:spcBef>
-                <a:spcPts val="1191"/>
+                <a:spcPts val="907"/>
               </a:spcBef>
               <a:spcAft>
-                <a:spcPts val="992"/>
+                <a:spcPts val="709"/>
               </a:spcAft>
               <a:buClr>
                 <a:srgbClr val="000000"/>
               </a:buClr>
               <a:buFont typeface="Wingdings" charset="2"/>
-              <a:buAutoNum type="arabicPlain"/>
+              <a:buAutoNum type="arabicPeriod"/>
               <a:tabLst>
                 <a:tab pos="0" algn="l"/>
               </a:tabLst>
@@ -7754,16 +8255,16 @@
                 <a:spcPct val="100000"/>
               </a:lnSpc>
               <a:spcBef>
-                <a:spcPts val="1191"/>
+                <a:spcPts val="907"/>
               </a:spcBef>
               <a:spcAft>
-                <a:spcPts val="992"/>
+                <a:spcPts val="709"/>
               </a:spcAft>
               <a:buClr>
                 <a:srgbClr val="000000"/>
               </a:buClr>
               <a:buFont typeface="Wingdings" charset="2"/>
-              <a:buAutoNum type="arabicPlain"/>
+              <a:buAutoNum type="arabicPeriod"/>
               <a:tabLst>
                 <a:tab pos="0" algn="l"/>
               </a:tabLst>
@@ -7794,16 +8295,16 @@
                 <a:spcPct val="100000"/>
               </a:lnSpc>
               <a:spcBef>
-                <a:spcPts val="1191"/>
+                <a:spcPts val="907"/>
               </a:spcBef>
               <a:spcAft>
-                <a:spcPts val="992"/>
+                <a:spcPts val="709"/>
               </a:spcAft>
               <a:buClr>
                 <a:srgbClr val="000000"/>
               </a:buClr>
               <a:buFont typeface="Wingdings" charset="2"/>
-              <a:buAutoNum type="arabicPlain"/>
+              <a:buAutoNum type="arabicPeriod"/>
               <a:tabLst>
                 <a:tab pos="0" algn="l"/>
               </a:tabLst>
@@ -7897,8 +8398,8 @@
         </p:nvSpPr>
         <p:spPr>
           <a:xfrm>
-            <a:off x="504000" y="225000"/>
-            <a:ext cx="9070560" cy="947520"/>
+            <a:off x="504000" y="224280"/>
+            <a:ext cx="9069840" cy="948240"/>
           </a:xfrm>
           <a:prstGeom prst="rect">
             <a:avLst/>
@@ -7931,7 +8432,51 @@
                 <a:uFillTx/>
                 <a:latin typeface="Arial"/>
               </a:rPr>
-              <a:t>Объект, предмет и гипотеза исследования</a:t>
+              <a:t>Объект, </a:t>
+            </a:r>
+            <a:r>
+              <a:rPr lang="ru-RU" sz="3200" b="1" u="none" strike="noStrike">
+                <a:solidFill>
+                  <a:srgbClr val="1A3A5C"/>
+                </a:solidFill>
+                <a:effectLst/>
+                <a:uFillTx/>
+                <a:latin typeface="Arial"/>
+              </a:rPr>
+              <a:t>предмет и </a:t>
+            </a:r>
+            <a:r>
+              <a:rPr lang="ru-RU" sz="3200" b="1" u="none" strike="noStrike">
+                <a:solidFill>
+                  <a:srgbClr val="1A3A5C"/>
+                </a:solidFill>
+                <a:effectLst/>
+                <a:uFillTx/>
+                <a:latin typeface="Arial"/>
+              </a:rPr>
+              <a:t>гипотеза </a:t>
+            </a:r>
+            <a:r>
+              <a:rPr lang="ru-RU" sz="3200" b="1" u="none" strike="noStrike">
+                <a:solidFill>
+                  <a:srgbClr val="1A3A5C"/>
+                </a:solidFill>
+                <a:effectLst/>
+                <a:uFillTx/>
+                <a:latin typeface="Arial"/>
+              </a:rPr>
+              <a:t>исследова</a:t>
+            </a:r>
+            <a:r>
+              <a:rPr lang="ru-RU" sz="3200" b="1" u="none" strike="noStrike">
+                <a:solidFill>
+                  <a:srgbClr val="1A3A5C"/>
+                </a:solidFill>
+                <a:effectLst/>
+                <a:uFillTx/>
+                <a:latin typeface="Arial"/>
+              </a:rPr>
+              <a:t>ния</a:t>
             </a:r>
             <a:endParaRPr lang="ru-RU" sz="3200" b="0" u="none" strike="noStrike">
               <a:solidFill>
@@ -7957,7 +8502,7 @@
         <p:spPr>
           <a:xfrm>
             <a:off x="429480" y="1440000"/>
-            <a:ext cx="9289800" cy="3287160"/>
+            <a:ext cx="9289080" cy="3286440"/>
           </a:xfrm>
           <a:prstGeom prst="rect">
             <a:avLst/>
@@ -8070,7 +8615,18 @@
                 <a:uFillTx/>
                 <a:latin typeface="Arial"/>
               </a:rPr>
-              <a:t> скорость сходимости и количество итераций при заданной точности.</a:t>
+              <a:t> скорость сходимости и количество итераций при </a:t>
+            </a:r>
+            <a:r>
+              <a:rPr lang="ru-RU" sz="2000" b="0" u="none" strike="noStrike">
+                <a:solidFill>
+                  <a:srgbClr val="2D2D2D"/>
+                </a:solidFill>
+                <a:effectLst/>
+                <a:uFillTx/>
+                <a:latin typeface="Arial"/>
+              </a:rPr>
+              <a:t>заданной точности.</a:t>
             </a:r>
             <a:endParaRPr lang="ru-RU" sz="2000" b="0" u="none" strike="noStrike">
               <a:solidFill>
@@ -8139,7 +8695,29 @@
                 <a:uFillTx/>
                 <a:latin typeface="Arial"/>
               </a:rPr>
-              <a:t>Если для решения уравнения использовать метод Ньютона, то количество итераций будет меньше, чем при использовании метода хорд или метода половинного деления, благодаря квадратичной сходимости.</a:t>
+              <a:t>Если для решения уравнения использовать метод </a:t>
+            </a:r>
+            <a:r>
+              <a:rPr lang="ru-RU" sz="2000" b="0" u="none" strike="noStrike">
+                <a:solidFill>
+                  <a:srgbClr val="2D2D2D"/>
+                </a:solidFill>
+                <a:effectLst/>
+                <a:uFillTx/>
+                <a:latin typeface="Arial"/>
+              </a:rPr>
+              <a:t>Ньютона, то количество итераций будет меньше, чем при использовании метода </a:t>
+            </a:r>
+            <a:r>
+              <a:rPr lang="ru-RU" sz="2000" b="0" u="none" strike="noStrike">
+                <a:solidFill>
+                  <a:srgbClr val="2D2D2D"/>
+                </a:solidFill>
+                <a:effectLst/>
+                <a:uFillTx/>
+                <a:latin typeface="Arial"/>
+              </a:rPr>
+              <a:t>хорд или метода половинного деления, благодаря квадратичной сходимости.</a:t>
             </a:r>
             <a:endParaRPr lang="ru-RU" sz="2000" b="0" u="none" strike="noStrike">
               <a:solidFill>
@@ -8194,8 +8772,8 @@
         </p:nvSpPr>
         <p:spPr>
           <a:xfrm>
-            <a:off x="504000" y="225000"/>
-            <a:ext cx="9070560" cy="947520"/>
+            <a:off x="504000" y="224280"/>
+            <a:ext cx="9069840" cy="948240"/>
           </a:xfrm>
           <a:prstGeom prst="rect">
             <a:avLst/>
@@ -8228,7 +8806,18 @@
                 <a:uFillTx/>
                 <a:latin typeface="Arial"/>
               </a:rPr>
-              <a:t>Основные понятия</a:t>
+              <a:t>Основные </a:t>
+            </a:r>
+            <a:r>
+              <a:rPr lang="ru-RU" sz="3200" b="1" u="none" strike="noStrike">
+                <a:solidFill>
+                  <a:srgbClr val="1A3A5C"/>
+                </a:solidFill>
+                <a:effectLst/>
+                <a:uFillTx/>
+                <a:latin typeface="Arial"/>
+              </a:rPr>
+              <a:t>понятия</a:t>
             </a:r>
             <a:endParaRPr lang="ru-RU" sz="3200" b="0" u="none" strike="noStrike">
               <a:solidFill>
@@ -8254,7 +8843,7 @@
         <p:spPr>
           <a:xfrm>
             <a:off x="504000" y="1326600"/>
-            <a:ext cx="9070560" cy="3384720"/>
+            <a:ext cx="9069840" cy="3384000"/>
           </a:xfrm>
           <a:prstGeom prst="rect">
             <a:avLst/>
@@ -8568,7 +9157,51 @@
                 <a:uFillTx/>
                 <a:latin typeface="Arial"/>
               </a:rPr>
-              <a:t> – условие остановки: |b-a| &lt; ε или |xₙ₊₁ - xₙ| &lt; ε</a:t>
+              <a:t> – условие остановки: |b-a| &lt; ε или |x</a:t>
+            </a:r>
+            <a:r>
+              <a:rPr lang="ru-RU" sz="2000" b="0" u="none" strike="noStrike" baseline="-8000">
+                <a:solidFill>
+                  <a:srgbClr val="2D2D2D"/>
+                </a:solidFill>
+                <a:effectLst/>
+                <a:uFillTx/>
+                <a:latin typeface="Arial"/>
+              </a:rPr>
+              <a:t>n+1</a:t>
+            </a:r>
+            <a:r>
+              <a:rPr lang="ru-RU" sz="2000" b="0" u="none" strike="noStrike">
+                <a:solidFill>
+                  <a:srgbClr val="2D2D2D"/>
+                </a:solidFill>
+                <a:effectLst/>
+                <a:uFillTx/>
+                <a:latin typeface="Arial"/>
+              </a:rPr>
+              <a:t> - x</a:t>
+            </a:r>
+            <a:r>
+              <a:rPr lang="ru-RU" sz="2000" b="0" u="none" strike="noStrike" baseline="-8000">
+                <a:solidFill>
+                  <a:srgbClr val="2D2D2D"/>
+                </a:solidFill>
+                <a:effectLst/>
+                <a:uFillTx/>
+                <a:latin typeface="Arial"/>
+              </a:rPr>
+              <a:t>n</a:t>
+            </a:r>
+            <a:r>
+              <a:rPr lang="ru-RU" sz="2000" b="0" u="none" strike="noStrike">
+                <a:solidFill>
+                  <a:srgbClr val="2D2D2D"/>
+                </a:solidFill>
+                <a:effectLst/>
+                <a:uFillTx/>
+                <a:latin typeface="Arial"/>
+              </a:rPr>
+              <a:t>| &lt; ε</a:t>
             </a:r>
             <a:endParaRPr lang="ru-RU" sz="2000" b="0" u="none" strike="noStrike">
               <a:solidFill>
@@ -8648,8 +9281,8 @@
         </p:nvSpPr>
         <p:spPr>
           <a:xfrm>
-            <a:off x="504000" y="-720"/>
-            <a:ext cx="9070560" cy="947520"/>
+            <a:off x="504000" y="-1440"/>
+            <a:ext cx="9069840" cy="948240"/>
           </a:xfrm>
           <a:prstGeom prst="rect">
             <a:avLst/>
@@ -8682,7 +9315,51 @@
                 <a:uFillTx/>
                 <a:latin typeface="Arial"/>
               </a:rPr>
-              <a:t>Метод бисекции (половинного деления)</a:t>
+              <a:t>Метод </a:t>
+            </a:r>
+            <a:r>
+              <a:rPr lang="ru-RU" sz="3200" b="1" u="none" strike="noStrike">
+                <a:solidFill>
+                  <a:srgbClr val="1A3A5C"/>
+                </a:solidFill>
+                <a:effectLst/>
+                <a:uFillTx/>
+                <a:latin typeface="Arial"/>
+              </a:rPr>
+              <a:t>бисекции </a:t>
+            </a:r>
+            <a:r>
+              <a:rPr lang="ru-RU" sz="3200" b="1" u="none" strike="noStrike">
+                <a:solidFill>
+                  <a:srgbClr val="1A3A5C"/>
+                </a:solidFill>
+                <a:effectLst/>
+                <a:uFillTx/>
+                <a:latin typeface="Arial"/>
+              </a:rPr>
+              <a:t>(половинн</a:t>
+            </a:r>
+            <a:r>
+              <a:rPr lang="ru-RU" sz="3200" b="1" u="none" strike="noStrike">
+                <a:solidFill>
+                  <a:srgbClr val="1A3A5C"/>
+                </a:solidFill>
+                <a:effectLst/>
+                <a:uFillTx/>
+                <a:latin typeface="Arial"/>
+              </a:rPr>
+              <a:t>ого </a:t>
+            </a:r>
+            <a:r>
+              <a:rPr lang="ru-RU" sz="3200" b="1" u="none" strike="noStrike">
+                <a:solidFill>
+                  <a:srgbClr val="1A3A5C"/>
+                </a:solidFill>
+                <a:effectLst/>
+                <a:uFillTx/>
+                <a:latin typeface="Arial"/>
+              </a:rPr>
+              <a:t>деления)</a:t>
             </a:r>
             <a:endParaRPr lang="ru-RU" sz="3200" b="0" u="none" strike="noStrike">
               <a:solidFill>
@@ -8708,7 +9385,7 @@
         <p:spPr>
           <a:xfrm>
             <a:off x="306360" y="946800"/>
-            <a:ext cx="9300240" cy="3287160"/>
+            <a:ext cx="9299520" cy="3286440"/>
           </a:xfrm>
           <a:prstGeom prst="rect">
             <a:avLst/>
@@ -8950,7 +9627,7 @@
         <p:spPr>
           <a:xfrm>
             <a:off x="1702440" y="3006720"/>
-            <a:ext cx="3780360" cy="2437200"/>
+            <a:ext cx="3779640" cy="2436480"/>
           </a:xfrm>
           <a:prstGeom prst="rect">
             <a:avLst/>
@@ -9003,8 +9680,8 @@
         </p:nvSpPr>
         <p:spPr>
           <a:xfrm>
-            <a:off x="504000" y="225000"/>
-            <a:ext cx="9070560" cy="947520"/>
+            <a:off x="504000" y="224280"/>
+            <a:ext cx="9069840" cy="948240"/>
           </a:xfrm>
           <a:prstGeom prst="rect">
             <a:avLst/>
@@ -9037,7 +9714,29 @@
                 <a:uFillTx/>
                 <a:latin typeface="Arial"/>
               </a:rPr>
-              <a:t>Реализация метода бисекции</a:t>
+              <a:t>Реализаци</a:t>
+            </a:r>
+            <a:r>
+              <a:rPr lang="ru-RU" sz="3200" b="1" u="none" strike="noStrike">
+                <a:solidFill>
+                  <a:srgbClr val="1A3A5C"/>
+                </a:solidFill>
+                <a:effectLst/>
+                <a:uFillTx/>
+                <a:latin typeface="Arial"/>
+              </a:rPr>
+              <a:t>я метода </a:t>
+            </a:r>
+            <a:r>
+              <a:rPr lang="ru-RU" sz="3200" b="1" u="none" strike="noStrike">
+                <a:solidFill>
+                  <a:srgbClr val="1A3A5C"/>
+                </a:solidFill>
+                <a:effectLst/>
+                <a:uFillTx/>
+                <a:latin typeface="Arial"/>
+              </a:rPr>
+              <a:t>бисекции</a:t>
             </a:r>
             <a:endParaRPr lang="ru-RU" sz="3200" b="0" u="none" strike="noStrike">
               <a:solidFill>
@@ -9063,7 +9762,7 @@
         <p:spPr>
           <a:xfrm>
             <a:off x="720000" y="1452240"/>
-            <a:ext cx="8671680" cy="3226680"/>
+            <a:ext cx="8670960" cy="3225960"/>
           </a:xfrm>
           <a:prstGeom prst="rect">
             <a:avLst/>
@@ -9116,8 +9815,8 @@
         </p:nvSpPr>
         <p:spPr>
           <a:xfrm>
-            <a:off x="504000" y="-720"/>
-            <a:ext cx="9070560" cy="947520"/>
+            <a:off x="504000" y="-1440"/>
+            <a:ext cx="9069840" cy="948240"/>
           </a:xfrm>
           <a:prstGeom prst="rect">
             <a:avLst/>
@@ -9150,7 +9849,29 @@
                 <a:uFillTx/>
                 <a:latin typeface="Arial"/>
               </a:rPr>
-              <a:t>Метод хорд (секущих)</a:t>
+              <a:t>Метод </a:t>
+            </a:r>
+            <a:r>
+              <a:rPr lang="ru-RU" sz="3200" b="1" u="none" strike="noStrike">
+                <a:solidFill>
+                  <a:srgbClr val="1A3A5C"/>
+                </a:solidFill>
+                <a:effectLst/>
+                <a:uFillTx/>
+                <a:latin typeface="Arial"/>
+              </a:rPr>
+              <a:t>хорд </a:t>
+            </a:r>
+            <a:r>
+              <a:rPr lang="ru-RU" sz="3200" b="1" u="none" strike="noStrike">
+                <a:solidFill>
+                  <a:srgbClr val="1A3A5C"/>
+                </a:solidFill>
+                <a:effectLst/>
+                <a:uFillTx/>
+                <a:latin typeface="Arial"/>
+              </a:rPr>
+              <a:t>(секущих)</a:t>
             </a:r>
             <a:endParaRPr lang="ru-RU" sz="3200" b="0" u="none" strike="noStrike">
               <a:solidFill>
@@ -9176,7 +9897,7 @@
         <p:spPr>
           <a:xfrm>
             <a:off x="294840" y="946800"/>
-            <a:ext cx="9311400" cy="3287160"/>
+            <a:ext cx="9310680" cy="3286440"/>
           </a:xfrm>
           <a:prstGeom prst="rect">
             <a:avLst/>
@@ -9226,7 +9947,161 @@
                 <a:uFillTx/>
                 <a:latin typeface="Arial"/>
               </a:rPr>
-              <a:t> xₙ₊₁ = xₙ − f(xₙ) · (xₙ − xₙ₋₁) / (f(xₙ) − f(xₙ₋₁))</a:t>
+              <a:t> x</a:t>
+            </a:r>
+            <a:r>
+              <a:rPr lang="ru-RU" sz="2000" b="0" u="none" strike="noStrike" baseline="-8000">
+                <a:solidFill>
+                  <a:srgbClr val="2D2D2D"/>
+                </a:solidFill>
+                <a:effectLst/>
+                <a:uFillTx/>
+                <a:latin typeface="Arial"/>
+              </a:rPr>
+              <a:t>n+1</a:t>
+            </a:r>
+            <a:r>
+              <a:rPr lang="ru-RU" sz="2000" b="0" u="none" strike="noStrike">
+                <a:solidFill>
+                  <a:srgbClr val="2D2D2D"/>
+                </a:solidFill>
+                <a:effectLst/>
+                <a:uFillTx/>
+                <a:latin typeface="Arial"/>
+              </a:rPr>
+              <a:t> = x</a:t>
+            </a:r>
+            <a:r>
+              <a:rPr lang="ru-RU" sz="2000" b="0" u="none" strike="noStrike" baseline="-8000">
+                <a:solidFill>
+                  <a:srgbClr val="2D2D2D"/>
+                </a:solidFill>
+                <a:effectLst/>
+                <a:uFillTx/>
+                <a:latin typeface="Arial"/>
+              </a:rPr>
+              <a:t>n</a:t>
+            </a:r>
+            <a:r>
+              <a:rPr lang="ru-RU" sz="2000" b="0" u="none" strike="noStrike">
+                <a:solidFill>
+                  <a:srgbClr val="2D2D2D"/>
+                </a:solidFill>
+                <a:effectLst/>
+                <a:uFillTx/>
+                <a:latin typeface="Arial"/>
+              </a:rPr>
+              <a:t> − f(x</a:t>
+            </a:r>
+            <a:r>
+              <a:rPr lang="ru-RU" sz="2000" b="0" u="none" strike="noStrike" baseline="-8000">
+                <a:solidFill>
+                  <a:srgbClr val="2D2D2D"/>
+                </a:solidFill>
+                <a:effectLst/>
+                <a:uFillTx/>
+                <a:latin typeface="Arial"/>
+              </a:rPr>
+              <a:t>n</a:t>
+            </a:r>
+            <a:r>
+              <a:rPr lang="ru-RU" sz="2000" b="0" u="none" strike="noStrike">
+                <a:solidFill>
+                  <a:srgbClr val="2D2D2D"/>
+                </a:solidFill>
+                <a:effectLst/>
+                <a:uFillTx/>
+                <a:latin typeface="Arial"/>
+              </a:rPr>
+              <a:t>) · (x</a:t>
+            </a:r>
+            <a:r>
+              <a:rPr lang="ru-RU" sz="2000" b="0" u="none" strike="noStrike" baseline="-8000">
+                <a:solidFill>
+                  <a:srgbClr val="2D2D2D"/>
+                </a:solidFill>
+                <a:effectLst/>
+                <a:uFillTx/>
+                <a:latin typeface="Arial"/>
+              </a:rPr>
+              <a:t>n</a:t>
+            </a:r>
+            <a:r>
+              <a:rPr lang="ru-RU" sz="2000" b="0" u="none" strike="noStrike">
+                <a:solidFill>
+                  <a:srgbClr val="2D2D2D"/>
+                </a:solidFill>
+                <a:effectLst/>
+                <a:uFillTx/>
+                <a:latin typeface="Arial"/>
+              </a:rPr>
+              <a:t> − x</a:t>
+            </a:r>
+            <a:r>
+              <a:rPr lang="ru-RU" sz="2000" b="0" u="none" strike="noStrike" baseline="-8000">
+                <a:solidFill>
+                  <a:srgbClr val="2D2D2D"/>
+                </a:solidFill>
+                <a:effectLst/>
+                <a:uFillTx/>
+                <a:latin typeface="Arial"/>
+              </a:rPr>
+              <a:t>n-1</a:t>
+            </a:r>
+            <a:r>
+              <a:rPr lang="ru-RU" sz="2000" b="0" u="none" strike="noStrike">
+                <a:solidFill>
+                  <a:srgbClr val="2D2D2D"/>
+                </a:solidFill>
+                <a:effectLst/>
+                <a:uFillTx/>
+                <a:latin typeface="Arial"/>
+              </a:rPr>
+              <a:t>) / (f(x</a:t>
+            </a:r>
+            <a:r>
+              <a:rPr lang="ru-RU" sz="2000" b="0" u="none" strike="noStrike" baseline="-8000">
+                <a:solidFill>
+                  <a:srgbClr val="2D2D2D"/>
+                </a:solidFill>
+                <a:effectLst/>
+                <a:uFillTx/>
+                <a:latin typeface="Arial"/>
+              </a:rPr>
+              <a:t>n</a:t>
+            </a:r>
+            <a:r>
+              <a:rPr lang="ru-RU" sz="2000" b="0" u="none" strike="noStrike">
+                <a:solidFill>
+                  <a:srgbClr val="2D2D2D"/>
+                </a:solidFill>
+                <a:effectLst/>
+                <a:uFillTx/>
+                <a:latin typeface="Arial"/>
+              </a:rPr>
+              <a:t>) − f(x</a:t>
+            </a:r>
+            <a:r>
+              <a:rPr lang="ru-RU" sz="2000" b="0" u="none" strike="noStrike" baseline="-8000">
+                <a:solidFill>
+                  <a:srgbClr val="2D2D2D"/>
+                </a:solidFill>
+                <a:effectLst/>
+                <a:uFillTx/>
+                <a:latin typeface="Arial"/>
+              </a:rPr>
+              <a:t>n-1</a:t>
+            </a:r>
+            <a:r>
+              <a:rPr lang="ru-RU" sz="2000" b="0" u="none" strike="noStrike">
+                <a:solidFill>
+                  <a:srgbClr val="2D2D2D"/>
+                </a:solidFill>
+                <a:effectLst/>
+                <a:uFillTx/>
+                <a:latin typeface="Arial"/>
+              </a:rPr>
+              <a:t>))</a:t>
             </a:r>
             <a:endParaRPr lang="ru-RU" sz="2000" b="0" u="none" strike="noStrike">
               <a:solidFill>
@@ -9371,7 +10246,7 @@
         <p:spPr>
           <a:xfrm>
             <a:off x="1266480" y="2393640"/>
-            <a:ext cx="3847320" cy="3195000"/>
+            <a:ext cx="3846600" cy="3194280"/>
           </a:xfrm>
           <a:prstGeom prst="rect">
             <a:avLst/>
@@ -9395,7 +10270,7 @@
         <p:spPr>
           <a:xfrm>
             <a:off x="5613120" y="2406600"/>
-            <a:ext cx="3845880" cy="3034440"/>
+            <a:ext cx="3845160" cy="3033720"/>
           </a:xfrm>
           <a:prstGeom prst="rect">
             <a:avLst/>
@@ -9448,8 +10323,8 @@
         </p:nvSpPr>
         <p:spPr>
           <a:xfrm>
-            <a:off x="504000" y="225000"/>
-            <a:ext cx="9070560" cy="947520"/>
+            <a:off x="504000" y="224280"/>
+            <a:ext cx="9069840" cy="948240"/>
           </a:xfrm>
           <a:prstGeom prst="rect">
             <a:avLst/>
@@ -9482,7 +10357,29 @@
                 <a:uFillTx/>
                 <a:latin typeface="Arial"/>
               </a:rPr>
-              <a:t>Реализация метода хорд</a:t>
+              <a:t>Реализаци</a:t>
+            </a:r>
+            <a:r>
+              <a:rPr lang="ru-RU" sz="3200" b="1" u="none" strike="noStrike">
+                <a:solidFill>
+                  <a:srgbClr val="1A3A5C"/>
+                </a:solidFill>
+                <a:effectLst/>
+                <a:uFillTx/>
+                <a:latin typeface="Arial"/>
+              </a:rPr>
+              <a:t>я метода </a:t>
+            </a:r>
+            <a:r>
+              <a:rPr lang="ru-RU" sz="3200" b="1" u="none" strike="noStrike">
+                <a:solidFill>
+                  <a:srgbClr val="1A3A5C"/>
+                </a:solidFill>
+                <a:effectLst/>
+                <a:uFillTx/>
+                <a:latin typeface="Arial"/>
+              </a:rPr>
+              <a:t>хорд</a:t>
             </a:r>
             <a:endParaRPr lang="ru-RU" sz="3200" b="0" u="none" strike="noStrike">
               <a:solidFill>
@@ -9508,7 +10405,7 @@
         <p:spPr>
           <a:xfrm>
             <a:off x="720000" y="1260000"/>
-            <a:ext cx="8712000" cy="4141080"/>
+            <a:ext cx="8711280" cy="4140360"/>
           </a:xfrm>
           <a:prstGeom prst="rect">
             <a:avLst/>
